--- a/slides/add_py_2026_en.pptx
+++ b/slides/add_py_2026_en.pptx
@@ -37,9 +37,14 @@
     <p:sldId id="285" r:id="rId31"/>
     <p:sldId id="286" r:id="rId32"/>
     <p:sldId id="287" r:id="rId33"/>
+    <p:sldId id="288" r:id="rId34"/>
+    <p:sldId id="289" r:id="rId35"/>
+    <p:sldId id="290" r:id="rId36"/>
+    <p:sldId id="291" r:id="rId37"/>
+    <p:sldId id="292" r:id="rId38"/>
   </p:sldIdLst>
   <p:notesMasterIdLst>
-    <p:notesMasterId r:id="rId34"/>
+    <p:notesMasterId r:id="rId39"/>
   </p:notesMasterIdLst>
   <p:sldSz cx="9144000" cy="6858000"/>
   <p:notesSz cx="6858000" cy="9144000"/>
@@ -533,7 +538,7 @@
           <a:p>
             <a:r>
               <a:rPr lang="en-US" dirty="0"/>
-              <a:t>The add.py part of the first lecture, updated for version 2.1. The module is refreshed every year; 2.x is the largest change since 1.2.</a:t>
+              <a:t>The add.py part of the first lecture, updated for version 2.0 -- for students and for anyone who wants to build 3D models from code. The module is refreshed every year; 2.0 is the largest change since 1.2.</a:t>
             </a:r>
             <a:endParaRPr lang="en-US" dirty="0"/>
           </a:p>
@@ -1501,7 +1506,7 @@
           <a:p>
             <a:r>
               <a:rPr lang="en-US" dirty="0"/>
-              <a:t>The key message: nothing has to be rewritten.</a:t>
+              <a:t>The key message: nothing has to be rewritten. For students and for anyone interested.</a:t>
             </a:r>
             <a:endParaRPr lang="en-US" dirty="0"/>
           </a:p>
@@ -2293,7 +2298,7 @@
           <a:p>
             <a:r>
               <a:rPr lang="en-US" dirty="0"/>
-              <a:t/>
+              <a:t>Example 36 shows the same sphere three ways: the Maple cube-sphere, a ball of blocks, the geodesic one.</a:t>
             </a:r>
             <a:endParaRPr lang="en-US" dirty="0"/>
           </a:p>
@@ -2557,7 +2562,7 @@
           <a:p>
             <a:r>
               <a:rPr lang="en-US" dirty="0"/>
-              <a:t>30 example programs; every public function is used by at least one of them (python3 tools/coverage.py).</a:t>
+              <a:t/>
             </a:r>
             <a:endParaRPr lang="en-US" dirty="0"/>
           </a:p>
@@ -2733,7 +2738,7 @@
           <a:p>
             <a:r>
               <a:rPr lang="en-US" dirty="0"/>
-              <a:t>For students: start with examples/01_first_model.py, then 02_primitives.py. For the assignment, examples 06-16 and the complete models 22-33 are the most useful.</a:t>
+              <a:t/>
             </a:r>
             <a:endParaRPr lang="en-US" dirty="0"/>
           </a:p>
@@ -2757,6 +2762,446 @@
             <a:fld id="{F7021451-1387-4CA6-816F-3879F97B5CBC}" type="slidenum">
               <a:rPr lang="en-US"/>
               <a:t>32</a:t>
+            </a:fld>
+            <a:endParaRPr lang="en-US"/>
+          </a:p>
+        </p:txBody>
+      </p:sp>
+    </p:spTree>
+    <p:extLst>
+      <p:ext uri="{BB962C8B-B14F-4D97-AF65-F5344CB8AC3E}">
+        <p14:creationId xmlns:p14="http://schemas.microsoft.com/office/powerpoint/2010/main" val="1024086991"/>
+      </p:ext>
+    </p:extLst>
+  </p:cSld>
+  <p:clrMapOvr>
+    <a:masterClrMapping/>
+  </p:clrMapOvr>
+</p:notes>
+</file>
+
+<file path=ppt/notesSlides/notesSlide33.xml><?xml version="1.0" encoding="utf-8"?>
+<p:notes xmlns:a="http://schemas.openxmlformats.org/drawingml/2006/main" xmlns:r="http://schemas.openxmlformats.org/officeDocument/2006/relationships" xmlns:p="http://schemas.openxmlformats.org/presentationml/2006/main">
+  <p:cSld>
+    <p:spTree>
+      <p:nvGrpSpPr>
+        <p:cNvPr id="1" name=""/>
+        <p:cNvGrpSpPr/>
+        <p:nvPr/>
+      </p:nvGrpSpPr>
+      <p:grpSpPr>
+        <a:xfrm>
+          <a:off x="0" y="0"/>
+          <a:ext cx="0" cy="0"/>
+          <a:chOff x="0" y="0"/>
+          <a:chExt cx="0" cy="0"/>
+        </a:xfrm>
+      </p:grpSpPr>
+      <p:sp>
+        <p:nvSpPr>
+          <p:cNvPr id="2" name="Slide Image Placeholder 1"/>
+          <p:cNvSpPr>
+            <a:spLocks noGrp="1" noRot="1" noChangeAspect="1"/>
+          </p:cNvSpPr>
+          <p:nvPr>
+            <p:ph type="sldImg"/>
+          </p:nvPr>
+        </p:nvSpPr>
+        <p:spPr/>
+      </p:sp>
+      <p:sp>
+        <p:nvSpPr>
+          <p:cNvPr id="3" name="Notes Placeholder 2"/>
+          <p:cNvSpPr>
+            <a:spLocks noGrp="1"/>
+          </p:cNvSpPr>
+          <p:nvPr>
+            <p:ph type="body" idx="1"/>
+          </p:nvPr>
+        </p:nvSpPr>
+        <p:spPr/>
+        <p:txBody>
+          <a:bodyPr/>
+          <a:lstStyle/>
+          <a:p>
+            <a:r>
+              <a:rPr lang="en-US" dirty="0"/>
+              <a:t/>
+            </a:r>
+            <a:endParaRPr lang="en-US" dirty="0"/>
+          </a:p>
+        </p:txBody>
+      </p:sp>
+      <p:sp>
+        <p:nvSpPr>
+          <p:cNvPr id="4" name="Slide Number Placeholder 3"/>
+          <p:cNvSpPr>
+            <a:spLocks noGrp="1"/>
+          </p:cNvSpPr>
+          <p:nvPr>
+            <p:ph type="sldNum" sz="quarter" idx="10"/>
+          </p:nvPr>
+        </p:nvSpPr>
+        <p:spPr/>
+        <p:txBody>
+          <a:bodyPr/>
+          <a:lstStyle/>
+          <a:p>
+            <a:fld id="{F7021451-1387-4CA6-816F-3879F97B5CBC}" type="slidenum">
+              <a:rPr lang="en-US"/>
+              <a:t>33</a:t>
+            </a:fld>
+            <a:endParaRPr lang="en-US"/>
+          </a:p>
+        </p:txBody>
+      </p:sp>
+    </p:spTree>
+    <p:extLst>
+      <p:ext uri="{BB962C8B-B14F-4D97-AF65-F5344CB8AC3E}">
+        <p14:creationId xmlns:p14="http://schemas.microsoft.com/office/powerpoint/2010/main" val="1024086991"/>
+      </p:ext>
+    </p:extLst>
+  </p:cSld>
+  <p:clrMapOvr>
+    <a:masterClrMapping/>
+  </p:clrMapOvr>
+</p:notes>
+</file>
+
+<file path=ppt/notesSlides/notesSlide34.xml><?xml version="1.0" encoding="utf-8"?>
+<p:notes xmlns:a="http://schemas.openxmlformats.org/drawingml/2006/main" xmlns:r="http://schemas.openxmlformats.org/officeDocument/2006/relationships" xmlns:p="http://schemas.openxmlformats.org/presentationml/2006/main">
+  <p:cSld>
+    <p:spTree>
+      <p:nvGrpSpPr>
+        <p:cNvPr id="1" name=""/>
+        <p:cNvGrpSpPr/>
+        <p:nvPr/>
+      </p:nvGrpSpPr>
+      <p:grpSpPr>
+        <a:xfrm>
+          <a:off x="0" y="0"/>
+          <a:ext cx="0" cy="0"/>
+          <a:chOff x="0" y="0"/>
+          <a:chExt cx="0" cy="0"/>
+        </a:xfrm>
+      </p:grpSpPr>
+      <p:sp>
+        <p:nvSpPr>
+          <p:cNvPr id="2" name="Slide Image Placeholder 1"/>
+          <p:cNvSpPr>
+            <a:spLocks noGrp="1" noRot="1" noChangeAspect="1"/>
+          </p:cNvSpPr>
+          <p:nvPr>
+            <p:ph type="sldImg"/>
+          </p:nvPr>
+        </p:nvSpPr>
+        <p:spPr/>
+      </p:sp>
+      <p:sp>
+        <p:nvSpPr>
+          <p:cNvPr id="3" name="Notes Placeholder 2"/>
+          <p:cNvSpPr>
+            <a:spLocks noGrp="1"/>
+          </p:cNvSpPr>
+          <p:nvPr>
+            <p:ph type="body" idx="1"/>
+          </p:nvPr>
+        </p:nvSpPr>
+        <p:spPr/>
+        <p:txBody>
+          <a:bodyPr/>
+          <a:lstStyle/>
+          <a:p>
+            <a:r>
+              <a:rPr lang="en-US" dirty="0"/>
+              <a:t/>
+            </a:r>
+            <a:endParaRPr lang="en-US" dirty="0"/>
+          </a:p>
+        </p:txBody>
+      </p:sp>
+      <p:sp>
+        <p:nvSpPr>
+          <p:cNvPr id="4" name="Slide Number Placeholder 3"/>
+          <p:cNvSpPr>
+            <a:spLocks noGrp="1"/>
+          </p:cNvSpPr>
+          <p:nvPr>
+            <p:ph type="sldNum" sz="quarter" idx="10"/>
+          </p:nvPr>
+        </p:nvSpPr>
+        <p:spPr/>
+        <p:txBody>
+          <a:bodyPr/>
+          <a:lstStyle/>
+          <a:p>
+            <a:fld id="{F7021451-1387-4CA6-816F-3879F97B5CBC}" type="slidenum">
+              <a:rPr lang="en-US"/>
+              <a:t>34</a:t>
+            </a:fld>
+            <a:endParaRPr lang="en-US"/>
+          </a:p>
+        </p:txBody>
+      </p:sp>
+    </p:spTree>
+    <p:extLst>
+      <p:ext uri="{BB962C8B-B14F-4D97-AF65-F5344CB8AC3E}">
+        <p14:creationId xmlns:p14="http://schemas.microsoft.com/office/powerpoint/2010/main" val="1024086991"/>
+      </p:ext>
+    </p:extLst>
+  </p:cSld>
+  <p:clrMapOvr>
+    <a:masterClrMapping/>
+  </p:clrMapOvr>
+</p:notes>
+</file>
+
+<file path=ppt/notesSlides/notesSlide35.xml><?xml version="1.0" encoding="utf-8"?>
+<p:notes xmlns:a="http://schemas.openxmlformats.org/drawingml/2006/main" xmlns:r="http://schemas.openxmlformats.org/officeDocument/2006/relationships" xmlns:p="http://schemas.openxmlformats.org/presentationml/2006/main">
+  <p:cSld>
+    <p:spTree>
+      <p:nvGrpSpPr>
+        <p:cNvPr id="1" name=""/>
+        <p:cNvGrpSpPr/>
+        <p:nvPr/>
+      </p:nvGrpSpPr>
+      <p:grpSpPr>
+        <a:xfrm>
+          <a:off x="0" y="0"/>
+          <a:ext cx="0" cy="0"/>
+          <a:chOff x="0" y="0"/>
+          <a:chExt cx="0" cy="0"/>
+        </a:xfrm>
+      </p:grpSpPr>
+      <p:sp>
+        <p:nvSpPr>
+          <p:cNvPr id="2" name="Slide Image Placeholder 1"/>
+          <p:cNvSpPr>
+            <a:spLocks noGrp="1" noRot="1" noChangeAspect="1"/>
+          </p:cNvSpPr>
+          <p:nvPr>
+            <p:ph type="sldImg"/>
+          </p:nvPr>
+        </p:nvSpPr>
+        <p:spPr/>
+      </p:sp>
+      <p:sp>
+        <p:nvSpPr>
+          <p:cNvPr id="3" name="Notes Placeholder 2"/>
+          <p:cNvSpPr>
+            <a:spLocks noGrp="1"/>
+          </p:cNvSpPr>
+          <p:nvPr>
+            <p:ph type="body" idx="1"/>
+          </p:nvPr>
+        </p:nvSpPr>
+        <p:spPr/>
+        <p:txBody>
+          <a:bodyPr/>
+          <a:lstStyle/>
+          <a:p>
+            <a:r>
+              <a:rPr lang="en-US" dirty="0"/>
+              <a:t>42 example programs; every public function is used by at least one of them (python3 tools/coverage.py), and every model fits the Sketchfab limits.</a:t>
+            </a:r>
+            <a:endParaRPr lang="en-US" dirty="0"/>
+          </a:p>
+        </p:txBody>
+      </p:sp>
+      <p:sp>
+        <p:nvSpPr>
+          <p:cNvPr id="4" name="Slide Number Placeholder 3"/>
+          <p:cNvSpPr>
+            <a:spLocks noGrp="1"/>
+          </p:cNvSpPr>
+          <p:nvPr>
+            <p:ph type="sldNum" sz="quarter" idx="10"/>
+          </p:nvPr>
+        </p:nvSpPr>
+        <p:spPr/>
+        <p:txBody>
+          <a:bodyPr/>
+          <a:lstStyle/>
+          <a:p>
+            <a:fld id="{F7021451-1387-4CA6-816F-3879F97B5CBC}" type="slidenum">
+              <a:rPr lang="en-US"/>
+              <a:t>35</a:t>
+            </a:fld>
+            <a:endParaRPr lang="en-US"/>
+          </a:p>
+        </p:txBody>
+      </p:sp>
+    </p:spTree>
+    <p:extLst>
+      <p:ext uri="{BB962C8B-B14F-4D97-AF65-F5344CB8AC3E}">
+        <p14:creationId xmlns:p14="http://schemas.microsoft.com/office/powerpoint/2010/main" val="1024086991"/>
+      </p:ext>
+    </p:extLst>
+  </p:cSld>
+  <p:clrMapOvr>
+    <a:masterClrMapping/>
+  </p:clrMapOvr>
+</p:notes>
+</file>
+
+<file path=ppt/notesSlides/notesSlide36.xml><?xml version="1.0" encoding="utf-8"?>
+<p:notes xmlns:a="http://schemas.openxmlformats.org/drawingml/2006/main" xmlns:r="http://schemas.openxmlformats.org/officeDocument/2006/relationships" xmlns:p="http://schemas.openxmlformats.org/presentationml/2006/main">
+  <p:cSld>
+    <p:spTree>
+      <p:nvGrpSpPr>
+        <p:cNvPr id="1" name=""/>
+        <p:cNvGrpSpPr/>
+        <p:nvPr/>
+      </p:nvGrpSpPr>
+      <p:grpSpPr>
+        <a:xfrm>
+          <a:off x="0" y="0"/>
+          <a:ext cx="0" cy="0"/>
+          <a:chOff x="0" y="0"/>
+          <a:chExt cx="0" cy="0"/>
+        </a:xfrm>
+      </p:grpSpPr>
+      <p:sp>
+        <p:nvSpPr>
+          <p:cNvPr id="2" name="Slide Image Placeholder 1"/>
+          <p:cNvSpPr>
+            <a:spLocks noGrp="1" noRot="1" noChangeAspect="1"/>
+          </p:cNvSpPr>
+          <p:nvPr>
+            <p:ph type="sldImg"/>
+          </p:nvPr>
+        </p:nvSpPr>
+        <p:spPr/>
+      </p:sp>
+      <p:sp>
+        <p:nvSpPr>
+          <p:cNvPr id="3" name="Notes Placeholder 2"/>
+          <p:cNvSpPr>
+            <a:spLocks noGrp="1"/>
+          </p:cNvSpPr>
+          <p:nvPr>
+            <p:ph type="body" idx="1"/>
+          </p:nvPr>
+        </p:nvSpPr>
+        <p:spPr/>
+        <p:txBody>
+          <a:bodyPr/>
+          <a:lstStyle/>
+          <a:p>
+            <a:r>
+              <a:rPr lang="en-US" dirty="0"/>
+              <a:t/>
+            </a:r>
+            <a:endParaRPr lang="en-US" dirty="0"/>
+          </a:p>
+        </p:txBody>
+      </p:sp>
+      <p:sp>
+        <p:nvSpPr>
+          <p:cNvPr id="4" name="Slide Number Placeholder 3"/>
+          <p:cNvSpPr>
+            <a:spLocks noGrp="1"/>
+          </p:cNvSpPr>
+          <p:nvPr>
+            <p:ph type="sldNum" sz="quarter" idx="10"/>
+          </p:nvPr>
+        </p:nvSpPr>
+        <p:spPr/>
+        <p:txBody>
+          <a:bodyPr/>
+          <a:lstStyle/>
+          <a:p>
+            <a:fld id="{F7021451-1387-4CA6-816F-3879F97B5CBC}" type="slidenum">
+              <a:rPr lang="en-US"/>
+              <a:t>36</a:t>
+            </a:fld>
+            <a:endParaRPr lang="en-US"/>
+          </a:p>
+        </p:txBody>
+      </p:sp>
+    </p:spTree>
+    <p:extLst>
+      <p:ext uri="{BB962C8B-B14F-4D97-AF65-F5344CB8AC3E}">
+        <p14:creationId xmlns:p14="http://schemas.microsoft.com/office/powerpoint/2010/main" val="1024086991"/>
+      </p:ext>
+    </p:extLst>
+  </p:cSld>
+  <p:clrMapOvr>
+    <a:masterClrMapping/>
+  </p:clrMapOvr>
+</p:notes>
+</file>
+
+<file path=ppt/notesSlides/notesSlide37.xml><?xml version="1.0" encoding="utf-8"?>
+<p:notes xmlns:a="http://schemas.openxmlformats.org/drawingml/2006/main" xmlns:r="http://schemas.openxmlformats.org/officeDocument/2006/relationships" xmlns:p="http://schemas.openxmlformats.org/presentationml/2006/main">
+  <p:cSld>
+    <p:spTree>
+      <p:nvGrpSpPr>
+        <p:cNvPr id="1" name=""/>
+        <p:cNvGrpSpPr/>
+        <p:nvPr/>
+      </p:nvGrpSpPr>
+      <p:grpSpPr>
+        <a:xfrm>
+          <a:off x="0" y="0"/>
+          <a:ext cx="0" cy="0"/>
+          <a:chOff x="0" y="0"/>
+          <a:chExt cx="0" cy="0"/>
+        </a:xfrm>
+      </p:grpSpPr>
+      <p:sp>
+        <p:nvSpPr>
+          <p:cNvPr id="2" name="Slide Image Placeholder 1"/>
+          <p:cNvSpPr>
+            <a:spLocks noGrp="1" noRot="1" noChangeAspect="1"/>
+          </p:cNvSpPr>
+          <p:nvPr>
+            <p:ph type="sldImg"/>
+          </p:nvPr>
+        </p:nvSpPr>
+        <p:spPr/>
+      </p:sp>
+      <p:sp>
+        <p:nvSpPr>
+          <p:cNvPr id="3" name="Notes Placeholder 2"/>
+          <p:cNvSpPr>
+            <a:spLocks noGrp="1"/>
+          </p:cNvSpPr>
+          <p:nvPr>
+            <p:ph type="body" idx="1"/>
+          </p:nvPr>
+        </p:nvSpPr>
+        <p:spPr/>
+        <p:txBody>
+          <a:bodyPr/>
+          <a:lstStyle/>
+          <a:p>
+            <a:r>
+              <a:rPr lang="en-US" dirty="0"/>
+              <a:t>For students: start with examples/01_first_model.py, then 02_primitives.py. For the assignment, examples 06-16 and the complete models 22-33 are the most useful.</a:t>
+            </a:r>
+            <a:endParaRPr lang="en-US" dirty="0"/>
+          </a:p>
+        </p:txBody>
+      </p:sp>
+      <p:sp>
+        <p:nvSpPr>
+          <p:cNvPr id="4" name="Slide Number Placeholder 3"/>
+          <p:cNvSpPr>
+            <a:spLocks noGrp="1"/>
+          </p:cNvSpPr>
+          <p:nvPr>
+            <p:ph type="sldNum" sz="quarter" idx="10"/>
+          </p:nvPr>
+        </p:nvSpPr>
+        <p:spPr/>
+        <p:txBody>
+          <a:bodyPr/>
+          <a:lstStyle/>
+          <a:p>
+            <a:fld id="{F7021451-1387-4CA6-816F-3879F97B5CBC}" type="slidenum">
+              <a:rPr lang="en-US"/>
+              <a:t>37</a:t>
             </a:fld>
             <a:endParaRPr lang="en-US"/>
           </a:p>
@@ -3667,7 +4112,7 @@
                 <a:ea typeface="Cambria" pitchFamily="34" charset="-122"/>
                 <a:cs typeface="Cambria" pitchFamily="34" charset="-120"/>
               </a:rPr>
-              <a:t>add.py 2.1</a:t>
+              <a:t>add.py 2.0</a:t>
             </a:r>
             <a:endParaRPr lang="en-US" sz="5400" dirty="0"/>
           </a:p>
@@ -8662,7 +9107,7 @@
                 <a:ea typeface="Cambria" pitchFamily="34" charset="-122"/>
                 <a:cs typeface="Cambria" pitchFamily="34" charset="-120"/>
               </a:rPr>
-              <a:t>What is new in 2.x</a:t>
+              <a:t>What is new in 2.0</a:t>
             </a:r>
             <a:endParaRPr lang="en-US" sz="3000" dirty="0"/>
           </a:p>
@@ -8865,7 +9310,7 @@
                 <a:ea typeface="Calibri" pitchFamily="34" charset="-122"/>
                 <a:cs typeface="Calibri" pitchFamily="34" charset="-120"/>
               </a:rPr>
-              <a:t>Only import add</a:t>
+              <a:t>Regular polyhedra and a geodesic sphere</a:t>
             </a:r>
             <a:endParaRPr lang="en-US" sz="1500" dirty="0"/>
           </a:p>
@@ -8907,7 +9352,7 @@
                 <a:ea typeface="Calibri" pitchFamily="34" charset="-122"/>
                 <a:cs typeface="Calibri" pitchFamily="34" charset="-120"/>
               </a:rPr>
-              <a:t>math and random are re-exported: add.sin, add.pi, add.randint. A model file needs one import.</a:t>
+              <a:t>tetrahedron ... icosahedron, centred; sphere() is now a dome of triangles.</a:t>
             </a:r>
             <a:endParaRPr lang="en-US" sz="1250" dirty="0"/>
           </a:p>
@@ -8968,7 +9413,7 @@
                 <a:ea typeface="Calibri" pitchFamily="34" charset="-122"/>
                 <a:cs typeface="Calibri" pitchFamily="34" charset="-120"/>
               </a:rPr>
-              <a:t>Colour functions</a:t>
+              <a:t>Smooth surfaces</a:t>
             </a:r>
             <a:endParaRPr lang="en-US" sz="1500" dirty="0"/>
           </a:p>
@@ -9010,7 +9455,7 @@
                 <a:ea typeface="Calibri" pitchFamily="34" charset="-122"/>
                 <a:cs typeface="Calibri" pitchFamily="34" charset="-120"/>
               </a:rPr>
-              <a:t>Every surface takes color=lambda u, v: ... -- stripes, maps and gradients in one line.</a:t>
+              <a:t>catmull_clark, and smooth(): the generalised Catmull-Clark algorithm, any number of cells per edge.</a:t>
             </a:r>
             <a:endParaRPr lang="en-US" sz="1250" dirty="0"/>
           </a:p>
@@ -9071,7 +9516,7 @@
                 <a:ea typeface="Calibri" pitchFamily="34" charset="-122"/>
                 <a:cs typeface="Calibri" pitchFamily="34" charset="-120"/>
               </a:rPr>
-              <a:t>Ready-made parts</a:t>
+              <a:t>Vertex tools</a:t>
             </a:r>
             <a:endParaRPr lang="en-US" sz="1500" dirty="0"/>
           </a:p>
@@ -9113,7 +9558,7 @@
                 <a:ea typeface="Calibri" pitchFamily="34" charset="-122"/>
                 <a:cs typeface="Calibri" pitchFamily="34" charset="-120"/>
               </a:rPr>
-              <a:t>beam, wheel, gear, arch, stairs, roof, bricks, tree, text, pixels, heightmap ...</a:t>
+              <a:t>set_vertex, neighbors, valence, dual, truncate -- a football from the vertices of an icosahedron.</a:t>
             </a:r>
             <a:endParaRPr lang="en-US" sz="1250" dirty="0"/>
           </a:p>
@@ -9174,7 +9619,7 @@
                 <a:ea typeface="Calibri" pitchFamily="34" charset="-122"/>
                 <a:cs typeface="Calibri" pitchFamily="34" charset="-120"/>
               </a:rPr>
-              <a:t>Placing</a:t>
+              <a:t>Named surfaces, colour functions, parts</a:t>
             </a:r>
             <a:endParaRPr lang="en-US" sz="1500" dirty="0"/>
           </a:p>
@@ -9216,7 +9661,7 @@
                 <a:ea typeface="Calibri" pitchFamily="34" charset="-122"/>
                 <a:cs typeface="Calibri" pitchFamily="34" charset="-120"/>
               </a:rPr>
-              <a:t>aim a part along a direction, scatter copies on a landscape, string them along a curve.</a:t>
+              <a:t>25 surfaces by name; color=lambda u, v: ...; beam, wheel, gear, roof, tree, text ...</a:t>
             </a:r>
             <a:endParaRPr lang="en-US" sz="1250" dirty="0"/>
           </a:p>
@@ -9277,7 +9722,7 @@
                 <a:ea typeface="Calibri" pitchFamily="34" charset="-122"/>
                 <a:cs typeface="Calibri" pitchFamily="34" charset="-120"/>
               </a:rPr>
-              <a:t>Repair and export</a:t>
+              <a:t>Sketchfab-ready export</a:t>
             </a:r>
             <a:endParaRPr lang="en-US" sz="1500" dirty="0"/>
           </a:p>
@@ -9319,7 +9764,7 @@
                 <a:ea typeface="Calibri" pitchFamily="34" charset="-122"/>
                 <a:cs typeface="Calibri" pitchFamily="34" charset="-120"/>
               </a:rPr>
-              <a:t>clean(), heal(), check(); .obj + .mtl straight to Sketchfab, .stl for printing.</a:t>
+              <a:t>check() watches the 50 MB / 50 colour limits; glass (transparent) and image textures go into the .mtl.</a:t>
             </a:r>
             <a:endParaRPr lang="en-US" sz="1250" dirty="0"/>
           </a:p>
@@ -9358,7 +9803,7 @@
                 <a:ea typeface="Calibri" pitchFamily="34" charset="-122"/>
                 <a:cs typeface="Calibri" pitchFamily="34" charset="-120"/>
               </a:rPr>
-              <a:t>Everything written for 1.2 keeps working without a single change.</a:t>
+              <a:t>Everything written for 1.2 keeps working without a single change; only import add is needed.</a:t>
             </a:r>
             <a:endParaRPr lang="en-US" sz="1250" dirty="0"/>
           </a:p>
@@ -14989,7 +15434,7 @@
                 <a:ea typeface="Calibri" pitchFamily="34" charset="-122"/>
                 <a:cs typeface="Calibri" pitchFamily="34" charset="-120"/>
               </a:rPr>
-              <a:t>FILES</a:t>
+              <a:t>SHAPES</a:t>
             </a:r>
             <a:endParaRPr lang="en-US" sz="1100" dirty="0"/>
           </a:p>
@@ -15028,7 +15473,7 @@
                 <a:ea typeface="Cambria" pitchFamily="34" charset="-122"/>
                 <a:cs typeface="Cambria" pitchFamily="34" charset="-120"/>
               </a:rPr>
-              <a:t>Saving and sharing a model</a:t>
+              <a:t>The five regular polyhedra, and a sphere of triangles</a:t>
             </a:r>
             <a:endParaRPr lang="en-US" sz="3000" dirty="0"/>
           </a:p>
@@ -15082,11 +15527,11 @@
         <p:spPr>
           <a:xfrm>
             <a:off x="566928" y="1463040"/>
-            <a:ext cx="4572000" cy="1508760"/>
+            <a:ext cx="4709160" cy="2240280"/>
           </a:xfrm>
           <a:prstGeom prst="roundRect">
             <a:avLst>
-              <a:gd name="adj" fmla="val 3636"/>
+              <a:gd name="adj" fmla="val 2449"/>
             </a:avLst>
           </a:prstGeom>
           <a:solidFill>
@@ -15109,7 +15554,7 @@
         <p:spPr>
           <a:xfrm>
             <a:off x="713232" y="1591056"/>
-            <a:ext cx="4279392" cy="1252728"/>
+            <a:ext cx="4416552" cy="1984248"/>
           </a:xfrm>
           <a:prstGeom prst="rect">
             <a:avLst/>
@@ -15128,7 +15573,7 @@
               <a:buNone/>
             </a:pPr>
             <a:r>
-              <a:rPr lang="en-US" sz="1250" dirty="0">
+              <a:rPr lang="en-US" sz="1150" dirty="0">
                 <a:solidFill>
                   <a:srgbClr val="2C3138"/>
                 </a:solidFill>
@@ -15136,9 +15581,9 @@
                 <a:ea typeface="Consolas" pitchFamily="34" charset="-122"/>
                 <a:cs typeface="Consolas" pitchFamily="34" charset="-120"/>
               </a:rPr>
-              <a:t>add.save("model.off")   # the course format</a:t>
-            </a:r>
-            <a:endParaRPr lang="en-US" sz="1250" dirty="0"/>
+              <a:t>add.icosahedron([0, 0, 0], 2, "purple")</a:t>
+            </a:r>
+            <a:endParaRPr lang="en-US" sz="1150" dirty="0"/>
           </a:p>
           <a:p>
             <a:pPr indent="0" marL="0">
@@ -15148,7 +15593,7 @@
               <a:buNone/>
             </a:pPr>
             <a:r>
-              <a:rPr lang="en-US" sz="1250" dirty="0">
+              <a:rPr lang="en-US" sz="1150" dirty="0">
                 <a:solidFill>
                   <a:srgbClr val="2C3138"/>
                 </a:solidFill>
@@ -15156,9 +15601,9 @@
                 <a:ea typeface="Consolas" pitchFamily="34" charset="-122"/>
                 <a:cs typeface="Consolas" pitchFamily="34" charset="-120"/>
               </a:rPr>
-              <a:t>add.save("model.obj")   # + .mtl for colours</a:t>
-            </a:r>
-            <a:endParaRPr lang="en-US" sz="1250" dirty="0"/>
+              <a:t>add.dodecahedron([5, 0, 0], 2, "gold")</a:t>
+            </a:r>
+            <a:endParaRPr lang="en-US" sz="1150" dirty="0"/>
           </a:p>
           <a:p>
             <a:pPr indent="0" marL="0">
@@ -15168,7 +15613,7 @@
               <a:buNone/>
             </a:pPr>
             <a:r>
-              <a:rPr lang="en-US" sz="1250" dirty="0">
+              <a:rPr lang="en-US" sz="1150" dirty="0">
                 <a:solidFill>
                   <a:srgbClr val="2C3138"/>
                 </a:solidFill>
@@ -15176,9 +15621,9 @@
                 <a:ea typeface="Consolas" pitchFamily="34" charset="-122"/>
                 <a:cs typeface="Consolas" pitchFamily="34" charset="-120"/>
               </a:rPr>
-              <a:t>add.save("model.ply")</a:t>
-            </a:r>
-            <a:endParaRPr lang="en-US" sz="1250" dirty="0"/>
+              <a:t>P = add.polyhedron_points("icosahedron")</a:t>
+            </a:r>
+            <a:endParaRPr lang="en-US" sz="1150" dirty="0"/>
           </a:p>
           <a:p>
             <a:pPr indent="0" marL="0">
@@ -15187,8 +15632,17 @@
               </a:lnSpc>
               <a:buNone/>
             </a:pPr>
-            <a:r>
-              <a:rPr lang="en-US" sz="1250" dirty="0">
+            <a:endParaRPr lang="en-US" sz="1150" dirty="0"/>
+          </a:p>
+          <a:p>
+            <a:pPr indent="0" marL="0">
+              <a:lnSpc>
+                <a:spcPts val="1600"/>
+              </a:lnSpc>
+              <a:buNone/>
+            </a:pPr>
+            <a:r>
+              <a:rPr lang="en-US" sz="1150" dirty="0">
                 <a:solidFill>
                   <a:srgbClr val="2C3138"/>
                 </a:solidFill>
@@ -15196,9 +15650,49 @@
                 <a:ea typeface="Consolas" pitchFamily="34" charset="-122"/>
                 <a:cs typeface="Consolas" pitchFamily="34" charset="-120"/>
               </a:rPr>
-              <a:t>add.save("model.stl")   # for 3D printing</a:t>
-            </a:r>
-            <a:endParaRPr lang="en-US" sz="1250" dirty="0"/>
+              <a:t>add.sphere([0, 5, 0], 2, 20, "sky")    # 5120 tri</a:t>
+            </a:r>
+            <a:endParaRPr lang="en-US" sz="1150" dirty="0"/>
+          </a:p>
+          <a:p>
+            <a:pPr indent="0" marL="0">
+              <a:lnSpc>
+                <a:spcPts val="1600"/>
+              </a:lnSpc>
+              <a:buNone/>
+            </a:pPr>
+            <a:r>
+              <a:rPr lang="en-US" sz="1150" dirty="0">
+                <a:solidFill>
+                  <a:srgbClr val="2C3138"/>
+                </a:solidFill>
+                <a:latin typeface="Consolas" pitchFamily="34" charset="0"/>
+                <a:ea typeface="Consolas" pitchFamily="34" charset="-122"/>
+                <a:cs typeface="Consolas" pitchFamily="34" charset="-120"/>
+              </a:rPr>
+              <a:t>add.icosphere([5, 5, 0], 2, 3, "red")  # 1280</a:t>
+            </a:r>
+            <a:endParaRPr lang="en-US" sz="1150" dirty="0"/>
+          </a:p>
+          <a:p>
+            <a:pPr indent="0" marL="0">
+              <a:lnSpc>
+                <a:spcPts val="1600"/>
+              </a:lnSpc>
+              <a:buNone/>
+            </a:pPr>
+            <a:r>
+              <a:rPr lang="en-US" sz="1150" dirty="0">
+                <a:solidFill>
+                  <a:srgbClr val="2C3138"/>
+                </a:solidFill>
+                <a:latin typeface="Consolas" pitchFamily="34" charset="0"/>
+                <a:ea typeface="Consolas" pitchFamily="34" charset="-122"/>
+                <a:cs typeface="Consolas" pitchFamily="34" charset="-120"/>
+              </a:rPr>
+              <a:t>add.quadsphere([9, 5, 0], 2, 12, "gold")</a:t>
+            </a:r>
+            <a:endParaRPr lang="en-US" sz="1150" dirty="0"/>
           </a:p>
         </p:txBody>
       </p:sp>
@@ -15210,12 +15704,101 @@
         </p:nvSpPr>
         <p:spPr>
           <a:xfrm>
-            <a:off x="566928" y="3154680"/>
-            <a:ext cx="3886200" cy="1234440"/>
+            <a:off x="5440680" y="1463040"/>
+            <a:ext cx="3136392" cy="2240280"/>
           </a:xfrm>
           <a:prstGeom prst="roundRect">
             <a:avLst>
-              <a:gd name="adj" fmla="val 3704"/>
+              <a:gd name="adj" fmla="val 2449"/>
+            </a:avLst>
+          </a:prstGeom>
+          <a:solidFill>
+            <a:srgbClr val="FAFAFA"/>
+          </a:solidFill>
+          <a:ln w="9525">
+            <a:solidFill>
+              <a:srgbClr val="E3E1DD"/>
+            </a:solidFill>
+            <a:prstDash val="solid"/>
+          </a:ln>
+        </p:spPr>
+      </p:sp>
+      <p:pic>
+        <p:nvPicPr>
+          <p:cNvPr id="8" name="Image 0" descr="/home/claude/add3d/docs/images/polyhedra.png">    </p:cNvPr>
+          <p:cNvPicPr>
+            <a:picLocks noChangeAspect="1"/>
+          </p:cNvPicPr>
+          <p:nvPr/>
+        </p:nvPicPr>
+        <p:blipFill>
+          <a:blip r:embed="rId1"/>
+          <a:srcRect l="0" r="0" t="0" b="0"/>
+          <a:stretch/>
+        </p:blipFill>
+        <p:spPr>
+          <a:xfrm>
+            <a:off x="5495544" y="1517904"/>
+            <a:ext cx="3026664" cy="2130552"/>
+          </a:xfrm>
+          <a:prstGeom prst="rect">
+            <a:avLst/>
+          </a:prstGeom>
+        </p:spPr>
+      </p:pic>
+      <p:sp>
+        <p:nvSpPr>
+          <p:cNvPr id="9" name="Text 6"/>
+          <p:cNvSpPr txBox="1"/>
+          <p:nvPr/>
+        </p:nvSpPr>
+        <p:spPr>
+          <a:xfrm>
+            <a:off x="5440680" y="3767328"/>
+            <a:ext cx="3136392" cy="457200"/>
+          </a:xfrm>
+          <a:prstGeom prst="rect">
+            <a:avLst/>
+          </a:prstGeom>
+          <a:noFill/>
+          <a:ln/>
+        </p:spPr>
+        <p:txBody>
+          <a:bodyPr wrap="square" lIns="0" tIns="0" rIns="0" bIns="0" rtlCol="0" anchor="t"/>
+          <a:lstStyle/>
+          <a:p>
+            <a:pPr algn="ctr" indent="0" marL="0">
+              <a:buNone/>
+            </a:pPr>
+            <a:r>
+              <a:rPr lang="en-US" sz="1100" dirty="0">
+                <a:solidFill>
+                  <a:srgbClr val="6B7280"/>
+                </a:solidFill>
+                <a:latin typeface="Calibri" pitchFamily="34" charset="0"/>
+                <a:ea typeface="Calibri" pitchFamily="34" charset="-122"/>
+                <a:cs typeface="Calibri" pitchFamily="34" charset="-120"/>
+              </a:rPr>
+              <a:t>38_polyhedra.py -- solids, duals, truncations, domes, smooth</a:t>
+            </a:r>
+            <a:endParaRPr lang="en-US" sz="1100" dirty="0"/>
+          </a:p>
+        </p:txBody>
+      </p:sp>
+      <p:sp>
+        <p:nvSpPr>
+          <p:cNvPr id="10" name="Shape 7"/>
+          <p:cNvSpPr/>
+          <p:nvPr/>
+        </p:nvSpPr>
+        <p:spPr>
+          <a:xfrm>
+            <a:off x="566928" y="4114800"/>
+            <a:ext cx="2511552" cy="1371600"/>
+          </a:xfrm>
+          <a:prstGeom prst="roundRect">
+            <a:avLst>
+              <a:gd name="adj" fmla="val 3333"/>
             </a:avLst>
           </a:prstGeom>
           <a:solidFill>
@@ -15226,14 +15809,14 @@
       </p:sp>
       <p:sp>
         <p:nvSpPr>
-          <p:cNvPr id="8" name="Text 6"/>
-          <p:cNvSpPr txBox="1"/>
-          <p:nvPr/>
-        </p:nvSpPr>
-        <p:spPr>
-          <a:xfrm>
-            <a:off x="768096" y="3300984"/>
-            <a:ext cx="3483864" cy="292608"/>
+          <p:cNvPr id="11" name="Text 8"/>
+          <p:cNvSpPr txBox="1"/>
+          <p:nvPr/>
+        </p:nvSpPr>
+        <p:spPr>
+          <a:xfrm>
+            <a:off x="768096" y="4261104"/>
+            <a:ext cx="2109216" cy="292608"/>
           </a:xfrm>
           <a:prstGeom prst="rect">
             <a:avLst/>
@@ -15257,7 +15840,7 @@
                 <a:ea typeface="Calibri" pitchFamily="34" charset="-122"/>
                 <a:cs typeface="Calibri" pitchFamily="34" charset="-120"/>
               </a:rPr>
-              <a:t>Sketchfab</a:t>
+              <a:t>Centred</a:t>
             </a:r>
             <a:endParaRPr lang="en-US" sz="1500" dirty="0"/>
           </a:p>
@@ -15265,14 +15848,14 @@
       </p:sp>
       <p:sp>
         <p:nvSpPr>
-          <p:cNvPr id="9" name="Text 7"/>
-          <p:cNvSpPr txBox="1"/>
-          <p:nvPr/>
-        </p:nvSpPr>
-        <p:spPr>
-          <a:xfrm>
-            <a:off x="768096" y="3630168"/>
-            <a:ext cx="3483864" cy="612648"/>
+          <p:cNvPr id="12" name="Text 9"/>
+          <p:cNvSpPr txBox="1"/>
+          <p:nvPr/>
+        </p:nvSpPr>
+        <p:spPr>
+          <a:xfrm>
+            <a:off x="768096" y="4590288"/>
+            <a:ext cx="2109216" cy="749808"/>
           </a:xfrm>
           <a:prstGeom prst="rect">
             <a:avLst/>
@@ -15299,7 +15882,7 @@
                 <a:ea typeface="Calibri" pitchFamily="34" charset="-122"/>
                 <a:cs typeface="Calibri" pitchFamily="34" charset="-120"/>
               </a:rPr>
-              <a:t>Put .obj and .mtl in one archive and upload -- anyone can turn the model in a browser.</a:t>
+              <a:t>The average of the vertices is exactly the centre; every vertex at distance r.</a:t>
             </a:r>
             <a:endParaRPr lang="en-US" sz="1250" dirty="0"/>
           </a:p>
@@ -15307,18 +15890,18 @@
       </p:sp>
       <p:sp>
         <p:nvSpPr>
-          <p:cNvPr id="10" name="Shape 8"/>
+          <p:cNvPr id="13" name="Shape 10"/>
           <p:cNvSpPr/>
           <p:nvPr/>
         </p:nvSpPr>
         <p:spPr>
           <a:xfrm>
-            <a:off x="4690872" y="3154680"/>
-            <a:ext cx="3886200" cy="1234440"/>
+            <a:off x="3316224" y="4114800"/>
+            <a:ext cx="2511552" cy="1371600"/>
           </a:xfrm>
           <a:prstGeom prst="roundRect">
             <a:avLst>
-              <a:gd name="adj" fmla="val 3704"/>
+              <a:gd name="adj" fmla="val 3333"/>
             </a:avLst>
           </a:prstGeom>
           <a:solidFill>
@@ -15329,14 +15912,14 @@
       </p:sp>
       <p:sp>
         <p:nvSpPr>
-          <p:cNvPr id="11" name="Text 9"/>
-          <p:cNvSpPr txBox="1"/>
-          <p:nvPr/>
-        </p:nvSpPr>
-        <p:spPr>
-          <a:xfrm>
-            <a:off x="4892040" y="3300984"/>
-            <a:ext cx="3483864" cy="292608"/>
+          <p:cNvPr id="14" name="Text 11"/>
+          <p:cNvSpPr txBox="1"/>
+          <p:nvPr/>
+        </p:nvSpPr>
+        <p:spPr>
+          <a:xfrm>
+            <a:off x="3517392" y="4261104"/>
+            <a:ext cx="2109216" cy="292608"/>
           </a:xfrm>
           <a:prstGeom prst="rect">
             <a:avLst/>
@@ -15360,7 +15943,7 @@
                 <a:ea typeface="Calibri" pitchFamily="34" charset="-122"/>
                 <a:cs typeface="Calibri" pitchFamily="34" charset="-120"/>
               </a:rPr>
-              <a:t>3D printing</a:t>
+              <a:t>The dome principle</a:t>
             </a:r>
             <a:endParaRPr lang="en-US" sz="1500" dirty="0"/>
           </a:p>
@@ -15368,14 +15951,14 @@
       </p:sp>
       <p:sp>
         <p:nvSpPr>
-          <p:cNvPr id="12" name="Text 10"/>
-          <p:cNvSpPr txBox="1"/>
-          <p:nvPr/>
-        </p:nvSpPr>
-        <p:spPr>
-          <a:xfrm>
-            <a:off x="4892040" y="3630168"/>
-            <a:ext cx="3483864" cy="612648"/>
+          <p:cNvPr id="15" name="Text 12"/>
+          <p:cNvSpPr txBox="1"/>
+          <p:nvPr/>
+        </p:nvSpPr>
+        <p:spPr>
+          <a:xfrm>
+            <a:off x="3517392" y="4590288"/>
+            <a:ext cx="2109216" cy="749808"/>
           </a:xfrm>
           <a:prstGeom prst="rect">
             <a:avLst/>
@@ -15402,7 +15985,7 @@
                 <a:ea typeface="Calibri" pitchFamily="34" charset="-122"/>
                 <a:cs typeface="Calibri" pitchFamily="34" charset="-120"/>
               </a:rPr>
-              <a:t>clean(..., normals=True), then save("m.stl"). The surface must be closed.</a:t>
+              <a:t>Split every triangle in four, push the midpoints out to the sphere, repeat: 20, 80, 320, 1280 ...</a:t>
             </a:r>
             <a:endParaRPr lang="en-US" sz="1250" dirty="0"/>
           </a:p>
@@ -15410,18 +15993,18 @@
       </p:sp>
       <p:sp>
         <p:nvSpPr>
-          <p:cNvPr id="13" name="Shape 11"/>
+          <p:cNvPr id="16" name="Shape 13"/>
           <p:cNvSpPr/>
           <p:nvPr/>
         </p:nvSpPr>
         <p:spPr>
           <a:xfrm>
-            <a:off x="566928" y="4626864"/>
-            <a:ext cx="3886200" cy="1234440"/>
+            <a:off x="6065520" y="4114800"/>
+            <a:ext cx="2511552" cy="1371600"/>
           </a:xfrm>
           <a:prstGeom prst="roundRect">
             <a:avLst>
-              <a:gd name="adj" fmla="val 3704"/>
+              <a:gd name="adj" fmla="val 3333"/>
             </a:avLst>
           </a:prstGeom>
           <a:solidFill>
@@ -15432,14 +16015,14 @@
       </p:sp>
       <p:sp>
         <p:nvSpPr>
-          <p:cNvPr id="14" name="Text 12"/>
-          <p:cNvSpPr txBox="1"/>
-          <p:nvPr/>
-        </p:nvSpPr>
-        <p:spPr>
-          <a:xfrm>
-            <a:off x="768096" y="4773168"/>
-            <a:ext cx="3483864" cy="292608"/>
+          <p:cNvPr id="17" name="Text 14"/>
+          <p:cNvSpPr txBox="1"/>
+          <p:nvPr/>
+        </p:nvSpPr>
+        <p:spPr>
+          <a:xfrm>
+            <a:off x="6266688" y="4261104"/>
+            <a:ext cx="2109216" cy="292608"/>
           </a:xfrm>
           <a:prstGeom prst="rect">
             <a:avLst/>
@@ -15463,7 +16046,7 @@
                 <a:ea typeface="Calibri" pitchFamily="34" charset="-122"/>
                 <a:cs typeface="Calibri" pitchFamily="34" charset="-120"/>
               </a:rPr>
-              <a:t>Preview without MeshLab</a:t>
+              <a:t>k as before</a:t>
             </a:r>
             <a:endParaRPr lang="en-US" sz="1500" dirty="0"/>
           </a:p>
@@ -15471,14 +16054,14 @@
       </p:sp>
       <p:sp>
         <p:nvSpPr>
-          <p:cNvPr id="15" name="Text 13"/>
-          <p:cNvSpPr txBox="1"/>
-          <p:nvPr/>
-        </p:nvSpPr>
-        <p:spPr>
-          <a:xfrm>
-            <a:off x="768096" y="5102352"/>
-            <a:ext cx="3483864" cy="612648"/>
+          <p:cNvPr id="18" name="Text 15"/>
+          <p:cNvSpPr txBox="1"/>
+          <p:nvPr/>
+        </p:nvSpPr>
+        <p:spPr>
+          <a:xfrm>
+            <a:off x="6266688" y="4590288"/>
+            <a:ext cx="2109216" cy="749808"/>
           </a:xfrm>
           <a:prstGeom prst="rect">
             <a:avLst/>
@@ -15505,151 +16088,9 @@
                 <a:ea typeface="Calibri" pitchFamily="34" charset="-122"/>
                 <a:cs typeface="Calibri" pitchFamily="34" charset="-120"/>
               </a:rPr>
-              <a:t>python3 tools/preview.py model.off writes a PNG. No libraries either.</a:t>
+              <a:t>sphere(c, r, k) picks the level from k: k=10 -&gt; 1280, k=20 -&gt; 5120 faces.</a:t>
             </a:r>
             <a:endParaRPr lang="en-US" sz="1250" dirty="0"/>
-          </a:p>
-        </p:txBody>
-      </p:sp>
-      <p:sp>
-        <p:nvSpPr>
-          <p:cNvPr id="16" name="Shape 14"/>
-          <p:cNvSpPr/>
-          <p:nvPr/>
-        </p:nvSpPr>
-        <p:spPr>
-          <a:xfrm>
-            <a:off x="4690872" y="4626864"/>
-            <a:ext cx="3886200" cy="1234440"/>
-          </a:xfrm>
-          <a:prstGeom prst="roundRect">
-            <a:avLst>
-              <a:gd name="adj" fmla="val 3704"/>
-            </a:avLst>
-          </a:prstGeom>
-          <a:solidFill>
-            <a:srgbClr val="F6EFE8"/>
-          </a:solidFill>
-          <a:ln/>
-        </p:spPr>
-      </p:sp>
-      <p:sp>
-        <p:nvSpPr>
-          <p:cNvPr id="17" name="Text 15"/>
-          <p:cNvSpPr txBox="1"/>
-          <p:nvPr/>
-        </p:nvSpPr>
-        <p:spPr>
-          <a:xfrm>
-            <a:off x="4892040" y="4773168"/>
-            <a:ext cx="3483864" cy="292608"/>
-          </a:xfrm>
-          <a:prstGeom prst="rect">
-            <a:avLst/>
-          </a:prstGeom>
-          <a:noFill/>
-          <a:ln/>
-        </p:spPr>
-        <p:txBody>
-          <a:bodyPr wrap="square" lIns="0" tIns="0" rIns="0" bIns="0" rtlCol="0" anchor="ctr"/>
-          <a:lstStyle/>
-          <a:p>
-            <a:pPr indent="0" marL="0">
-              <a:buNone/>
-            </a:pPr>
-            <a:r>
-              <a:rPr lang="en-US" sz="1500" b="1" dirty="0">
-                <a:solidFill>
-                  <a:srgbClr val="8A4B1E"/>
-                </a:solidFill>
-                <a:latin typeface="Calibri" pitchFamily="34" charset="0"/>
-                <a:ea typeface="Calibri" pitchFamily="34" charset="-122"/>
-                <a:cs typeface="Calibri" pitchFamily="34" charset="-120"/>
-              </a:rPr>
-              <a:t>Loading back</a:t>
-            </a:r>
-            <a:endParaRPr lang="en-US" sz="1500" dirty="0"/>
-          </a:p>
-        </p:txBody>
-      </p:sp>
-      <p:sp>
-        <p:nvSpPr>
-          <p:cNvPr id="18" name="Text 16"/>
-          <p:cNvSpPr txBox="1"/>
-          <p:nvPr/>
-        </p:nvSpPr>
-        <p:spPr>
-          <a:xfrm>
-            <a:off x="4892040" y="5102352"/>
-            <a:ext cx="3483864" cy="612648"/>
-          </a:xfrm>
-          <a:prstGeom prst="rect">
-            <a:avLst/>
-          </a:prstGeom>
-          <a:noFill/>
-          <a:ln/>
-        </p:spPr>
-        <p:txBody>
-          <a:bodyPr wrap="square" lIns="0" tIns="0" rIns="0" bIns="0" rtlCol="0" anchor="t"/>
-          <a:lstStyle/>
-          <a:p>
-            <a:pPr indent="0" marL="0">
-              <a:lnSpc>
-                <a:spcPts val="1600"/>
-              </a:lnSpc>
-              <a:buNone/>
-            </a:pPr>
-            <a:r>
-              <a:rPr lang="en-US" sz="1250" dirty="0">
-                <a:solidFill>
-                  <a:srgbClr val="24282E"/>
-                </a:solidFill>
-                <a:latin typeface="Calibri" pitchFamily="34" charset="0"/>
-                <a:ea typeface="Calibri" pitchFamily="34" charset="-122"/>
-                <a:cs typeface="Calibri" pitchFamily="34" charset="-120"/>
-              </a:rPr>
-              <a:t>load("letter.off") returns a mesh you can move and paint.</a:t>
-            </a:r>
-            <a:endParaRPr lang="en-US" sz="1250" dirty="0"/>
-          </a:p>
-        </p:txBody>
-      </p:sp>
-      <p:sp>
-        <p:nvSpPr>
-          <p:cNvPr id="19" name="Text 17"/>
-          <p:cNvSpPr txBox="1"/>
-          <p:nvPr/>
-        </p:nvSpPr>
-        <p:spPr>
-          <a:xfrm>
-            <a:off x="5303520" y="1691640"/>
-            <a:ext cx="3291840" cy="1097280"/>
-          </a:xfrm>
-          <a:prstGeom prst="rect">
-            <a:avLst/>
-          </a:prstGeom>
-          <a:noFill/>
-          <a:ln/>
-        </p:spPr>
-        <p:txBody>
-          <a:bodyPr wrap="square" lIns="0" tIns="0" rIns="0" bIns="0" rtlCol="0" anchor="t"/>
-          <a:lstStyle/>
-          <a:p>
-            <a:pPr indent="0" marL="0">
-              <a:buNone/>
-            </a:pPr>
-            <a:r>
-              <a:rPr lang="en-US" sz="1700" dirty="0">
-                <a:solidFill>
-                  <a:srgbClr val="8A4B1E"/>
-                </a:solidFill>
-                <a:latin typeface="Cambria" pitchFamily="34" charset="0"/>
-                <a:ea typeface="Cambria" pitchFamily="34" charset="-122"/>
-                <a:cs typeface="Cambria" pitchFamily="34" charset="-120"/>
-              </a:rPr>
-              <a:t>The MeshLab conversion step is gone -- add.py writes OBJ and MTL itself.</a:t>
-            </a:r>
-            <a:endParaRPr lang="en-US" sz="1700" dirty="0"/>
           </a:p>
         </p:txBody>
       </p:sp>
@@ -15718,7 +16159,7 @@
                 <a:ea typeface="Calibri" pitchFamily="34" charset="-122"/>
                 <a:cs typeface="Calibri" pitchFamily="34" charset="-120"/>
               </a:rPr>
-              <a:t>GALLERY</a:t>
+              <a:t>VERTEX TOOLS</a:t>
             </a:r>
             <a:endParaRPr lang="en-US" sz="1100" dirty="0"/>
           </a:p>
@@ -15757,7 +16198,7 @@
                 <a:ea typeface="Cambria" pitchFamily="34" charset="-122"/>
                 <a:cs typeface="Cambria" pitchFamily="34" charset="-120"/>
               </a:rPr>
-              <a:t>Complete models</a:t>
+              <a:t>A football from the vertices of an icosahedron</a:t>
             </a:r>
             <a:endParaRPr lang="en-US" sz="3000" dirty="0"/>
           </a:p>
@@ -15810,8 +16251,206 @@
         </p:nvSpPr>
         <p:spPr>
           <a:xfrm>
-            <a:off x="566928" y="1417320"/>
-            <a:ext cx="3931920" cy="2377440"/>
+            <a:off x="566928" y="1463040"/>
+            <a:ext cx="4709160" cy="2377440"/>
+          </a:xfrm>
+          <a:prstGeom prst="roundRect">
+            <a:avLst>
+              <a:gd name="adj" fmla="val 2308"/>
+            </a:avLst>
+          </a:prstGeom>
+          <a:solidFill>
+            <a:srgbClr val="F7F7F8"/>
+          </a:solidFill>
+          <a:ln w="9525">
+            <a:solidFill>
+              <a:srgbClr val="E3E1DD"/>
+            </a:solidFill>
+            <a:prstDash val="solid"/>
+          </a:ln>
+        </p:spPr>
+      </p:sp>
+      <p:sp>
+        <p:nvSpPr>
+          <p:cNvPr id="6" name="Text 4"/>
+          <p:cNvSpPr txBox="1"/>
+          <p:nvPr/>
+        </p:nvSpPr>
+        <p:spPr>
+          <a:xfrm>
+            <a:off x="713232" y="1591056"/>
+            <a:ext cx="4416552" cy="2121408"/>
+          </a:xfrm>
+          <a:prstGeom prst="rect">
+            <a:avLst/>
+          </a:prstGeom>
+          <a:noFill/>
+          <a:ln/>
+        </p:spPr>
+        <p:txBody>
+          <a:bodyPr wrap="square" lIns="0" tIns="0" rIns="0" bIns="0" rtlCol="0" anchor="t"/>
+          <a:lstStyle/>
+          <a:p>
+            <a:pPr indent="0" marL="0">
+              <a:lnSpc>
+                <a:spcPts val="1600"/>
+              </a:lnSpc>
+              <a:buNone/>
+            </a:pPr>
+            <a:r>
+              <a:rPr lang="en-US" sz="1150" dirty="0">
+                <a:solidFill>
+                  <a:srgbClr val="2C3138"/>
+                </a:solidFill>
+                <a:latin typeface="Consolas" pitchFamily="34" charset="0"/>
+                <a:ea typeface="Consolas" pitchFamily="34" charset="-122"/>
+                <a:cs typeface="Consolas" pitchFamily="34" charset="-120"/>
+              </a:rPr>
+              <a:t>ico = add.make(add.icosahedron, [0, 0, 0], 3)</a:t>
+            </a:r>
+            <a:endParaRPr lang="en-US" sz="1150" dirty="0"/>
+          </a:p>
+          <a:p>
+            <a:pPr indent="0" marL="0">
+              <a:lnSpc>
+                <a:spcPts val="1600"/>
+              </a:lnSpc>
+              <a:buNone/>
+            </a:pPr>
+            <a:r>
+              <a:rPr lang="en-US" sz="1150" dirty="0">
+                <a:solidFill>
+                  <a:srgbClr val="2C3138"/>
+                </a:solidFill>
+                <a:latin typeface="Consolas" pitchFamily="34" charset="0"/>
+                <a:ea typeface="Consolas" pitchFamily="34" charset="-122"/>
+                <a:cs typeface="Consolas" pitchFamily="34" charset="-120"/>
+              </a:rPr>
+              <a:t>print(add.neighbors(ico, 0))   # 5, in order</a:t>
+            </a:r>
+            <a:endParaRPr lang="en-US" sz="1150" dirty="0"/>
+          </a:p>
+          <a:p>
+            <a:pPr indent="0" marL="0">
+              <a:lnSpc>
+                <a:spcPts val="1600"/>
+              </a:lnSpc>
+              <a:buNone/>
+            </a:pPr>
+            <a:r>
+              <a:rPr lang="en-US" sz="1150" dirty="0">
+                <a:solidFill>
+                  <a:srgbClr val="2C3138"/>
+                </a:solidFill>
+                <a:latin typeface="Consolas" pitchFamily="34" charset="0"/>
+                <a:ea typeface="Consolas" pitchFamily="34" charset="-122"/>
+                <a:cs typeface="Consolas" pitchFamily="34" charset="-120"/>
+              </a:rPr>
+              <a:t>print(add.valence(ico, 0))</a:t>
+            </a:r>
+            <a:endParaRPr lang="en-US" sz="1150" dirty="0"/>
+          </a:p>
+          <a:p>
+            <a:pPr indent="0" marL="0">
+              <a:lnSpc>
+                <a:spcPts val="1600"/>
+              </a:lnSpc>
+              <a:buNone/>
+            </a:pPr>
+            <a:endParaRPr lang="en-US" sz="1150" dirty="0"/>
+          </a:p>
+          <a:p>
+            <a:pPr indent="0" marL="0">
+              <a:lnSpc>
+                <a:spcPts val="1600"/>
+              </a:lnSpc>
+              <a:buNone/>
+            </a:pPr>
+            <a:r>
+              <a:rPr lang="en-US" sz="1150" dirty="0">
+                <a:solidFill>
+                  <a:srgbClr val="2C3138"/>
+                </a:solidFill>
+                <a:latin typeface="Consolas" pitchFamily="34" charset="0"/>
+                <a:ea typeface="Consolas" pitchFamily="34" charset="-122"/>
+                <a:cs typeface="Consolas" pitchFamily="34" charset="-120"/>
+              </a:rPr>
+              <a:t>ball = add.truncate(ico, 1 / 3.0)   # corners off</a:t>
+            </a:r>
+            <a:endParaRPr lang="en-US" sz="1150" dirty="0"/>
+          </a:p>
+          <a:p>
+            <a:pPr indent="0" marL="0">
+              <a:lnSpc>
+                <a:spcPts val="1600"/>
+              </a:lnSpc>
+              <a:buNone/>
+            </a:pPr>
+            <a:r>
+              <a:rPr lang="en-US" sz="1150" dirty="0">
+                <a:solidFill>
+                  <a:srgbClr val="2C3138"/>
+                </a:solidFill>
+                <a:latin typeface="Consolas" pitchFamily="34" charset="0"/>
+                <a:ea typeface="Consolas" pitchFamily="34" charset="-122"/>
+                <a:cs typeface="Consolas" pitchFamily="34" charset="-120"/>
+              </a:rPr>
+              <a:t>ball = add.color_by_sides(ball,</a:t>
+            </a:r>
+            <a:endParaRPr lang="en-US" sz="1150" dirty="0"/>
+          </a:p>
+          <a:p>
+            <a:pPr indent="0" marL="0">
+              <a:lnSpc>
+                <a:spcPts val="1600"/>
+              </a:lnSpc>
+              <a:buNone/>
+            </a:pPr>
+            <a:r>
+              <a:rPr lang="en-US" sz="1150" dirty="0">
+                <a:solidFill>
+                  <a:srgbClr val="2C3138"/>
+                </a:solidFill>
+                <a:latin typeface="Consolas" pitchFamily="34" charset="0"/>
+                <a:ea typeface="Consolas" pitchFamily="34" charset="-122"/>
+                <a:cs typeface="Consolas" pitchFamily="34" charset="-120"/>
+              </a:rPr>
+              <a:t>                          {5: "black", 6: "white"})</a:t>
+            </a:r>
+            <a:endParaRPr lang="en-US" sz="1150" dirty="0"/>
+          </a:p>
+          <a:p>
+            <a:pPr indent="0" marL="0">
+              <a:lnSpc>
+                <a:spcPts val="1600"/>
+              </a:lnSpc>
+              <a:buNone/>
+            </a:pPr>
+            <a:r>
+              <a:rPr lang="en-US" sz="1150" dirty="0">
+                <a:solidFill>
+                  <a:srgbClr val="2C3138"/>
+                </a:solidFill>
+                <a:latin typeface="Consolas" pitchFamily="34" charset="0"/>
+                <a:ea typeface="Consolas" pitchFamily="34" charset="-122"/>
+                <a:cs typeface="Consolas" pitchFamily="34" charset="-120"/>
+              </a:rPr>
+              <a:t>add.mesh(add.smooth(ball, 16))      # rounded</a:t>
+            </a:r>
+            <a:endParaRPr lang="en-US" sz="1150" dirty="0"/>
+          </a:p>
+        </p:txBody>
+      </p:sp>
+      <p:sp>
+        <p:nvSpPr>
+          <p:cNvPr id="7" name="Shape 5"/>
+          <p:cNvSpPr/>
+          <p:nvPr/>
+        </p:nvSpPr>
+        <p:spPr>
+          <a:xfrm>
+            <a:off x="5440680" y="1463040"/>
+            <a:ext cx="3136392" cy="2377440"/>
           </a:xfrm>
           <a:prstGeom prst="roundRect">
             <a:avLst>
@@ -15831,7 +16470,7 @@
       </p:sp>
       <p:pic>
         <p:nvPicPr>
-          <p:cNvPr id="6" name="Image 0" descr="/home/claude/add3d/docs/images/temple.png">    </p:cNvPr>
+          <p:cNvPr id="8" name="Image 0" descr="/home/claude/add3d/docs/images/football.png">    </p:cNvPr>
           <p:cNvPicPr>
             <a:picLocks noChangeAspect="1"/>
           </p:cNvPicPr>
@@ -15844,8 +16483,8 @@
         </p:blipFill>
         <p:spPr>
           <a:xfrm>
-            <a:off x="621792" y="1472184"/>
-            <a:ext cx="3822192" cy="2267712"/>
+            <a:off x="5495544" y="1517904"/>
+            <a:ext cx="3026664" cy="2267712"/>
           </a:xfrm>
           <a:prstGeom prst="rect">
             <a:avLst/>
@@ -15854,14 +16493,14 @@
       </p:pic>
       <p:sp>
         <p:nvSpPr>
-          <p:cNvPr id="7" name="Text 4"/>
-          <p:cNvSpPr txBox="1"/>
-          <p:nvPr/>
-        </p:nvSpPr>
-        <p:spPr>
-          <a:xfrm>
-            <a:off x="566928" y="3858768"/>
-            <a:ext cx="3931920" cy="457200"/>
+          <p:cNvPr id="9" name="Text 6"/>
+          <p:cNvSpPr txBox="1"/>
+          <p:nvPr/>
+        </p:nvSpPr>
+        <p:spPr>
+          <a:xfrm>
+            <a:off x="5440680" y="3904488"/>
+            <a:ext cx="3136392" cy="457200"/>
           </a:xfrm>
           <a:prstGeom prst="rect">
             <a:avLst/>
@@ -15885,7 +16524,7 @@
                 <a:ea typeface="Calibri" pitchFamily="34" charset="-122"/>
                 <a:cs typeface="Calibri" pitchFamily="34" charset="-120"/>
               </a:rPr>
-              <a:t>25_temple.py -- columns on a circle, a chequered floor</a:t>
+              <a:t>37_football.py</a:t>
             </a:r>
             <a:endParaRPr lang="en-US" sz="1100" dirty="0"/>
           </a:p>
@@ -15893,64 +16532,75 @@
       </p:sp>
       <p:sp>
         <p:nvSpPr>
-          <p:cNvPr id="8" name="Shape 5"/>
+          <p:cNvPr id="10" name="Shape 7"/>
           <p:cNvSpPr/>
           <p:nvPr/>
         </p:nvSpPr>
         <p:spPr>
           <a:xfrm>
-            <a:off x="4663440" y="1417320"/>
-            <a:ext cx="3913632" cy="2377440"/>
+            <a:off x="566928" y="4251960"/>
+            <a:ext cx="2511552" cy="1325880"/>
           </a:xfrm>
           <a:prstGeom prst="roundRect">
             <a:avLst>
-              <a:gd name="adj" fmla="val 2308"/>
+              <a:gd name="adj" fmla="val 3448"/>
             </a:avLst>
           </a:prstGeom>
           <a:solidFill>
-            <a:srgbClr val="FAFAFA"/>
+            <a:srgbClr val="F6EFE8"/>
           </a:solidFill>
-          <a:ln w="9525">
-            <a:solidFill>
-              <a:srgbClr val="E3E1DD"/>
-            </a:solidFill>
-            <a:prstDash val="solid"/>
-          </a:ln>
-        </p:spPr>
-      </p:sp>
-      <p:pic>
-        <p:nvPicPr>
-          <p:cNvPr id="9" name="Image 1" descr="/home/claude/add3d/docs/images/bridge.png">    </p:cNvPr>
-          <p:cNvPicPr>
-            <a:picLocks noChangeAspect="1"/>
-          </p:cNvPicPr>
-          <p:nvPr/>
-        </p:nvPicPr>
-        <p:blipFill>
-          <a:blip r:embed="rId2"/>
-          <a:srcRect l="0" r="0" t="0" b="0"/>
-          <a:stretch/>
-        </p:blipFill>
-        <p:spPr>
-          <a:xfrm>
-            <a:off x="4718304" y="1472184"/>
-            <a:ext cx="3803904" cy="2267712"/>
-          </a:xfrm>
-          <a:prstGeom prst="rect">
-            <a:avLst/>
-          </a:prstGeom>
-        </p:spPr>
-      </p:pic>
-      <p:sp>
-        <p:nvSpPr>
-          <p:cNvPr id="10" name="Text 6"/>
-          <p:cNvSpPr txBox="1"/>
-          <p:nvPr/>
-        </p:nvSpPr>
-        <p:spPr>
-          <a:xfrm>
-            <a:off x="4663440" y="3858768"/>
-            <a:ext cx="3913632" cy="457200"/>
+          <a:ln/>
+        </p:spPr>
+      </p:sp>
+      <p:sp>
+        <p:nvSpPr>
+          <p:cNvPr id="11" name="Text 8"/>
+          <p:cNvSpPr txBox="1"/>
+          <p:nvPr/>
+        </p:nvSpPr>
+        <p:spPr>
+          <a:xfrm>
+            <a:off x="768096" y="4398264"/>
+            <a:ext cx="2109216" cy="292608"/>
+          </a:xfrm>
+          <a:prstGeom prst="rect">
+            <a:avLst/>
+          </a:prstGeom>
+          <a:noFill/>
+          <a:ln/>
+        </p:spPr>
+        <p:txBody>
+          <a:bodyPr wrap="square" lIns="0" tIns="0" rIns="0" bIns="0" rtlCol="0" anchor="ctr"/>
+          <a:lstStyle/>
+          <a:p>
+            <a:pPr indent="0" marL="0">
+              <a:buNone/>
+            </a:pPr>
+            <a:r>
+              <a:rPr lang="en-US" sz="1500" b="1" dirty="0">
+                <a:solidFill>
+                  <a:srgbClr val="8A4B1E"/>
+                </a:solidFill>
+                <a:latin typeface="Calibri" pitchFamily="34" charset="0"/>
+                <a:ea typeface="Calibri" pitchFamily="34" charset="-122"/>
+                <a:cs typeface="Calibri" pitchFamily="34" charset="-120"/>
+              </a:rPr>
+              <a:t>Ask the mesh</a:t>
+            </a:r>
+            <a:endParaRPr lang="en-US" sz="1500" dirty="0"/>
+          </a:p>
+        </p:txBody>
+      </p:sp>
+      <p:sp>
+        <p:nvSpPr>
+          <p:cNvPr id="12" name="Text 9"/>
+          <p:cNvSpPr txBox="1"/>
+          <p:nvPr/>
+        </p:nvSpPr>
+        <p:spPr>
+          <a:xfrm>
+            <a:off x="768096" y="4727448"/>
+            <a:ext cx="2109216" cy="704088"/>
           </a:xfrm>
           <a:prstGeom prst="rect">
             <a:avLst/>
@@ -15962,124 +16612,233 @@
           <a:bodyPr wrap="square" lIns="0" tIns="0" rIns="0" bIns="0" rtlCol="0" anchor="t"/>
           <a:lstStyle/>
           <a:p>
-            <a:pPr algn="ctr" indent="0" marL="0">
-              <a:buNone/>
-            </a:pPr>
-            <a:r>
-              <a:rPr lang="en-US" sz="1100" dirty="0">
-                <a:solidFill>
-                  <a:srgbClr val="6B7280"/>
-                </a:solidFill>
-                <a:latin typeface="Calibri" pitchFamily="34" charset="0"/>
-                <a:ea typeface="Calibri" pitchFamily="34" charset="-122"/>
-                <a:cs typeface="Calibri" pitchFamily="34" charset="-120"/>
-              </a:rPr>
-              <a:t>29_bridge.py -- beams, cables, hangers, cars along the road</a:t>
-            </a:r>
-            <a:endParaRPr lang="en-US" sz="1100" dirty="0"/>
-          </a:p>
-        </p:txBody>
-      </p:sp>
-      <p:sp>
-        <p:nvSpPr>
-          <p:cNvPr id="11" name="Shape 7"/>
+            <a:pPr indent="0" marL="0">
+              <a:lnSpc>
+                <a:spcPts val="1600"/>
+              </a:lnSpc>
+              <a:buNone/>
+            </a:pPr>
+            <a:r>
+              <a:rPr lang="en-US" sz="1250" dirty="0">
+                <a:solidFill>
+                  <a:srgbClr val="24282E"/>
+                </a:solidFill>
+                <a:latin typeface="Calibri" pitchFamily="34" charset="0"/>
+                <a:ea typeface="Calibri" pitchFamily="34" charset="-122"/>
+                <a:cs typeface="Calibri" pitchFamily="34" charset="-120"/>
+              </a:rPr>
+              <a:t>neighbors, valence, mean_neighbor_distance, edges, vertex_normal, face_center, boundary_loops.</a:t>
+            </a:r>
+            <a:endParaRPr lang="en-US" sz="1250" dirty="0"/>
+          </a:p>
+        </p:txBody>
+      </p:sp>
+      <p:sp>
+        <p:nvSpPr>
+          <p:cNvPr id="13" name="Shape 10"/>
           <p:cNvSpPr/>
           <p:nvPr/>
         </p:nvSpPr>
         <p:spPr>
           <a:xfrm>
-            <a:off x="566928" y="4160520"/>
-            <a:ext cx="3931920" cy="1920240"/>
+            <a:off x="3316224" y="4251960"/>
+            <a:ext cx="2511552" cy="1325880"/>
           </a:xfrm>
           <a:prstGeom prst="roundRect">
             <a:avLst>
-              <a:gd name="adj" fmla="val 2857"/>
+              <a:gd name="adj" fmla="val 3448"/>
             </a:avLst>
           </a:prstGeom>
           <a:solidFill>
-            <a:srgbClr val="FAFAFA"/>
+            <a:srgbClr val="F6EFE8"/>
           </a:solidFill>
-          <a:ln w="9525">
-            <a:solidFill>
-              <a:srgbClr val="E3E1DD"/>
-            </a:solidFill>
-            <a:prstDash val="solid"/>
-          </a:ln>
-        </p:spPr>
-      </p:sp>
-      <p:pic>
-        <p:nvPicPr>
-          <p:cNvPr id="12" name="Image 2" descr="/home/claude/add3d/docs/images/voxel_island.png">    </p:cNvPr>
-          <p:cNvPicPr>
-            <a:picLocks noChangeAspect="1"/>
-          </p:cNvPicPr>
-          <p:nvPr/>
-        </p:nvPicPr>
-        <p:blipFill>
-          <a:blip r:embed="rId3"/>
-          <a:srcRect l="0" r="0" t="0" b="0"/>
-          <a:stretch/>
-        </p:blipFill>
-        <p:spPr>
-          <a:xfrm>
-            <a:off x="621792" y="4215384"/>
-            <a:ext cx="3822192" cy="1810512"/>
-          </a:xfrm>
-          <a:prstGeom prst="rect">
-            <a:avLst/>
-          </a:prstGeom>
-        </p:spPr>
-      </p:pic>
-      <p:sp>
-        <p:nvSpPr>
-          <p:cNvPr id="13" name="Shape 8"/>
+          <a:ln/>
+        </p:spPr>
+      </p:sp>
+      <p:sp>
+        <p:nvSpPr>
+          <p:cNvPr id="14" name="Text 11"/>
+          <p:cNvSpPr txBox="1"/>
+          <p:nvPr/>
+        </p:nvSpPr>
+        <p:spPr>
+          <a:xfrm>
+            <a:off x="3517392" y="4398264"/>
+            <a:ext cx="2109216" cy="292608"/>
+          </a:xfrm>
+          <a:prstGeom prst="rect">
+            <a:avLst/>
+          </a:prstGeom>
+          <a:noFill/>
+          <a:ln/>
+        </p:spPr>
+        <p:txBody>
+          <a:bodyPr wrap="square" lIns="0" tIns="0" rIns="0" bIns="0" rtlCol="0" anchor="ctr"/>
+          <a:lstStyle/>
+          <a:p>
+            <a:pPr indent="0" marL="0">
+              <a:buNone/>
+            </a:pPr>
+            <a:r>
+              <a:rPr lang="en-US" sz="1500" b="1" dirty="0">
+                <a:solidFill>
+                  <a:srgbClr val="8A4B1E"/>
+                </a:solidFill>
+                <a:latin typeface="Calibri" pitchFamily="34" charset="0"/>
+                <a:ea typeface="Calibri" pitchFamily="34" charset="-122"/>
+                <a:cs typeface="Calibri" pitchFamily="34" charset="-120"/>
+              </a:rPr>
+              <a:t>Change one corner</a:t>
+            </a:r>
+            <a:endParaRPr lang="en-US" sz="1500" dirty="0"/>
+          </a:p>
+        </p:txBody>
+      </p:sp>
+      <p:sp>
+        <p:nvSpPr>
+          <p:cNvPr id="15" name="Text 12"/>
+          <p:cNvSpPr txBox="1"/>
+          <p:nvPr/>
+        </p:nvSpPr>
+        <p:spPr>
+          <a:xfrm>
+            <a:off x="3517392" y="4727448"/>
+            <a:ext cx="2109216" cy="704088"/>
+          </a:xfrm>
+          <a:prstGeom prst="rect">
+            <a:avLst/>
+          </a:prstGeom>
+          <a:noFill/>
+          <a:ln/>
+        </p:spPr>
+        <p:txBody>
+          <a:bodyPr wrap="square" lIns="0" tIns="0" rIns="0" bIns="0" rtlCol="0" anchor="t"/>
+          <a:lstStyle/>
+          <a:p>
+            <a:pPr indent="0" marL="0">
+              <a:lnSpc>
+                <a:spcPts val="1600"/>
+              </a:lnSpc>
+              <a:buNone/>
+            </a:pPr>
+            <a:r>
+              <a:rPr lang="en-US" sz="1250" dirty="0">
+                <a:solidFill>
+                  <a:srgbClr val="24282E"/>
+                </a:solidFill>
+                <a:latin typeface="Calibri" pitchFamily="34" charset="0"/>
+                <a:ea typeface="Calibri" pitchFamily="34" charset="-122"/>
+                <a:cs typeface="Calibri" pitchFamily="34" charset="-120"/>
+              </a:rPr>
+              <a:t>set_vertex(M, i, [x, None, z]) moves vertex i and keeps the faces -- then smooth() it.</a:t>
+            </a:r>
+            <a:endParaRPr lang="en-US" sz="1250" dirty="0"/>
+          </a:p>
+        </p:txBody>
+      </p:sp>
+      <p:sp>
+        <p:nvSpPr>
+          <p:cNvPr id="16" name="Shape 13"/>
           <p:cNvSpPr/>
           <p:nvPr/>
         </p:nvSpPr>
         <p:spPr>
           <a:xfrm>
-            <a:off x="4663440" y="4160520"/>
-            <a:ext cx="3913632" cy="1920240"/>
+            <a:off x="6065520" y="4251960"/>
+            <a:ext cx="2511552" cy="1325880"/>
           </a:xfrm>
           <a:prstGeom prst="roundRect">
             <a:avLst>
-              <a:gd name="adj" fmla="val 2857"/>
+              <a:gd name="adj" fmla="val 3448"/>
             </a:avLst>
           </a:prstGeom>
           <a:solidFill>
-            <a:srgbClr val="FAFAFA"/>
+            <a:srgbClr val="F6EFE8"/>
           </a:solidFill>
-          <a:ln w="9525">
-            <a:solidFill>
-              <a:srgbClr val="E3E1DD"/>
-            </a:solidFill>
-            <a:prstDash val="solid"/>
-          </a:ln>
-        </p:spPr>
-      </p:sp>
-      <p:pic>
-        <p:nvPicPr>
-          <p:cNvPr id="14" name="Image 3" descr="/home/claude/add3d/docs/images/vector_fields.png">    </p:cNvPr>
-          <p:cNvPicPr>
-            <a:picLocks noChangeAspect="1"/>
-          </p:cNvPicPr>
-          <p:nvPr/>
-        </p:nvPicPr>
-        <p:blipFill>
-          <a:blip r:embed="rId4"/>
-          <a:srcRect l="0" r="0" t="0" b="0"/>
-          <a:stretch/>
-        </p:blipFill>
-        <p:spPr>
-          <a:xfrm>
-            <a:off x="4718304" y="4215384"/>
-            <a:ext cx="3803904" cy="1810512"/>
-          </a:xfrm>
-          <a:prstGeom prst="rect">
-            <a:avLst/>
-          </a:prstGeom>
-        </p:spPr>
-      </p:pic>
+          <a:ln/>
+        </p:spPr>
+      </p:sp>
+      <p:sp>
+        <p:nvSpPr>
+          <p:cNvPr id="17" name="Text 14"/>
+          <p:cNvSpPr txBox="1"/>
+          <p:nvPr/>
+        </p:nvSpPr>
+        <p:spPr>
+          <a:xfrm>
+            <a:off x="6266688" y="4398264"/>
+            <a:ext cx="2109216" cy="292608"/>
+          </a:xfrm>
+          <a:prstGeom prst="rect">
+            <a:avLst/>
+          </a:prstGeom>
+          <a:noFill/>
+          <a:ln/>
+        </p:spPr>
+        <p:txBody>
+          <a:bodyPr wrap="square" lIns="0" tIns="0" rIns="0" bIns="0" rtlCol="0" anchor="ctr"/>
+          <a:lstStyle/>
+          <a:p>
+            <a:pPr indent="0" marL="0">
+              <a:buNone/>
+            </a:pPr>
+            <a:r>
+              <a:rPr lang="en-US" sz="1500" b="1" dirty="0">
+                <a:solidFill>
+                  <a:srgbClr val="8A4B1E"/>
+                </a:solidFill>
+                <a:latin typeface="Calibri" pitchFamily="34" charset="0"/>
+                <a:ea typeface="Calibri" pitchFamily="34" charset="-122"/>
+                <a:cs typeface="Calibri" pitchFamily="34" charset="-120"/>
+              </a:rPr>
+              <a:t>Rebuild</a:t>
+            </a:r>
+            <a:endParaRPr lang="en-US" sz="1500" dirty="0"/>
+          </a:p>
+        </p:txBody>
+      </p:sp>
+      <p:sp>
+        <p:nvSpPr>
+          <p:cNvPr id="18" name="Text 15"/>
+          <p:cNvSpPr txBox="1"/>
+          <p:nvPr/>
+        </p:nvSpPr>
+        <p:spPr>
+          <a:xfrm>
+            <a:off x="6266688" y="4727448"/>
+            <a:ext cx="2109216" cy="704088"/>
+          </a:xfrm>
+          <a:prstGeom prst="rect">
+            <a:avLst/>
+          </a:prstGeom>
+          <a:noFill/>
+          <a:ln/>
+        </p:spPr>
+        <p:txBody>
+          <a:bodyPr wrap="square" lIns="0" tIns="0" rIns="0" bIns="0" rtlCol="0" anchor="t"/>
+          <a:lstStyle/>
+          <a:p>
+            <a:pPr indent="0" marL="0">
+              <a:lnSpc>
+                <a:spcPts val="1600"/>
+              </a:lnSpc>
+              <a:buNone/>
+            </a:pPr>
+            <a:r>
+              <a:rPr lang="en-US" sz="1250" dirty="0">
+                <a:solidFill>
+                  <a:srgbClr val="24282E"/>
+                </a:solidFill>
+                <a:latin typeface="Calibri" pitchFamily="34" charset="0"/>
+                <a:ea typeface="Calibri" pitchFamily="34" charset="-122"/>
+                <a:cs typeface="Calibri" pitchFamily="34" charset="-120"/>
+              </a:rPr>
+              <a:t>dual, truncate, refine + spherify, inflate -- new solids from old ones.</a:t>
+            </a:r>
+            <a:endParaRPr lang="en-US" sz="1250" dirty="0"/>
+          </a:p>
+        </p:txBody>
+      </p:sp>
     </p:spTree>
   </p:cSld>
   <p:clrMapOvr>
@@ -16653,7 +17412,7 @@
                 <a:ea typeface="Calibri" pitchFamily="34" charset="-122"/>
                 <a:cs typeface="Calibri" pitchFamily="34" charset="-120"/>
               </a:rPr>
-              <a:t>GALLERY</a:t>
+              <a:t>SMOOTH()</a:t>
             </a:r>
             <a:endParaRPr lang="en-US" sz="1100" dirty="0"/>
           </a:p>
@@ -16692,7 +17451,7 @@
                 <a:ea typeface="Cambria" pitchFamily="34" charset="-122"/>
                 <a:cs typeface="Cambria" pitchFamily="34" charset="-120"/>
               </a:rPr>
-              <a:t>Larger studies</a:t>
+              <a:t>Smooth surfaces: generalised Catmull-Clark</a:t>
             </a:r>
             <a:endParaRPr lang="en-US" sz="3000" dirty="0"/>
           </a:p>
@@ -16745,12 +17504,190 @@
         </p:nvSpPr>
         <p:spPr>
           <a:xfrm>
-            <a:off x="566928" y="1417320"/>
-            <a:ext cx="3931920" cy="2377440"/>
+            <a:off x="566928" y="1463040"/>
+            <a:ext cx="4709160" cy="2148840"/>
           </a:xfrm>
           <a:prstGeom prst="roundRect">
             <a:avLst>
-              <a:gd name="adj" fmla="val 2308"/>
+              <a:gd name="adj" fmla="val 2553"/>
+            </a:avLst>
+          </a:prstGeom>
+          <a:solidFill>
+            <a:srgbClr val="F7F7F8"/>
+          </a:solidFill>
+          <a:ln w="9525">
+            <a:solidFill>
+              <a:srgbClr val="E3E1DD"/>
+            </a:solidFill>
+            <a:prstDash val="solid"/>
+          </a:ln>
+        </p:spPr>
+      </p:sp>
+      <p:sp>
+        <p:nvSpPr>
+          <p:cNvPr id="6" name="Text 4"/>
+          <p:cNvSpPr txBox="1"/>
+          <p:nvPr/>
+        </p:nvSpPr>
+        <p:spPr>
+          <a:xfrm>
+            <a:off x="713232" y="1591056"/>
+            <a:ext cx="4416552" cy="1892808"/>
+          </a:xfrm>
+          <a:prstGeom prst="rect">
+            <a:avLst/>
+          </a:prstGeom>
+          <a:noFill/>
+          <a:ln/>
+        </p:spPr>
+        <p:txBody>
+          <a:bodyPr wrap="square" lIns="0" tIns="0" rIns="0" bIns="0" rtlCol="0" anchor="t"/>
+          <a:lstStyle/>
+          <a:p>
+            <a:pPr indent="0" marL="0">
+              <a:lnSpc>
+                <a:spcPts val="1600"/>
+              </a:lnSpc>
+              <a:buNone/>
+            </a:pPr>
+            <a:r>
+              <a:rPr lang="en-US" sz="1150" dirty="0">
+                <a:solidFill>
+                  <a:srgbClr val="2C3138"/>
+                </a:solidFill>
+                <a:latin typeface="Consolas" pitchFamily="34" charset="0"/>
+                <a:ea typeface="Consolas" pitchFamily="34" charset="-122"/>
+                <a:cs typeface="Consolas" pitchFamily="34" charset="-120"/>
+              </a:rPr>
+              <a:t>add.box([0, 0, 0], 2, "gold")</a:t>
+            </a:r>
+            <a:endParaRPr lang="en-US" sz="1150" dirty="0"/>
+          </a:p>
+          <a:p>
+            <a:pPr indent="0" marL="0">
+              <a:lnSpc>
+                <a:spcPts val="1600"/>
+              </a:lnSpc>
+              <a:buNone/>
+            </a:pPr>
+            <a:r>
+              <a:rPr lang="en-US" sz="1150" dirty="0">
+                <a:solidFill>
+                  <a:srgbClr val="2C3138"/>
+                </a:solidFill>
+                <a:latin typeface="Consolas" pitchFamily="34" charset="0"/>
+                <a:ea typeface="Consolas" pitchFamily="34" charset="-122"/>
+                <a:cs typeface="Consolas" pitchFamily="34" charset="-120"/>
+              </a:rPr>
+              <a:t>block = add.layer()</a:t>
+            </a:r>
+            <a:endParaRPr lang="en-US" sz="1150" dirty="0"/>
+          </a:p>
+          <a:p>
+            <a:pPr indent="0" marL="0">
+              <a:lnSpc>
+                <a:spcPts val="1600"/>
+              </a:lnSpc>
+              <a:buNone/>
+            </a:pPr>
+            <a:r>
+              <a:rPr lang="en-US" sz="1150" dirty="0">
+                <a:solidFill>
+                  <a:srgbClr val="2C3138"/>
+                </a:solidFill>
+                <a:latin typeface="Consolas" pitchFamily="34" charset="0"/>
+                <a:ea typeface="Consolas" pitchFamily="34" charset="-122"/>
+                <a:cs typeface="Consolas" pitchFamily="34" charset="-120"/>
+              </a:rPr>
+              <a:t>i = add.nearest_vertex(block, [1, 1, 1])</a:t>
+            </a:r>
+            <a:endParaRPr lang="en-US" sz="1150" dirty="0"/>
+          </a:p>
+          <a:p>
+            <a:pPr indent="0" marL="0">
+              <a:lnSpc>
+                <a:spcPts val="1600"/>
+              </a:lnSpc>
+              <a:buNone/>
+            </a:pPr>
+            <a:r>
+              <a:rPr lang="en-US" sz="1150" dirty="0">
+                <a:solidFill>
+                  <a:srgbClr val="2C3138"/>
+                </a:solidFill>
+                <a:latin typeface="Consolas" pitchFamily="34" charset="0"/>
+                <a:ea typeface="Consolas" pitchFamily="34" charset="-122"/>
+                <a:cs typeface="Consolas" pitchFamily="34" charset="-120"/>
+              </a:rPr>
+              <a:t>block = add.set_vertex(block, i, [2.5, 2.5, None])</a:t>
+            </a:r>
+            <a:endParaRPr lang="en-US" sz="1150" dirty="0"/>
+          </a:p>
+          <a:p>
+            <a:pPr indent="0" marL="0">
+              <a:lnSpc>
+                <a:spcPts val="1600"/>
+              </a:lnSpc>
+              <a:buNone/>
+            </a:pPr>
+            <a:endParaRPr lang="en-US" sz="1150" dirty="0"/>
+          </a:p>
+          <a:p>
+            <a:pPr indent="0" marL="0">
+              <a:lnSpc>
+                <a:spcPts val="1600"/>
+              </a:lnSpc>
+              <a:buNone/>
+            </a:pPr>
+            <a:r>
+              <a:rPr lang="en-US" sz="1150" dirty="0">
+                <a:solidFill>
+                  <a:srgbClr val="2C3138"/>
+                </a:solidFill>
+                <a:latin typeface="Consolas" pitchFamily="34" charset="0"/>
+                <a:ea typeface="Consolas" pitchFamily="34" charset="-122"/>
+                <a:cs typeface="Consolas" pitchFamily="34" charset="-120"/>
+              </a:rPr>
+              <a:t>add.mesh(add.smooth(block, 8))    # 8 per edge</a:t>
+            </a:r>
+            <a:endParaRPr lang="en-US" sz="1150" dirty="0"/>
+          </a:p>
+          <a:p>
+            <a:pPr indent="0" marL="0">
+              <a:lnSpc>
+                <a:spcPts val="1600"/>
+              </a:lnSpc>
+              <a:buNone/>
+            </a:pPr>
+            <a:r>
+              <a:rPr lang="en-US" sz="1150" dirty="0">
+                <a:solidFill>
+                  <a:srgbClr val="2C3138"/>
+                </a:solidFill>
+                <a:latin typeface="Consolas" pitchFamily="34" charset="0"/>
+                <a:ea typeface="Consolas" pitchFamily="34" charset="-122"/>
+                <a:cs typeface="Consolas" pitchFamily="34" charset="-120"/>
+              </a:rPr>
+              <a:t>add.mesh(add.catmull_clark(block, 3))</a:t>
+            </a:r>
+            <a:endParaRPr lang="en-US" sz="1150" dirty="0"/>
+          </a:p>
+        </p:txBody>
+      </p:sp>
+      <p:sp>
+        <p:nvSpPr>
+          <p:cNvPr id="7" name="Shape 5"/>
+          <p:cNvSpPr/>
+          <p:nvPr/>
+        </p:nvSpPr>
+        <p:spPr>
+          <a:xfrm>
+            <a:off x="5440680" y="1463040"/>
+            <a:ext cx="3136392" cy="2148840"/>
+          </a:xfrm>
+          <a:prstGeom prst="roundRect">
+            <a:avLst>
+              <a:gd name="adj" fmla="val 2553"/>
             </a:avLst>
           </a:prstGeom>
           <a:solidFill>
@@ -16766,7 +17703,7 @@
       </p:sp>
       <p:pic>
         <p:nvPicPr>
-          <p:cNvPr id="6" name="Image 0" descr="/home/claude/add3d/docs/images/chess_set.png">    </p:cNvPr>
+          <p:cNvPr id="8" name="Image 0" descr="/home/claude/add3d/docs/images/smooth_shapes.png">    </p:cNvPr>
           <p:cNvPicPr>
             <a:picLocks noChangeAspect="1"/>
           </p:cNvPicPr>
@@ -16779,8 +17716,8 @@
         </p:blipFill>
         <p:spPr>
           <a:xfrm>
-            <a:off x="621792" y="1472184"/>
-            <a:ext cx="3822192" cy="2267712"/>
+            <a:off x="5495544" y="1517904"/>
+            <a:ext cx="3026664" cy="2039112"/>
           </a:xfrm>
           <a:prstGeom prst="rect">
             <a:avLst/>
@@ -16789,14 +17726,14 @@
       </p:pic>
       <p:sp>
         <p:nvSpPr>
-          <p:cNvPr id="7" name="Text 4"/>
-          <p:cNvSpPr txBox="1"/>
-          <p:nvPr/>
-        </p:nvSpPr>
-        <p:spPr>
-          <a:xfrm>
-            <a:off x="566928" y="3858768"/>
-            <a:ext cx="3931920" cy="457200"/>
+          <p:cNvPr id="9" name="Text 6"/>
+          <p:cNvSpPr txBox="1"/>
+          <p:nvPr/>
+        </p:nvSpPr>
+        <p:spPr>
+          <a:xfrm>
+            <a:off x="5440680" y="3675888"/>
+            <a:ext cx="3136392" cy="457200"/>
           </a:xfrm>
           <a:prstGeom prst="rect">
             <a:avLst/>
@@ -16820,7 +17757,7 @@
                 <a:ea typeface="Calibri" pitchFamily="34" charset="-122"/>
                 <a:cs typeface="Calibri" pitchFamily="34" charset="-120"/>
               </a:rPr>
-              <a:t>18_chess_set.py -- lathe, layers, booleans</a:t>
+              <a:t>39_smooth_shapes.py -- n = 1 ... 7 on one prism</a:t>
             </a:r>
             <a:endParaRPr lang="en-US" sz="1100" dirty="0"/>
           </a:p>
@@ -16828,103 +17765,14 @@
       </p:sp>
       <p:sp>
         <p:nvSpPr>
-          <p:cNvPr id="8" name="Shape 5"/>
+          <p:cNvPr id="10" name="Shape 7"/>
           <p:cNvSpPr/>
           <p:nvPr/>
         </p:nvSpPr>
         <p:spPr>
           <a:xfrm>
-            <a:off x="4663440" y="1417320"/>
-            <a:ext cx="3913632" cy="2377440"/>
-          </a:xfrm>
-          <a:prstGeom prst="roundRect">
-            <a:avLst>
-              <a:gd name="adj" fmla="val 2308"/>
-            </a:avLst>
-          </a:prstGeom>
-          <a:solidFill>
-            <a:srgbClr val="FAFAFA"/>
-          </a:solidFill>
-          <a:ln w="9525">
-            <a:solidFill>
-              <a:srgbClr val="E3E1DD"/>
-            </a:solidFill>
-            <a:prstDash val="solid"/>
-          </a:ln>
-        </p:spPr>
-      </p:sp>
-      <p:pic>
-        <p:nvPicPr>
-          <p:cNvPr id="9" name="Image 1" descr="/home/claude/add3d/docs/images/fractals.png">    </p:cNvPr>
-          <p:cNvPicPr>
-            <a:picLocks noChangeAspect="1"/>
-          </p:cNvPicPr>
-          <p:nvPr/>
-        </p:nvPicPr>
-        <p:blipFill>
-          <a:blip r:embed="rId2"/>
-          <a:srcRect l="0" r="0" t="0" b="0"/>
-          <a:stretch/>
-        </p:blipFill>
-        <p:spPr>
-          <a:xfrm>
-            <a:off x="4718304" y="1472184"/>
-            <a:ext cx="3803904" cy="2267712"/>
-          </a:xfrm>
-          <a:prstGeom prst="rect">
-            <a:avLst/>
-          </a:prstGeom>
-        </p:spPr>
-      </p:pic>
-      <p:sp>
-        <p:nvSpPr>
-          <p:cNvPr id="10" name="Text 6"/>
-          <p:cNvSpPr txBox="1"/>
-          <p:nvPr/>
-        </p:nvSpPr>
-        <p:spPr>
-          <a:xfrm>
-            <a:off x="4663440" y="3858768"/>
-            <a:ext cx="3913632" cy="457200"/>
-          </a:xfrm>
-          <a:prstGeom prst="rect">
-            <a:avLst/>
-          </a:prstGeom>
-          <a:noFill/>
-          <a:ln/>
-        </p:spPr>
-        <p:txBody>
-          <a:bodyPr wrap="square" lIns="0" tIns="0" rIns="0" bIns="0" rtlCol="0" anchor="t"/>
-          <a:lstStyle/>
-          <a:p>
-            <a:pPr algn="ctr" indent="0" marL="0">
-              <a:buNone/>
-            </a:pPr>
-            <a:r>
-              <a:rPr lang="en-US" sz="1100" dirty="0">
-                <a:solidFill>
-                  <a:srgbClr val="6B7280"/>
-                </a:solidFill>
-                <a:latin typeface="Calibri" pitchFamily="34" charset="0"/>
-                <a:ea typeface="Calibri" pitchFamily="34" charset="-122"/>
-                <a:cs typeface="Calibri" pitchFamily="34" charset="-120"/>
-              </a:rPr>
-              <a:t>17_fractals.py -- Menger sponge, Sierpinski, a tree</a:t>
-            </a:r>
-            <a:endParaRPr lang="en-US" sz="1100" dirty="0"/>
-          </a:p>
-        </p:txBody>
-      </p:sp>
-      <p:sp>
-        <p:nvSpPr>
-          <p:cNvPr id="11" name="Shape 7"/>
-          <p:cNvSpPr/>
-          <p:nvPr/>
-        </p:nvSpPr>
-        <p:spPr>
-          <a:xfrm>
-            <a:off x="566928" y="4160520"/>
-            <a:ext cx="3931920" cy="1920240"/>
+            <a:off x="566928" y="4023360"/>
+            <a:ext cx="2511552" cy="1600200"/>
           </a:xfrm>
           <a:prstGeom prst="roundRect">
             <a:avLst>
@@ -16932,49 +17780,102 @@
             </a:avLst>
           </a:prstGeom>
           <a:solidFill>
-            <a:srgbClr val="FAFAFA"/>
+            <a:srgbClr val="F6EFE8"/>
           </a:solidFill>
-          <a:ln w="9525">
-            <a:solidFill>
-              <a:srgbClr val="E3E1DD"/>
-            </a:solidFill>
-            <a:prstDash val="solid"/>
-          </a:ln>
-        </p:spPr>
-      </p:sp>
-      <p:pic>
-        <p:nvPicPr>
-          <p:cNvPr id="12" name="Image 2" descr="/home/claude/add3d/docs/images/city.png">    </p:cNvPr>
-          <p:cNvPicPr>
-            <a:picLocks noChangeAspect="1"/>
-          </p:cNvPicPr>
-          <p:nvPr/>
-        </p:nvPicPr>
-        <p:blipFill>
-          <a:blip r:embed="rId3"/>
-          <a:srcRect l="0" r="0" t="0" b="0"/>
-          <a:stretch/>
-        </p:blipFill>
-        <p:spPr>
-          <a:xfrm>
-            <a:off x="621792" y="4215384"/>
-            <a:ext cx="3822192" cy="1810512"/>
-          </a:xfrm>
-          <a:prstGeom prst="rect">
-            <a:avLst/>
-          </a:prstGeom>
-        </p:spPr>
-      </p:pic>
-      <p:sp>
-        <p:nvSpPr>
-          <p:cNvPr id="13" name="Shape 8"/>
+          <a:ln/>
+        </p:spPr>
+      </p:sp>
+      <p:sp>
+        <p:nvSpPr>
+          <p:cNvPr id="11" name="Text 8"/>
+          <p:cNvSpPr txBox="1"/>
+          <p:nvPr/>
+        </p:nvSpPr>
+        <p:spPr>
+          <a:xfrm>
+            <a:off x="768096" y="4169664"/>
+            <a:ext cx="2109216" cy="292608"/>
+          </a:xfrm>
+          <a:prstGeom prst="rect">
+            <a:avLst/>
+          </a:prstGeom>
+          <a:noFill/>
+          <a:ln/>
+        </p:spPr>
+        <p:txBody>
+          <a:bodyPr wrap="square" lIns="0" tIns="0" rIns="0" bIns="0" rtlCol="0" anchor="ctr"/>
+          <a:lstStyle/>
+          <a:p>
+            <a:pPr indent="0" marL="0">
+              <a:buNone/>
+            </a:pPr>
+            <a:r>
+              <a:rPr lang="en-US" sz="1500" b="1" dirty="0">
+                <a:solidFill>
+                  <a:srgbClr val="8A4B1E"/>
+                </a:solidFill>
+                <a:latin typeface="Calibri" pitchFamily="34" charset="0"/>
+                <a:ea typeface="Calibri" pitchFamily="34" charset="-122"/>
+                <a:cs typeface="Calibri" pitchFamily="34" charset="-120"/>
+              </a:rPr>
+              <a:t>Any n</a:t>
+            </a:r>
+            <a:endParaRPr lang="en-US" sz="1500" dirty="0"/>
+          </a:p>
+        </p:txBody>
+      </p:sp>
+      <p:sp>
+        <p:nvSpPr>
+          <p:cNvPr id="12" name="Text 9"/>
+          <p:cNvSpPr txBox="1"/>
+          <p:nvPr/>
+        </p:nvSpPr>
+        <p:spPr>
+          <a:xfrm>
+            <a:off x="768096" y="4498848"/>
+            <a:ext cx="2109216" cy="978408"/>
+          </a:xfrm>
+          <a:prstGeom prst="rect">
+            <a:avLst/>
+          </a:prstGeom>
+          <a:noFill/>
+          <a:ln/>
+        </p:spPr>
+        <p:txBody>
+          <a:bodyPr wrap="square" lIns="0" tIns="0" rIns="0" bIns="0" rtlCol="0" anchor="t"/>
+          <a:lstStyle/>
+          <a:p>
+            <a:pPr indent="0" marL="0">
+              <a:lnSpc>
+                <a:spcPts val="1600"/>
+              </a:lnSpc>
+              <a:buNone/>
+            </a:pPr>
+            <a:r>
+              <a:rPr lang="en-US" sz="1250" dirty="0">
+                <a:solidFill>
+                  <a:srgbClr val="24282E"/>
+                </a:solidFill>
+                <a:latin typeface="Calibri" pitchFamily="34" charset="0"/>
+                <a:ea typeface="Calibri" pitchFamily="34" charset="-122"/>
+                <a:cs typeface="Calibri" pitchFamily="34" charset="-120"/>
+              </a:rPr>
+              <a:t>n cells on every control edge for n = 1, 2, 3, 4, 5 ... -- classical subdivision only gives 2, 4, 8.</a:t>
+            </a:r>
+            <a:endParaRPr lang="en-US" sz="1250" dirty="0"/>
+          </a:p>
+        </p:txBody>
+      </p:sp>
+      <p:sp>
+        <p:nvSpPr>
+          <p:cNvPr id="13" name="Shape 10"/>
           <p:cNvSpPr/>
           <p:nvPr/>
         </p:nvSpPr>
         <p:spPr>
           <a:xfrm>
-            <a:off x="4663440" y="4160520"/>
-            <a:ext cx="3913632" cy="1920240"/>
+            <a:off x="3316224" y="4023360"/>
+            <a:ext cx="2511552" cy="1600200"/>
           </a:xfrm>
           <a:prstGeom prst="roundRect">
             <a:avLst>
@@ -16982,39 +17883,195 @@
             </a:avLst>
           </a:prstGeom>
           <a:solidFill>
-            <a:srgbClr val="FAFAFA"/>
+            <a:srgbClr val="F6EFE8"/>
           </a:solidFill>
-          <a:ln w="9525">
-            <a:solidFill>
-              <a:srgbClr val="E3E1DD"/>
-            </a:solidFill>
-            <a:prstDash val="solid"/>
-          </a:ln>
-        </p:spPr>
-      </p:sp>
-      <p:pic>
-        <p:nvPicPr>
-          <p:cNvPr id="14" name="Image 3" descr="/home/claude/add3d/docs/images/example4.png">    </p:cNvPr>
-          <p:cNvPicPr>
-            <a:picLocks noChangeAspect="1"/>
-          </p:cNvPicPr>
-          <p:nvPr/>
-        </p:nvPicPr>
-        <p:blipFill>
-          <a:blip r:embed="rId4"/>
-          <a:srcRect l="0" r="0" t="0" b="0"/>
-          <a:stretch/>
-        </p:blipFill>
-        <p:spPr>
-          <a:xfrm>
-            <a:off x="4718304" y="4215384"/>
-            <a:ext cx="3803904" cy="1810512"/>
-          </a:xfrm>
-          <a:prstGeom prst="rect">
-            <a:avLst/>
-          </a:prstGeom>
-        </p:spPr>
-      </p:pic>
+          <a:ln/>
+        </p:spPr>
+      </p:sp>
+      <p:sp>
+        <p:nvSpPr>
+          <p:cNvPr id="14" name="Text 11"/>
+          <p:cNvSpPr txBox="1"/>
+          <p:nvPr/>
+        </p:nvSpPr>
+        <p:spPr>
+          <a:xfrm>
+            <a:off x="3517392" y="4169664"/>
+            <a:ext cx="2109216" cy="292608"/>
+          </a:xfrm>
+          <a:prstGeom prst="rect">
+            <a:avLst/>
+          </a:prstGeom>
+          <a:noFill/>
+          <a:ln/>
+        </p:spPr>
+        <p:txBody>
+          <a:bodyPr wrap="square" lIns="0" tIns="0" rIns="0" bIns="0" rtlCol="0" anchor="ctr"/>
+          <a:lstStyle/>
+          <a:p>
+            <a:pPr indent="0" marL="0">
+              <a:buNone/>
+            </a:pPr>
+            <a:r>
+              <a:rPr lang="en-US" sz="1500" b="1" dirty="0">
+                <a:solidFill>
+                  <a:srgbClr val="8A4B1E"/>
+                </a:solidFill>
+                <a:latin typeface="Calibri" pitchFamily="34" charset="0"/>
+                <a:ea typeface="Calibri" pitchFamily="34" charset="-122"/>
+                <a:cs typeface="Calibri" pitchFamily="34" charset="-120"/>
+              </a:rPr>
+              <a:t>Exactly on the limit surface</a:t>
+            </a:r>
+            <a:endParaRPr lang="en-US" sz="1500" dirty="0"/>
+          </a:p>
+        </p:txBody>
+      </p:sp>
+      <p:sp>
+        <p:nvSpPr>
+          <p:cNvPr id="15" name="Text 12"/>
+          <p:cNvSpPr txBox="1"/>
+          <p:nvPr/>
+        </p:nvSpPr>
+        <p:spPr>
+          <a:xfrm>
+            <a:off x="3517392" y="4498848"/>
+            <a:ext cx="2109216" cy="978408"/>
+          </a:xfrm>
+          <a:prstGeom prst="rect">
+            <a:avLst/>
+          </a:prstGeom>
+          <a:noFill/>
+          <a:ln/>
+        </p:spPr>
+        <p:txBody>
+          <a:bodyPr wrap="square" lIns="0" tIns="0" rIns="0" bIns="0" rtlCol="0" anchor="t"/>
+          <a:lstStyle/>
+          <a:p>
+            <a:pPr indent="0" marL="0">
+              <a:lnSpc>
+                <a:spcPts val="1600"/>
+              </a:lnSpc>
+              <a:buNone/>
+            </a:pPr>
+            <a:r>
+              <a:rPr lang="en-US" sz="1250" dirty="0">
+                <a:solidFill>
+                  <a:srgbClr val="24282E"/>
+                </a:solidFill>
+                <a:latin typeface="Calibri" pitchFamily="34" charset="0"/>
+                <a:ea typeface="Calibri" pitchFamily="34" charset="-122"/>
+                <a:cs typeface="Calibri" pitchFamily="34" charset="-120"/>
+              </a:rPr>
+              <a:t>Every new vertex is evaluated on the limit surface; near odd corners the grid is reparameterised to stay even.</a:t>
+            </a:r>
+            <a:endParaRPr lang="en-US" sz="1250" dirty="0"/>
+          </a:p>
+        </p:txBody>
+      </p:sp>
+      <p:sp>
+        <p:nvSpPr>
+          <p:cNvPr id="16" name="Shape 13"/>
+          <p:cNvSpPr/>
+          <p:nvPr/>
+        </p:nvSpPr>
+        <p:spPr>
+          <a:xfrm>
+            <a:off x="6065520" y="4023360"/>
+            <a:ext cx="2511552" cy="1600200"/>
+          </a:xfrm>
+          <a:prstGeom prst="roundRect">
+            <a:avLst>
+              <a:gd name="adj" fmla="val 2857"/>
+            </a:avLst>
+          </a:prstGeom>
+          <a:solidFill>
+            <a:srgbClr val="F6EFE8"/>
+          </a:solidFill>
+          <a:ln/>
+        </p:spPr>
+      </p:sp>
+      <p:sp>
+        <p:nvSpPr>
+          <p:cNvPr id="17" name="Text 14"/>
+          <p:cNvSpPr txBox="1"/>
+          <p:nvPr/>
+        </p:nvSpPr>
+        <p:spPr>
+          <a:xfrm>
+            <a:off x="6266688" y="4169664"/>
+            <a:ext cx="2109216" cy="292608"/>
+          </a:xfrm>
+          <a:prstGeom prst="rect">
+            <a:avLst/>
+          </a:prstGeom>
+          <a:noFill/>
+          <a:ln/>
+        </p:spPr>
+        <p:txBody>
+          <a:bodyPr wrap="square" lIns="0" tIns="0" rIns="0" bIns="0" rtlCol="0" anchor="ctr"/>
+          <a:lstStyle/>
+          <a:p>
+            <a:pPr indent="0" marL="0">
+              <a:buNone/>
+            </a:pPr>
+            <a:r>
+              <a:rPr lang="en-US" sz="1500" b="1" dirty="0">
+                <a:solidFill>
+                  <a:srgbClr val="8A4B1E"/>
+                </a:solidFill>
+                <a:latin typeface="Calibri" pitchFamily="34" charset="0"/>
+                <a:ea typeface="Calibri" pitchFamily="34" charset="-122"/>
+                <a:cs typeface="Calibri" pitchFamily="34" charset="-120"/>
+              </a:rPr>
+              <a:t>The paper</a:t>
+            </a:r>
+            <a:endParaRPr lang="en-US" sz="1500" dirty="0"/>
+          </a:p>
+        </p:txBody>
+      </p:sp>
+      <p:sp>
+        <p:nvSpPr>
+          <p:cNvPr id="18" name="Text 15"/>
+          <p:cNvSpPr txBox="1"/>
+          <p:nvPr/>
+        </p:nvSpPr>
+        <p:spPr>
+          <a:xfrm>
+            <a:off x="6266688" y="4498848"/>
+            <a:ext cx="2109216" cy="978408"/>
+          </a:xfrm>
+          <a:prstGeom prst="rect">
+            <a:avLst/>
+          </a:prstGeom>
+          <a:noFill/>
+          <a:ln/>
+        </p:spPr>
+        <p:txBody>
+          <a:bodyPr wrap="square" lIns="0" tIns="0" rIns="0" bIns="0" rtlCol="0" anchor="t"/>
+          <a:lstStyle/>
+          <a:p>
+            <a:pPr indent="0" marL="0">
+              <a:lnSpc>
+                <a:spcPts val="1600"/>
+              </a:lnSpc>
+              <a:buNone/>
+            </a:pPr>
+            <a:r>
+              <a:rPr lang="en-US" sz="1250" dirty="0">
+                <a:solidFill>
+                  <a:srgbClr val="24282E"/>
+                </a:solidFill>
+                <a:latin typeface="Calibri" pitchFamily="34" charset="0"/>
+                <a:ea typeface="Calibri" pitchFamily="34" charset="-122"/>
+                <a:cs typeface="Calibri" pitchFamily="34" charset="-120"/>
+              </a:rPr>
+              <a:t>Sabaliauskas, Uniform n-grids on Catmull-Clark limit surfaces of arbitrary polygon meshes (2026); a line-by-line port to pure Python.</a:t>
+            </a:r>
+            <a:endParaRPr lang="en-US" sz="1250" dirty="0"/>
+          </a:p>
+        </p:txBody>
+      </p:sp>
     </p:spTree>
   </p:cSld>
   <p:clrMapOvr>
@@ -17080,7 +18137,7 @@
                 <a:ea typeface="Calibri" pitchFamily="34" charset="-122"/>
                 <a:cs typeface="Calibri" pitchFamily="34" charset="-120"/>
               </a:rPr>
-              <a:t>COMPATIBILITY</a:t>
+              <a:t>SURFACE()</a:t>
             </a:r>
             <a:endParaRPr lang="en-US" sz="1100" dirty="0"/>
           </a:p>
@@ -17119,7 +18176,7 @@
                 <a:ea typeface="Cambria" pitchFamily="34" charset="-122"/>
                 <a:cs typeface="Cambria" pitchFamily="34" charset="-120"/>
               </a:rPr>
-              <a:t>From 1.2 to 2.1</a:t>
+              <a:t>Twenty-five surfaces by name</a:t>
             </a:r>
             <a:endParaRPr lang="en-US" sz="3000" dirty="0"/>
           </a:p>
@@ -17164,9 +18221,2911 @@
           </a:p>
         </p:txBody>
       </p:sp>
+      <p:sp>
+        <p:nvSpPr>
+          <p:cNvPr id="5" name="Shape 3"/>
+          <p:cNvSpPr/>
+          <p:nvPr/>
+        </p:nvSpPr>
+        <p:spPr>
+          <a:xfrm>
+            <a:off x="566928" y="1463040"/>
+            <a:ext cx="4709160" cy="2148840"/>
+          </a:xfrm>
+          <a:prstGeom prst="roundRect">
+            <a:avLst>
+              <a:gd name="adj" fmla="val 2553"/>
+            </a:avLst>
+          </a:prstGeom>
+          <a:solidFill>
+            <a:srgbClr val="F7F7F8"/>
+          </a:solidFill>
+          <a:ln w="9525">
+            <a:solidFill>
+              <a:srgbClr val="E3E1DD"/>
+            </a:solidFill>
+            <a:prstDash val="solid"/>
+          </a:ln>
+        </p:spPr>
+      </p:sp>
+      <p:sp>
+        <p:nvSpPr>
+          <p:cNvPr id="6" name="Text 4"/>
+          <p:cNvSpPr txBox="1"/>
+          <p:nvPr/>
+        </p:nvSpPr>
+        <p:spPr>
+          <a:xfrm>
+            <a:off x="713232" y="1591056"/>
+            <a:ext cx="4416552" cy="1892808"/>
+          </a:xfrm>
+          <a:prstGeom prst="rect">
+            <a:avLst/>
+          </a:prstGeom>
+          <a:noFill/>
+          <a:ln/>
+        </p:spPr>
+        <p:txBody>
+          <a:bodyPr wrap="square" lIns="0" tIns="0" rIns="0" bIns="0" rtlCol="0" anchor="t"/>
+          <a:lstStyle/>
+          <a:p>
+            <a:pPr indent="0" marL="0">
+              <a:lnSpc>
+                <a:spcPts val="1600"/>
+              </a:lnSpc>
+              <a:buNone/>
+            </a:pPr>
+            <a:r>
+              <a:rPr lang="en-US" sz="1150" dirty="0">
+                <a:solidFill>
+                  <a:srgbClr val="2C3138"/>
+                </a:solidFill>
+                <a:latin typeface="Consolas" pitchFamily="34" charset="0"/>
+                <a:ea typeface="Consolas" pitchFamily="34" charset="-122"/>
+                <a:cs typeface="Consolas" pitchFamily="34" charset="-120"/>
+              </a:rPr>
+              <a:t>print(add.surface_names())</a:t>
+            </a:r>
+            <a:endParaRPr lang="en-US" sz="1150" dirty="0"/>
+          </a:p>
+          <a:p>
+            <a:pPr indent="0" marL="0">
+              <a:lnSpc>
+                <a:spcPts val="1600"/>
+              </a:lnSpc>
+              <a:buNone/>
+            </a:pPr>
+            <a:r>
+              <a:rPr lang="en-US" sz="1150" dirty="0">
+                <a:solidFill>
+                  <a:srgbClr val="2C3138"/>
+                </a:solidFill>
+                <a:latin typeface="Consolas" pitchFamily="34" charset="0"/>
+                <a:ea typeface="Consolas" pitchFamily="34" charset="-122"/>
+                <a:cs typeface="Consolas" pitchFamily="34" charset="-120"/>
+              </a:rPr>
+              <a:t>add.surface("klein_bottle", [0, 0, 0], 4, 120)</a:t>
+            </a:r>
+            <a:endParaRPr lang="en-US" sz="1150" dirty="0"/>
+          </a:p>
+          <a:p>
+            <a:pPr indent="0" marL="0">
+              <a:lnSpc>
+                <a:spcPts val="1600"/>
+              </a:lnSpc>
+              <a:buNone/>
+            </a:pPr>
+            <a:r>
+              <a:rPr lang="en-US" sz="1150" dirty="0">
+                <a:solidFill>
+                  <a:srgbClr val="2C3138"/>
+                </a:solidFill>
+                <a:latin typeface="Consolas" pitchFamily="34" charset="0"/>
+                <a:ea typeface="Consolas" pitchFamily="34" charset="-122"/>
+                <a:cs typeface="Consolas" pitchFamily="34" charset="-120"/>
+              </a:rPr>
+              <a:t>add.surface("dini", [6, 0, 0], 4,</a:t>
+            </a:r>
+            <a:endParaRPr lang="en-US" sz="1150" dirty="0"/>
+          </a:p>
+          <a:p>
+            <a:pPr indent="0" marL="0">
+              <a:lnSpc>
+                <a:spcPts val="1600"/>
+              </a:lnSpc>
+              <a:buNone/>
+            </a:pPr>
+            <a:r>
+              <a:rPr lang="en-US" sz="1150" dirty="0">
+                <a:solidFill>
+                  <a:srgbClr val="2C3138"/>
+                </a:solidFill>
+                <a:latin typeface="Consolas" pitchFamily="34" charset="0"/>
+                <a:ea typeface="Consolas" pitchFamily="34" charset="-122"/>
+                <a:cs typeface="Consolas" pitchFamily="34" charset="-120"/>
+              </a:rPr>
+              <a:t>            color=lambda u, v: add.hsv(u / 12))</a:t>
+            </a:r>
+            <a:endParaRPr lang="en-US" sz="1150" dirty="0"/>
+          </a:p>
+          <a:p>
+            <a:pPr indent="0" marL="0">
+              <a:lnSpc>
+                <a:spcPts val="1600"/>
+              </a:lnSpc>
+              <a:buNone/>
+            </a:pPr>
+            <a:r>
+              <a:rPr lang="en-US" sz="1150" dirty="0">
+                <a:solidFill>
+                  <a:srgbClr val="2C3138"/>
+                </a:solidFill>
+                <a:latin typeface="Consolas" pitchFamily="34" charset="0"/>
+                <a:ea typeface="Consolas" pitchFamily="34" charset="-122"/>
+                <a:cs typeface="Consolas" pitchFamily="34" charset="-120"/>
+              </a:rPr>
+              <a:t>add.surface("pillow", [-6, 0, 0], 3, a=0.9)</a:t>
+            </a:r>
+            <a:endParaRPr lang="en-US" sz="1150" dirty="0"/>
+          </a:p>
+          <a:p>
+            <a:pPr indent="0" marL="0">
+              <a:lnSpc>
+                <a:spcPts val="1600"/>
+              </a:lnSpc>
+              <a:buNone/>
+            </a:pPr>
+            <a:endParaRPr lang="en-US" sz="1150" dirty="0"/>
+          </a:p>
+          <a:p>
+            <a:pPr indent="0" marL="0">
+              <a:lnSpc>
+                <a:spcPts val="1600"/>
+              </a:lnSpc>
+              <a:buNone/>
+            </a:pPr>
+            <a:r>
+              <a:rPr lang="en-US" sz="1150" dirty="0">
+                <a:solidFill>
+                  <a:srgbClr val="2C3138"/>
+                </a:solidFill>
+                <a:latin typeface="Consolas" pitchFamily="34" charset="0"/>
+                <a:ea typeface="Consolas" pitchFamily="34" charset="-122"/>
+                <a:cs typeface="Consolas" pitchFamily="34" charset="-120"/>
+              </a:rPr>
+              <a:t>owl = add.surface_function("owl")   # bare f(u, v)</a:t>
+            </a:r>
+            <a:endParaRPr lang="en-US" sz="1150" dirty="0"/>
+          </a:p>
+        </p:txBody>
+      </p:sp>
+      <p:sp>
+        <p:nvSpPr>
+          <p:cNvPr id="7" name="Shape 5"/>
+          <p:cNvSpPr/>
+          <p:nvPr/>
+        </p:nvSpPr>
+        <p:spPr>
+          <a:xfrm>
+            <a:off x="5440680" y="1463040"/>
+            <a:ext cx="3136392" cy="2148840"/>
+          </a:xfrm>
+          <a:prstGeom prst="roundRect">
+            <a:avLst>
+              <a:gd name="adj" fmla="val 2553"/>
+            </a:avLst>
+          </a:prstGeom>
+          <a:solidFill>
+            <a:srgbClr val="FAFAFA"/>
+          </a:solidFill>
+          <a:ln w="9525">
+            <a:solidFill>
+              <a:srgbClr val="E3E1DD"/>
+            </a:solidFill>
+            <a:prstDash val="solid"/>
+          </a:ln>
+        </p:spPr>
+      </p:sp>
+      <p:pic>
+        <p:nvPicPr>
+          <p:cNvPr id="8" name="Image 0" descr="/home/claude/add3d/docs/images/surface_zoo.png">    </p:cNvPr>
+          <p:cNvPicPr>
+            <a:picLocks noChangeAspect="1"/>
+          </p:cNvPicPr>
+          <p:nvPr/>
+        </p:nvPicPr>
+        <p:blipFill>
+          <a:blip r:embed="rId1"/>
+          <a:srcRect l="0" r="0" t="0" b="0"/>
+          <a:stretch/>
+        </p:blipFill>
+        <p:spPr>
+          <a:xfrm>
+            <a:off x="5495544" y="1517904"/>
+            <a:ext cx="3026664" cy="2039112"/>
+          </a:xfrm>
+          <a:prstGeom prst="rect">
+            <a:avLst/>
+          </a:prstGeom>
+        </p:spPr>
+      </p:pic>
+      <p:sp>
+        <p:nvSpPr>
+          <p:cNvPr id="9" name="Text 6"/>
+          <p:cNvSpPr txBox="1"/>
+          <p:nvPr/>
+        </p:nvSpPr>
+        <p:spPr>
+          <a:xfrm>
+            <a:off x="5440680" y="3675888"/>
+            <a:ext cx="3136392" cy="457200"/>
+          </a:xfrm>
+          <a:prstGeom prst="rect">
+            <a:avLst/>
+          </a:prstGeom>
+          <a:noFill/>
+          <a:ln/>
+        </p:spPr>
+        <p:txBody>
+          <a:bodyPr wrap="square" lIns="0" tIns="0" rIns="0" bIns="0" rtlCol="0" anchor="t"/>
+          <a:lstStyle/>
+          <a:p>
+            <a:pPr algn="ctr" indent="0" marL="0">
+              <a:buNone/>
+            </a:pPr>
+            <a:r>
+              <a:rPr lang="en-US" sz="1100" dirty="0">
+                <a:solidFill>
+                  <a:srgbClr val="6B7280"/>
+                </a:solidFill>
+                <a:latin typeface="Calibri" pitchFamily="34" charset="0"/>
+                <a:ea typeface="Calibri" pitchFamily="34" charset="-122"/>
+                <a:cs typeface="Calibri" pitchFamily="34" charset="-120"/>
+              </a:rPr>
+              <a:t>34_surface_zoo.py</a:t>
+            </a:r>
+            <a:endParaRPr lang="en-US" sz="1100" dirty="0"/>
+          </a:p>
+        </p:txBody>
+      </p:sp>
+      <p:sp>
+        <p:nvSpPr>
+          <p:cNvPr id="10" name="Shape 7"/>
+          <p:cNvSpPr/>
+          <p:nvPr/>
+        </p:nvSpPr>
+        <p:spPr>
+          <a:xfrm>
+            <a:off x="566928" y="3977640"/>
+            <a:ext cx="3931920" cy="2011680"/>
+          </a:xfrm>
+          <a:prstGeom prst="roundRect">
+            <a:avLst>
+              <a:gd name="adj" fmla="val 2727"/>
+            </a:avLst>
+          </a:prstGeom>
+          <a:solidFill>
+            <a:srgbClr val="FAFAFA"/>
+          </a:solidFill>
+          <a:ln w="9525">
+            <a:solidFill>
+              <a:srgbClr val="E3E1DD"/>
+            </a:solidFill>
+            <a:prstDash val="solid"/>
+          </a:ln>
+        </p:spPr>
+      </p:sp>
+      <p:pic>
+        <p:nvPicPr>
+          <p:cNvPr id="11" name="Image 1" descr="/home/claude/add3d/docs/images/knot_curve.png">    </p:cNvPr>
+          <p:cNvPicPr>
+            <a:picLocks noChangeAspect="1"/>
+          </p:cNvPicPr>
+          <p:nvPr/>
+        </p:nvPicPr>
+        <p:blipFill>
+          <a:blip r:embed="rId2"/>
+          <a:srcRect l="0" r="0" t="0" b="0"/>
+          <a:stretch/>
+        </p:blipFill>
+        <p:spPr>
+          <a:xfrm>
+            <a:off x="621792" y="4032504"/>
+            <a:ext cx="3822192" cy="1901952"/>
+          </a:xfrm>
+          <a:prstGeom prst="rect">
+            <a:avLst/>
+          </a:prstGeom>
+        </p:spPr>
+      </p:pic>
+      <p:sp>
+        <p:nvSpPr>
+          <p:cNvPr id="12" name="Text 8"/>
+          <p:cNvSpPr txBox="1"/>
+          <p:nvPr/>
+        </p:nvSpPr>
+        <p:spPr>
+          <a:xfrm>
+            <a:off x="566928" y="6053328"/>
+            <a:ext cx="3931920" cy="457200"/>
+          </a:xfrm>
+          <a:prstGeom prst="rect">
+            <a:avLst/>
+          </a:prstGeom>
+          <a:noFill/>
+          <a:ln/>
+        </p:spPr>
+        <p:txBody>
+          <a:bodyPr wrap="square" lIns="0" tIns="0" rIns="0" bIns="0" rtlCol="0" anchor="t"/>
+          <a:lstStyle/>
+          <a:p>
+            <a:pPr algn="ctr" indent="0" marL="0">
+              <a:buNone/>
+            </a:pPr>
+            <a:r>
+              <a:rPr lang="en-US" sz="1100" dirty="0">
+                <a:solidFill>
+                  <a:srgbClr val="6B7280"/>
+                </a:solidFill>
+                <a:latin typeface="Calibri" pitchFamily="34" charset="0"/>
+                <a:ea typeface="Calibri" pitchFamily="34" charset="-122"/>
+                <a:cs typeface="Calibri" pitchFamily="34" charset="-120"/>
+              </a:rPr>
+              <a:t>35_knot_curve.py -- a knot from rotating circles, one curve() call</a:t>
+            </a:r>
+            <a:endParaRPr lang="en-US" sz="1100" dirty="0"/>
+          </a:p>
+        </p:txBody>
+      </p:sp>
+      <p:sp>
+        <p:nvSpPr>
+          <p:cNvPr id="13" name="Shape 9"/>
+          <p:cNvSpPr/>
+          <p:nvPr/>
+        </p:nvSpPr>
+        <p:spPr>
+          <a:xfrm>
+            <a:off x="4663440" y="3977640"/>
+            <a:ext cx="3913632" cy="2011680"/>
+          </a:xfrm>
+          <a:prstGeom prst="roundRect">
+            <a:avLst>
+              <a:gd name="adj" fmla="val 2727"/>
+            </a:avLst>
+          </a:prstGeom>
+          <a:solidFill>
+            <a:srgbClr val="FAFAFA"/>
+          </a:solidFill>
+          <a:ln w="9525">
+            <a:solidFill>
+              <a:srgbClr val="E3E1DD"/>
+            </a:solidFill>
+            <a:prstDash val="solid"/>
+          </a:ln>
+        </p:spPr>
+      </p:sp>
+      <p:pic>
+        <p:nvPicPr>
+          <p:cNvPr id="14" name="Image 2" descr="/home/claude/add3d/docs/images/minecraft_sphere.png">    </p:cNvPr>
+          <p:cNvPicPr>
+            <a:picLocks noChangeAspect="1"/>
+          </p:cNvPicPr>
+          <p:nvPr/>
+        </p:nvPicPr>
+        <p:blipFill>
+          <a:blip r:embed="rId3"/>
+          <a:srcRect l="0" r="0" t="0" b="0"/>
+          <a:stretch/>
+        </p:blipFill>
+        <p:spPr>
+          <a:xfrm>
+            <a:off x="4718304" y="4032504"/>
+            <a:ext cx="3803904" cy="1901952"/>
+          </a:xfrm>
+          <a:prstGeom prst="rect">
+            <a:avLst/>
+          </a:prstGeom>
+        </p:spPr>
+      </p:pic>
+      <p:sp>
+        <p:nvSpPr>
+          <p:cNvPr id="15" name="Text 10"/>
+          <p:cNvSpPr txBox="1"/>
+          <p:nvPr/>
+        </p:nvSpPr>
+        <p:spPr>
+          <a:xfrm>
+            <a:off x="4663440" y="6053328"/>
+            <a:ext cx="3913632" cy="457200"/>
+          </a:xfrm>
+          <a:prstGeom prst="rect">
+            <a:avLst/>
+          </a:prstGeom>
+          <a:noFill/>
+          <a:ln/>
+        </p:spPr>
+        <p:txBody>
+          <a:bodyPr wrap="square" lIns="0" tIns="0" rIns="0" bIns="0" rtlCol="0" anchor="t"/>
+          <a:lstStyle/>
+          <a:p>
+            <a:pPr algn="ctr" indent="0" marL="0">
+              <a:buNone/>
+            </a:pPr>
+            <a:r>
+              <a:rPr lang="en-US" sz="1100" dirty="0">
+                <a:solidFill>
+                  <a:srgbClr val="6B7280"/>
+                </a:solidFill>
+                <a:latin typeface="Calibri" pitchFamily="34" charset="0"/>
+                <a:ea typeface="Calibri" pitchFamily="34" charset="-122"/>
+                <a:cs typeface="Calibri" pitchFamily="34" charset="-120"/>
+              </a:rPr>
+              <a:t>36_minecraft_sphere.py -- Maple, blocks, geodesic</a:t>
+            </a:r>
+            <a:endParaRPr lang="en-US" sz="1100" dirty="0"/>
+          </a:p>
+        </p:txBody>
+      </p:sp>
+    </p:spTree>
+  </p:cSld>
+  <p:clrMapOvr>
+    <a:masterClrMapping/>
+  </p:clrMapOvr>
+</p:sld>
+</file>
+
+<file path=ppt/slides/slide32.xml><?xml version="1.0" encoding="utf-8"?>
+<p:sld xmlns:a="http://schemas.openxmlformats.org/drawingml/2006/main" xmlns:r="http://schemas.openxmlformats.org/officeDocument/2006/relationships" xmlns:p="http://schemas.openxmlformats.org/presentationml/2006/main">
+  <p:cSld name="Slide 32">
+    <p:bg>
+      <p:bgPr>
+        <a:solidFill>
+          <a:srgbClr val="FFFFFF"/>
+        </a:solidFill>
+      </p:bgPr>
+    </p:bg>
+    <p:spTree>
+      <p:nvGrpSpPr>
+        <p:cNvPr id="1" name=""/>
+        <p:cNvGrpSpPr/>
+        <p:nvPr/>
+      </p:nvGrpSpPr>
+      <p:grpSpPr>
+        <a:xfrm>
+          <a:off x="0" y="0"/>
+          <a:ext cx="0" cy="0"/>
+          <a:chOff x="0" y="0"/>
+          <a:chExt cx="0" cy="0"/>
+        </a:xfrm>
+      </p:grpSpPr>
+      <p:sp>
+        <p:nvSpPr>
+          <p:cNvPr id="2" name="Text 0"/>
+          <p:cNvSpPr txBox="1"/>
+          <p:nvPr/>
+        </p:nvSpPr>
+        <p:spPr>
+          <a:xfrm>
+            <a:off x="566928" y="329184"/>
+            <a:ext cx="8010144" cy="237744"/>
+          </a:xfrm>
+          <a:prstGeom prst="rect">
+            <a:avLst/>
+          </a:prstGeom>
+          <a:noFill/>
+          <a:ln/>
+        </p:spPr>
+        <p:txBody>
+          <a:bodyPr wrap="square" lIns="0" tIns="0" rIns="0" bIns="0" rtlCol="0" anchor="ctr"/>
+          <a:lstStyle/>
+          <a:p>
+            <a:pPr indent="0" marL="0">
+              <a:buNone/>
+            </a:pPr>
+            <a:r>
+              <a:rPr lang="en-US" sz="1100" b="1" spc="160" kern="0" dirty="0">
+                <a:solidFill>
+                  <a:srgbClr val="8A4B1E"/>
+                </a:solidFill>
+                <a:latin typeface="Calibri" pitchFamily="34" charset="0"/>
+                <a:ea typeface="Calibri" pitchFamily="34" charset="-122"/>
+                <a:cs typeface="Calibri" pitchFamily="34" charset="-120"/>
+              </a:rPr>
+              <a:t>.OBJ + .MTL</a:t>
+            </a:r>
+            <a:endParaRPr lang="en-US" sz="1100" dirty="0"/>
+          </a:p>
+        </p:txBody>
+      </p:sp>
+      <p:sp>
+        <p:nvSpPr>
+          <p:cNvPr id="3" name="Text 1"/>
+          <p:cNvSpPr txBox="1"/>
+          <p:nvPr/>
+        </p:nvSpPr>
+        <p:spPr>
+          <a:xfrm>
+            <a:off x="566928" y="548640"/>
+            <a:ext cx="8010144" cy="658368"/>
+          </a:xfrm>
+          <a:prstGeom prst="rect">
+            <a:avLst/>
+          </a:prstGeom>
+          <a:noFill/>
+          <a:ln/>
+        </p:spPr>
+        <p:txBody>
+          <a:bodyPr wrap="square" lIns="0" tIns="0" rIns="0" bIns="0" rtlCol="0" anchor="t"/>
+          <a:lstStyle/>
+          <a:p>
+            <a:pPr indent="0" marL="0">
+              <a:buNone/>
+            </a:pPr>
+            <a:r>
+              <a:rPr lang="en-US" sz="3000" b="1" dirty="0">
+                <a:solidFill>
+                  <a:srgbClr val="24282E"/>
+                </a:solidFill>
+                <a:latin typeface="Cambria" pitchFamily="34" charset="0"/>
+                <a:ea typeface="Cambria" pitchFamily="34" charset="-122"/>
+                <a:cs typeface="Cambria" pitchFamily="34" charset="-120"/>
+              </a:rPr>
+              <a:t>Glass, pictures and the Sketchfab limits</a:t>
+            </a:r>
+            <a:endParaRPr lang="en-US" sz="3000" dirty="0"/>
+          </a:p>
+        </p:txBody>
+      </p:sp>
+      <p:sp>
+        <p:nvSpPr>
+          <p:cNvPr id="4" name="Text 2"/>
+          <p:cNvSpPr txBox="1"/>
+          <p:nvPr/>
+        </p:nvSpPr>
+        <p:spPr>
+          <a:xfrm>
+            <a:off x="8119872" y="6382512"/>
+            <a:ext cx="457200" cy="237744"/>
+          </a:xfrm>
+          <a:prstGeom prst="rect">
+            <a:avLst/>
+          </a:prstGeom>
+          <a:noFill/>
+          <a:ln/>
+        </p:spPr>
+        <p:txBody>
+          <a:bodyPr wrap="square" lIns="0" tIns="0" rIns="0" bIns="0" rtlCol="0" anchor="ctr"/>
+          <a:lstStyle/>
+          <a:p>
+            <a:pPr algn="r" indent="0" marL="0">
+              <a:buNone/>
+            </a:pPr>
+            <a:r>
+              <a:rPr lang="en-US" sz="1000" dirty="0">
+                <a:solidFill>
+                  <a:srgbClr val="6B7280"/>
+                </a:solidFill>
+                <a:latin typeface="Calibri" pitchFamily="34" charset="0"/>
+                <a:ea typeface="Calibri" pitchFamily="34" charset="-122"/>
+                <a:cs typeface="Calibri" pitchFamily="34" charset="-120"/>
+              </a:rPr>
+              <a:t>31</a:t>
+            </a:r>
+            <a:endParaRPr lang="en-US" sz="1000" dirty="0"/>
+          </a:p>
+        </p:txBody>
+      </p:sp>
+      <p:sp>
+        <p:nvSpPr>
+          <p:cNvPr id="5" name="Shape 3"/>
+          <p:cNvSpPr/>
+          <p:nvPr/>
+        </p:nvSpPr>
+        <p:spPr>
+          <a:xfrm>
+            <a:off x="566928" y="1463040"/>
+            <a:ext cx="4709160" cy="2148840"/>
+          </a:xfrm>
+          <a:prstGeom prst="roundRect">
+            <a:avLst>
+              <a:gd name="adj" fmla="val 2553"/>
+            </a:avLst>
+          </a:prstGeom>
+          <a:solidFill>
+            <a:srgbClr val="F7F7F8"/>
+          </a:solidFill>
+          <a:ln w="9525">
+            <a:solidFill>
+              <a:srgbClr val="E3E1DD"/>
+            </a:solidFill>
+            <a:prstDash val="solid"/>
+          </a:ln>
+        </p:spPr>
+      </p:sp>
+      <p:sp>
+        <p:nvSpPr>
+          <p:cNvPr id="6" name="Text 4"/>
+          <p:cNvSpPr txBox="1"/>
+          <p:nvPr/>
+        </p:nvSpPr>
+        <p:spPr>
+          <a:xfrm>
+            <a:off x="713232" y="1591056"/>
+            <a:ext cx="4416552" cy="1892808"/>
+          </a:xfrm>
+          <a:prstGeom prst="rect">
+            <a:avLst/>
+          </a:prstGeom>
+          <a:noFill/>
+          <a:ln/>
+        </p:spPr>
+        <p:txBody>
+          <a:bodyPr wrap="square" lIns="0" tIns="0" rIns="0" bIns="0" rtlCol="0" anchor="t"/>
+          <a:lstStyle/>
+          <a:p>
+            <a:pPr indent="0" marL="0">
+              <a:lnSpc>
+                <a:spcPts val="1600"/>
+              </a:lnSpc>
+              <a:buNone/>
+            </a:pPr>
+            <a:r>
+              <a:rPr lang="en-US" sz="1150" dirty="0">
+                <a:solidFill>
+                  <a:srgbClr val="2C3138"/>
+                </a:solidFill>
+                <a:latin typeface="Consolas" pitchFamily="34" charset="0"/>
+                <a:ea typeface="Consolas" pitchFamily="34" charset="-122"/>
+                <a:cs typeface="Consolas" pitchFamily="34" charset="-120"/>
+              </a:rPr>
+              <a:t>glass = add.transparent("sky", 0.35)  # 0..1</a:t>
+            </a:r>
+            <a:endParaRPr lang="en-US" sz="1150" dirty="0"/>
+          </a:p>
+          <a:p>
+            <a:pPr indent="0" marL="0">
+              <a:lnSpc>
+                <a:spcPts val="1600"/>
+              </a:lnSpc>
+              <a:buNone/>
+            </a:pPr>
+            <a:r>
+              <a:rPr lang="en-US" sz="1150" dirty="0">
+                <a:solidFill>
+                  <a:srgbClr val="2C3138"/>
+                </a:solidFill>
+                <a:latin typeface="Consolas" pitchFamily="34" charset="0"/>
+                <a:ea typeface="Consolas" pitchFamily="34" charset="-122"/>
+                <a:cs typeface="Consolas" pitchFamily="34" charset="-120"/>
+              </a:rPr>
+              <a:t>add.cuboid([0, 1.5, 2], [2, 1.2, 0.1], glass)</a:t>
+            </a:r>
+            <a:endParaRPr lang="en-US" sz="1150" dirty="0"/>
+          </a:p>
+          <a:p>
+            <a:pPr indent="0" marL="0">
+              <a:lnSpc>
+                <a:spcPts val="1600"/>
+              </a:lnSpc>
+              <a:buNone/>
+            </a:pPr>
+            <a:r>
+              <a:rPr lang="en-US" sz="1150" dirty="0">
+                <a:solidFill>
+                  <a:srgbClr val="2C3138"/>
+                </a:solidFill>
+                <a:latin typeface="Consolas" pitchFamily="34" charset="0"/>
+                <a:ea typeface="Consolas" pitchFamily="34" charset="-122"/>
+                <a:cs typeface="Consolas" pitchFamily="34" charset="-120"/>
+              </a:rPr>
+              <a:t>wall = add.make(add.cuboid, [0, 1.5, 0], [6, 3, 1])</a:t>
+            </a:r>
+            <a:endParaRPr lang="en-US" sz="1150" dirty="0"/>
+          </a:p>
+          <a:p>
+            <a:pPr indent="0" marL="0">
+              <a:lnSpc>
+                <a:spcPts val="1600"/>
+              </a:lnSpc>
+              <a:buNone/>
+            </a:pPr>
+            <a:r>
+              <a:rPr lang="en-US" sz="1150" dirty="0">
+                <a:solidFill>
+                  <a:srgbClr val="2C3138"/>
+                </a:solidFill>
+                <a:latin typeface="Consolas" pitchFamily="34" charset="0"/>
+                <a:ea typeface="Consolas" pitchFamily="34" charset="-122"/>
+                <a:cs typeface="Consolas" pitchFamily="34" charset="-120"/>
+              </a:rPr>
+              <a:t>add.mesh(add.texture(wall, "bricks.png", "box"))</a:t>
+            </a:r>
+            <a:endParaRPr lang="en-US" sz="1150" dirty="0"/>
+          </a:p>
+          <a:p>
+            <a:pPr indent="0" marL="0">
+              <a:lnSpc>
+                <a:spcPts val="1600"/>
+              </a:lnSpc>
+              <a:buNone/>
+            </a:pPr>
+            <a:endParaRPr lang="en-US" sz="1150" dirty="0"/>
+          </a:p>
+          <a:p>
+            <a:pPr indent="0" marL="0">
+              <a:lnSpc>
+                <a:spcPts val="1600"/>
+              </a:lnSpc>
+              <a:buNone/>
+            </a:pPr>
+            <a:r>
+              <a:rPr lang="en-US" sz="1150" dirty="0">
+                <a:solidFill>
+                  <a:srgbClr val="2C3138"/>
+                </a:solidFill>
+                <a:latin typeface="Consolas" pitchFamily="34" charset="0"/>
+                <a:ea typeface="Consolas" pitchFamily="34" charset="-122"/>
+                <a:cs typeface="Consolas" pitchFamily="34" charset="-120"/>
+              </a:rPr>
+              <a:t>add.check()     # &lt;= 50 MB, &lt;= 50 colours</a:t>
+            </a:r>
+            <a:endParaRPr lang="en-US" sz="1150" dirty="0"/>
+          </a:p>
+          <a:p>
+            <a:pPr indent="0" marL="0">
+              <a:lnSpc>
+                <a:spcPts val="1600"/>
+              </a:lnSpc>
+              <a:buNone/>
+            </a:pPr>
+            <a:r>
+              <a:rPr lang="en-US" sz="1150" dirty="0">
+                <a:solidFill>
+                  <a:srgbClr val="2C3138"/>
+                </a:solidFill>
+                <a:latin typeface="Consolas" pitchFamily="34" charset="0"/>
+                <a:ea typeface="Consolas" pitchFamily="34" charset="-122"/>
+                <a:cs typeface="Consolas" pitchFamily="34" charset="-120"/>
+              </a:rPr>
+              <a:t>add.save("house.obj", colors=50)   # .mtl</a:t>
+            </a:r>
+            <a:endParaRPr lang="en-US" sz="1150" dirty="0"/>
+          </a:p>
+        </p:txBody>
+      </p:sp>
+      <p:sp>
+        <p:nvSpPr>
+          <p:cNvPr id="7" name="Shape 5"/>
+          <p:cNvSpPr/>
+          <p:nvPr/>
+        </p:nvSpPr>
+        <p:spPr>
+          <a:xfrm>
+            <a:off x="5440680" y="1463040"/>
+            <a:ext cx="3136392" cy="2148840"/>
+          </a:xfrm>
+          <a:prstGeom prst="roundRect">
+            <a:avLst>
+              <a:gd name="adj" fmla="val 2553"/>
+            </a:avLst>
+          </a:prstGeom>
+          <a:solidFill>
+            <a:srgbClr val="FAFAFA"/>
+          </a:solidFill>
+          <a:ln w="9525">
+            <a:solidFill>
+              <a:srgbClr val="E3E1DD"/>
+            </a:solidFill>
+            <a:prstDash val="solid"/>
+          </a:ln>
+        </p:spPr>
+      </p:sp>
+      <p:pic>
+        <p:nvPicPr>
+          <p:cNvPr id="8" name="Image 0" descr="/home/claude/add3d/docs/images/glass_and_textures.png">    </p:cNvPr>
+          <p:cNvPicPr>
+            <a:picLocks noChangeAspect="1"/>
+          </p:cNvPicPr>
+          <p:nvPr/>
+        </p:nvPicPr>
+        <p:blipFill>
+          <a:blip r:embed="rId1"/>
+          <a:srcRect l="0" r="0" t="0" b="0"/>
+          <a:stretch/>
+        </p:blipFill>
+        <p:spPr>
+          <a:xfrm>
+            <a:off x="5495544" y="1517904"/>
+            <a:ext cx="3026664" cy="2039112"/>
+          </a:xfrm>
+          <a:prstGeom prst="rect">
+            <a:avLst/>
+          </a:prstGeom>
+        </p:spPr>
+      </p:pic>
+      <p:sp>
+        <p:nvSpPr>
+          <p:cNvPr id="9" name="Text 6"/>
+          <p:cNvSpPr txBox="1"/>
+          <p:nvPr/>
+        </p:nvSpPr>
+        <p:spPr>
+          <a:xfrm>
+            <a:off x="5440680" y="3675888"/>
+            <a:ext cx="3136392" cy="457200"/>
+          </a:xfrm>
+          <a:prstGeom prst="rect">
+            <a:avLst/>
+          </a:prstGeom>
+          <a:noFill/>
+          <a:ln/>
+        </p:spPr>
+        <p:txBody>
+          <a:bodyPr wrap="square" lIns="0" tIns="0" rIns="0" bIns="0" rtlCol="0" anchor="t"/>
+          <a:lstStyle/>
+          <a:p>
+            <a:pPr algn="ctr" indent="0" marL="0">
+              <a:buNone/>
+            </a:pPr>
+            <a:r>
+              <a:rPr lang="en-US" sz="1100" dirty="0">
+                <a:solidFill>
+                  <a:srgbClr val="6B7280"/>
+                </a:solidFill>
+                <a:latin typeface="Calibri" pitchFamily="34" charset="0"/>
+                <a:ea typeface="Calibri" pitchFamily="34" charset="-122"/>
+                <a:cs typeface="Calibri" pitchFamily="34" charset="-120"/>
+              </a:rPr>
+              <a:t>45_glass_and_textures.py</a:t>
+            </a:r>
+            <a:endParaRPr lang="en-US" sz="1100" dirty="0"/>
+          </a:p>
+        </p:txBody>
+      </p:sp>
+      <p:sp>
+        <p:nvSpPr>
+          <p:cNvPr id="10" name="Shape 7"/>
+          <p:cNvSpPr/>
+          <p:nvPr/>
+        </p:nvSpPr>
+        <p:spPr>
+          <a:xfrm>
+            <a:off x="566928" y="4023360"/>
+            <a:ext cx="2511552" cy="1600200"/>
+          </a:xfrm>
+          <a:prstGeom prst="roundRect">
+            <a:avLst>
+              <a:gd name="adj" fmla="val 2857"/>
+            </a:avLst>
+          </a:prstGeom>
+          <a:solidFill>
+            <a:srgbClr val="F6EFE8"/>
+          </a:solidFill>
+          <a:ln/>
+        </p:spPr>
+      </p:sp>
+      <p:sp>
+        <p:nvSpPr>
+          <p:cNvPr id="11" name="Text 8"/>
+          <p:cNvSpPr txBox="1"/>
+          <p:nvPr/>
+        </p:nvSpPr>
+        <p:spPr>
+          <a:xfrm>
+            <a:off x="768096" y="4169664"/>
+            <a:ext cx="2109216" cy="292608"/>
+          </a:xfrm>
+          <a:prstGeom prst="rect">
+            <a:avLst/>
+          </a:prstGeom>
+          <a:noFill/>
+          <a:ln/>
+        </p:spPr>
+        <p:txBody>
+          <a:bodyPr wrap="square" lIns="0" tIns="0" rIns="0" bIns="0" rtlCol="0" anchor="ctr"/>
+          <a:lstStyle/>
+          <a:p>
+            <a:pPr indent="0" marL="0">
+              <a:buNone/>
+            </a:pPr>
+            <a:r>
+              <a:rPr lang="en-US" sz="1500" b="1" dirty="0">
+                <a:solidFill>
+                  <a:srgbClr val="8A4B1E"/>
+                </a:solidFill>
+                <a:latin typeface="Calibri" pitchFamily="34" charset="0"/>
+                <a:ea typeface="Calibri" pitchFamily="34" charset="-122"/>
+                <a:cs typeface="Calibri" pitchFamily="34" charset="-120"/>
+              </a:rPr>
+              <a:t>Optional</a:t>
+            </a:r>
+            <a:endParaRPr lang="en-US" sz="1500" dirty="0"/>
+          </a:p>
+        </p:txBody>
+      </p:sp>
+      <p:sp>
+        <p:nvSpPr>
+          <p:cNvPr id="12" name="Text 9"/>
+          <p:cNvSpPr txBox="1"/>
+          <p:nvPr/>
+        </p:nvSpPr>
+        <p:spPr>
+          <a:xfrm>
+            <a:off x="768096" y="4498848"/>
+            <a:ext cx="2109216" cy="978408"/>
+          </a:xfrm>
+          <a:prstGeom prst="rect">
+            <a:avLst/>
+          </a:prstGeom>
+          <a:noFill/>
+          <a:ln/>
+        </p:spPr>
+        <p:txBody>
+          <a:bodyPr wrap="square" lIns="0" tIns="0" rIns="0" bIns="0" rtlCol="0" anchor="t"/>
+          <a:lstStyle/>
+          <a:p>
+            <a:pPr indent="0" marL="0">
+              <a:lnSpc>
+                <a:spcPts val="1600"/>
+              </a:lnSpc>
+              <a:buNone/>
+            </a:pPr>
+            <a:r>
+              <a:rPr lang="en-US" sz="1250" dirty="0">
+                <a:solidFill>
+                  <a:srgbClr val="24282E"/>
+                </a:solidFill>
+                <a:latin typeface="Calibri" pitchFamily="34" charset="0"/>
+                <a:ea typeface="Calibri" pitchFamily="34" charset="-122"/>
+                <a:cs typeface="Calibri" pitchFamily="34" charset="-120"/>
+              </a:rPr>
+              <a:t>Without transparent/texture everything is exactly as before; .off files keep plain colours.</a:t>
+            </a:r>
+            <a:endParaRPr lang="en-US" sz="1250" dirty="0"/>
+          </a:p>
+        </p:txBody>
+      </p:sp>
+      <p:sp>
+        <p:nvSpPr>
+          <p:cNvPr id="13" name="Shape 10"/>
+          <p:cNvSpPr/>
+          <p:nvPr/>
+        </p:nvSpPr>
+        <p:spPr>
+          <a:xfrm>
+            <a:off x="3316224" y="4023360"/>
+            <a:ext cx="2511552" cy="1600200"/>
+          </a:xfrm>
+          <a:prstGeom prst="roundRect">
+            <a:avLst>
+              <a:gd name="adj" fmla="val 2857"/>
+            </a:avLst>
+          </a:prstGeom>
+          <a:solidFill>
+            <a:srgbClr val="F6EFE8"/>
+          </a:solidFill>
+          <a:ln/>
+        </p:spPr>
+      </p:sp>
+      <p:sp>
+        <p:nvSpPr>
+          <p:cNvPr id="14" name="Text 11"/>
+          <p:cNvSpPr txBox="1"/>
+          <p:nvPr/>
+        </p:nvSpPr>
+        <p:spPr>
+          <a:xfrm>
+            <a:off x="3517392" y="4169664"/>
+            <a:ext cx="2109216" cy="292608"/>
+          </a:xfrm>
+          <a:prstGeom prst="rect">
+            <a:avLst/>
+          </a:prstGeom>
+          <a:noFill/>
+          <a:ln/>
+        </p:spPr>
+        <p:txBody>
+          <a:bodyPr wrap="square" lIns="0" tIns="0" rIns="0" bIns="0" rtlCol="0" anchor="ctr"/>
+          <a:lstStyle/>
+          <a:p>
+            <a:pPr indent="0" marL="0">
+              <a:buNone/>
+            </a:pPr>
+            <a:r>
+              <a:rPr lang="en-US" sz="1500" b="1" dirty="0">
+                <a:solidFill>
+                  <a:srgbClr val="8A4B1E"/>
+                </a:solidFill>
+                <a:latin typeface="Calibri" pitchFamily="34" charset="0"/>
+                <a:ea typeface="Calibri" pitchFamily="34" charset="-122"/>
+                <a:cs typeface="Calibri" pitchFamily="34" charset="-120"/>
+              </a:rPr>
+              <a:t>Limits</a:t>
+            </a:r>
+            <a:endParaRPr lang="en-US" sz="1500" dirty="0"/>
+          </a:p>
+        </p:txBody>
+      </p:sp>
+      <p:sp>
+        <p:nvSpPr>
+          <p:cNvPr id="15" name="Text 12"/>
+          <p:cNvSpPr txBox="1"/>
+          <p:nvPr/>
+        </p:nvSpPr>
+        <p:spPr>
+          <a:xfrm>
+            <a:off x="3517392" y="4498848"/>
+            <a:ext cx="2109216" cy="978408"/>
+          </a:xfrm>
+          <a:prstGeom prst="rect">
+            <a:avLst/>
+          </a:prstGeom>
+          <a:noFill/>
+          <a:ln/>
+        </p:spPr>
+        <p:txBody>
+          <a:bodyPr wrap="square" lIns="0" tIns="0" rIns="0" bIns="0" rtlCol="0" anchor="t"/>
+          <a:lstStyle/>
+          <a:p>
+            <a:pPr indent="0" marL="0">
+              <a:lnSpc>
+                <a:spcPts val="1600"/>
+              </a:lnSpc>
+              <a:buNone/>
+            </a:pPr>
+            <a:r>
+              <a:rPr lang="en-US" sz="1250" dirty="0">
+                <a:solidFill>
+                  <a:srgbClr val="24282E"/>
+                </a:solidFill>
+                <a:latin typeface="Calibri" pitchFamily="34" charset="0"/>
+                <a:ea typeface="Calibri" pitchFamily="34" charset="-122"/>
+                <a:cs typeface="Calibri" pitchFamily="34" charset="-120"/>
+              </a:rPr>
+              <a:t>Sketchfab: 100 MB free plan, 100 materials merged beyond that. The course: 50 MB, 50 colours. limit_colors() and obj_size() help.</a:t>
+            </a:r>
+            <a:endParaRPr lang="en-US" sz="1250" dirty="0"/>
+          </a:p>
+        </p:txBody>
+      </p:sp>
+      <p:sp>
+        <p:nvSpPr>
+          <p:cNvPr id="16" name="Shape 13"/>
+          <p:cNvSpPr/>
+          <p:nvPr/>
+        </p:nvSpPr>
+        <p:spPr>
+          <a:xfrm>
+            <a:off x="6065520" y="4023360"/>
+            <a:ext cx="2511552" cy="1600200"/>
+          </a:xfrm>
+          <a:prstGeom prst="roundRect">
+            <a:avLst>
+              <a:gd name="adj" fmla="val 2857"/>
+            </a:avLst>
+          </a:prstGeom>
+          <a:solidFill>
+            <a:srgbClr val="F6EFE8"/>
+          </a:solidFill>
+          <a:ln/>
+        </p:spPr>
+      </p:sp>
+      <p:sp>
+        <p:nvSpPr>
+          <p:cNvPr id="17" name="Text 14"/>
+          <p:cNvSpPr txBox="1"/>
+          <p:nvPr/>
+        </p:nvSpPr>
+        <p:spPr>
+          <a:xfrm>
+            <a:off x="6266688" y="4169664"/>
+            <a:ext cx="2109216" cy="292608"/>
+          </a:xfrm>
+          <a:prstGeom prst="rect">
+            <a:avLst/>
+          </a:prstGeom>
+          <a:noFill/>
+          <a:ln/>
+        </p:spPr>
+        <p:txBody>
+          <a:bodyPr wrap="square" lIns="0" tIns="0" rIns="0" bIns="0" rtlCol="0" anchor="ctr"/>
+          <a:lstStyle/>
+          <a:p>
+            <a:pPr indent="0" marL="0">
+              <a:buNone/>
+            </a:pPr>
+            <a:r>
+              <a:rPr lang="en-US" sz="1500" b="1" dirty="0">
+                <a:solidFill>
+                  <a:srgbClr val="8A4B1E"/>
+                </a:solidFill>
+                <a:latin typeface="Calibri" pitchFamily="34" charset="0"/>
+                <a:ea typeface="Calibri" pitchFamily="34" charset="-122"/>
+                <a:cs typeface="Calibri" pitchFamily="34" charset="-120"/>
+              </a:rPr>
+              <a:t>Pictures from code</a:t>
+            </a:r>
+            <a:endParaRPr lang="en-US" sz="1500" dirty="0"/>
+          </a:p>
+        </p:txBody>
+      </p:sp>
+      <p:sp>
+        <p:nvSpPr>
+          <p:cNvPr id="18" name="Text 15"/>
+          <p:cNvSpPr txBox="1"/>
+          <p:nvPr/>
+        </p:nvSpPr>
+        <p:spPr>
+          <a:xfrm>
+            <a:off x="6266688" y="4498848"/>
+            <a:ext cx="2109216" cy="978408"/>
+          </a:xfrm>
+          <a:prstGeom prst="rect">
+            <a:avLst/>
+          </a:prstGeom>
+          <a:noFill/>
+          <a:ln/>
+        </p:spPr>
+        <p:txBody>
+          <a:bodyPr wrap="square" lIns="0" tIns="0" rIns="0" bIns="0" rtlCol="0" anchor="t"/>
+          <a:lstStyle/>
+          <a:p>
+            <a:pPr indent="0" marL="0">
+              <a:lnSpc>
+                <a:spcPts val="1600"/>
+              </a:lnSpc>
+              <a:buNone/>
+            </a:pPr>
+            <a:r>
+              <a:rPr lang="en-US" sz="1250" dirty="0">
+                <a:solidFill>
+                  <a:srgbClr val="24282E"/>
+                </a:solidFill>
+                <a:latin typeface="Calibri" pitchFamily="34" charset="0"/>
+                <a:ea typeface="Calibri" pitchFamily="34" charset="-122"/>
+                <a:cs typeface="Calibri" pitchFamily="34" charset="-120"/>
+              </a:rPr>
+              <a:t>write_png("bricks.png", rows) writes a picture you computed -- no image files needed.</a:t>
+            </a:r>
+            <a:endParaRPr lang="en-US" sz="1250" dirty="0"/>
+          </a:p>
+        </p:txBody>
+      </p:sp>
+    </p:spTree>
+  </p:cSld>
+  <p:clrMapOvr>
+    <a:masterClrMapping/>
+  </p:clrMapOvr>
+</p:sld>
+</file>
+
+<file path=ppt/slides/slide33.xml><?xml version="1.0" encoding="utf-8"?>
+<p:sld xmlns:a="http://schemas.openxmlformats.org/drawingml/2006/main" xmlns:r="http://schemas.openxmlformats.org/officeDocument/2006/relationships" xmlns:p="http://schemas.openxmlformats.org/presentationml/2006/main">
+  <p:cSld name="Slide 33">
+    <p:bg>
+      <p:bgPr>
+        <a:solidFill>
+          <a:srgbClr val="FFFFFF"/>
+        </a:solidFill>
+      </p:bgPr>
+    </p:bg>
+    <p:spTree>
+      <p:nvGrpSpPr>
+        <p:cNvPr id="1" name=""/>
+        <p:cNvGrpSpPr/>
+        <p:nvPr/>
+      </p:nvGrpSpPr>
+      <p:grpSpPr>
+        <a:xfrm>
+          <a:off x="0" y="0"/>
+          <a:ext cx="0" cy="0"/>
+          <a:chOff x="0" y="0"/>
+          <a:chExt cx="0" cy="0"/>
+        </a:xfrm>
+      </p:grpSpPr>
+      <p:sp>
+        <p:nvSpPr>
+          <p:cNvPr id="2" name="Text 0"/>
+          <p:cNvSpPr txBox="1"/>
+          <p:nvPr/>
+        </p:nvSpPr>
+        <p:spPr>
+          <a:xfrm>
+            <a:off x="566928" y="329184"/>
+            <a:ext cx="8010144" cy="237744"/>
+          </a:xfrm>
+          <a:prstGeom prst="rect">
+            <a:avLst/>
+          </a:prstGeom>
+          <a:noFill/>
+          <a:ln/>
+        </p:spPr>
+        <p:txBody>
+          <a:bodyPr wrap="square" lIns="0" tIns="0" rIns="0" bIns="0" rtlCol="0" anchor="ctr"/>
+          <a:lstStyle/>
+          <a:p>
+            <a:pPr indent="0" marL="0">
+              <a:buNone/>
+            </a:pPr>
+            <a:r>
+              <a:rPr lang="en-US" sz="1100" b="1" spc="160" kern="0" dirty="0">
+                <a:solidFill>
+                  <a:srgbClr val="8A4B1E"/>
+                </a:solidFill>
+                <a:latin typeface="Calibri" pitchFamily="34" charset="0"/>
+                <a:ea typeface="Calibri" pitchFamily="34" charset="-122"/>
+                <a:cs typeface="Calibri" pitchFamily="34" charset="-120"/>
+              </a:rPr>
+              <a:t>FILES</a:t>
+            </a:r>
+            <a:endParaRPr lang="en-US" sz="1100" dirty="0"/>
+          </a:p>
+        </p:txBody>
+      </p:sp>
+      <p:sp>
+        <p:nvSpPr>
+          <p:cNvPr id="3" name="Text 1"/>
+          <p:cNvSpPr txBox="1"/>
+          <p:nvPr/>
+        </p:nvSpPr>
+        <p:spPr>
+          <a:xfrm>
+            <a:off x="566928" y="548640"/>
+            <a:ext cx="8010144" cy="658368"/>
+          </a:xfrm>
+          <a:prstGeom prst="rect">
+            <a:avLst/>
+          </a:prstGeom>
+          <a:noFill/>
+          <a:ln/>
+        </p:spPr>
+        <p:txBody>
+          <a:bodyPr wrap="square" lIns="0" tIns="0" rIns="0" bIns="0" rtlCol="0" anchor="t"/>
+          <a:lstStyle/>
+          <a:p>
+            <a:pPr indent="0" marL="0">
+              <a:buNone/>
+            </a:pPr>
+            <a:r>
+              <a:rPr lang="en-US" sz="3000" b="1" dirty="0">
+                <a:solidFill>
+                  <a:srgbClr val="24282E"/>
+                </a:solidFill>
+                <a:latin typeface="Cambria" pitchFamily="34" charset="0"/>
+                <a:ea typeface="Cambria" pitchFamily="34" charset="-122"/>
+                <a:cs typeface="Cambria" pitchFamily="34" charset="-120"/>
+              </a:rPr>
+              <a:t>Saving and sharing a model</a:t>
+            </a:r>
+            <a:endParaRPr lang="en-US" sz="3000" dirty="0"/>
+          </a:p>
+        </p:txBody>
+      </p:sp>
+      <p:sp>
+        <p:nvSpPr>
+          <p:cNvPr id="4" name="Text 2"/>
+          <p:cNvSpPr txBox="1"/>
+          <p:nvPr/>
+        </p:nvSpPr>
+        <p:spPr>
+          <a:xfrm>
+            <a:off x="8119872" y="6382512"/>
+            <a:ext cx="457200" cy="237744"/>
+          </a:xfrm>
+          <a:prstGeom prst="rect">
+            <a:avLst/>
+          </a:prstGeom>
+          <a:noFill/>
+          <a:ln/>
+        </p:spPr>
+        <p:txBody>
+          <a:bodyPr wrap="square" lIns="0" tIns="0" rIns="0" bIns="0" rtlCol="0" anchor="ctr"/>
+          <a:lstStyle/>
+          <a:p>
+            <a:pPr algn="r" indent="0" marL="0">
+              <a:buNone/>
+            </a:pPr>
+            <a:r>
+              <a:rPr lang="en-US" sz="1000" dirty="0">
+                <a:solidFill>
+                  <a:srgbClr val="6B7280"/>
+                </a:solidFill>
+                <a:latin typeface="Calibri" pitchFamily="34" charset="0"/>
+                <a:ea typeface="Calibri" pitchFamily="34" charset="-122"/>
+                <a:cs typeface="Calibri" pitchFamily="34" charset="-120"/>
+              </a:rPr>
+              <a:t>32</a:t>
+            </a:r>
+            <a:endParaRPr lang="en-US" sz="1000" dirty="0"/>
+          </a:p>
+        </p:txBody>
+      </p:sp>
+      <p:sp>
+        <p:nvSpPr>
+          <p:cNvPr id="5" name="Shape 3"/>
+          <p:cNvSpPr/>
+          <p:nvPr/>
+        </p:nvSpPr>
+        <p:spPr>
+          <a:xfrm>
+            <a:off x="566928" y="1463040"/>
+            <a:ext cx="4572000" cy="1508760"/>
+          </a:xfrm>
+          <a:prstGeom prst="roundRect">
+            <a:avLst>
+              <a:gd name="adj" fmla="val 3636"/>
+            </a:avLst>
+          </a:prstGeom>
+          <a:solidFill>
+            <a:srgbClr val="F7F7F8"/>
+          </a:solidFill>
+          <a:ln w="9525">
+            <a:solidFill>
+              <a:srgbClr val="E3E1DD"/>
+            </a:solidFill>
+            <a:prstDash val="solid"/>
+          </a:ln>
+        </p:spPr>
+      </p:sp>
+      <p:sp>
+        <p:nvSpPr>
+          <p:cNvPr id="6" name="Text 4"/>
+          <p:cNvSpPr txBox="1"/>
+          <p:nvPr/>
+        </p:nvSpPr>
+        <p:spPr>
+          <a:xfrm>
+            <a:off x="713232" y="1591056"/>
+            <a:ext cx="4279392" cy="1252728"/>
+          </a:xfrm>
+          <a:prstGeom prst="rect">
+            <a:avLst/>
+          </a:prstGeom>
+          <a:noFill/>
+          <a:ln/>
+        </p:spPr>
+        <p:txBody>
+          <a:bodyPr wrap="square" lIns="0" tIns="0" rIns="0" bIns="0" rtlCol="0" anchor="t"/>
+          <a:lstStyle/>
+          <a:p>
+            <a:pPr indent="0" marL="0">
+              <a:lnSpc>
+                <a:spcPts val="1600"/>
+              </a:lnSpc>
+              <a:buNone/>
+            </a:pPr>
+            <a:r>
+              <a:rPr lang="en-US" sz="1250" dirty="0">
+                <a:solidFill>
+                  <a:srgbClr val="2C3138"/>
+                </a:solidFill>
+                <a:latin typeface="Consolas" pitchFamily="34" charset="0"/>
+                <a:ea typeface="Consolas" pitchFamily="34" charset="-122"/>
+                <a:cs typeface="Consolas" pitchFamily="34" charset="-120"/>
+              </a:rPr>
+              <a:t>add.save("model.off")   # the course format</a:t>
+            </a:r>
+            <a:endParaRPr lang="en-US" sz="1250" dirty="0"/>
+          </a:p>
+          <a:p>
+            <a:pPr indent="0" marL="0">
+              <a:lnSpc>
+                <a:spcPts val="1600"/>
+              </a:lnSpc>
+              <a:buNone/>
+            </a:pPr>
+            <a:r>
+              <a:rPr lang="en-US" sz="1250" dirty="0">
+                <a:solidFill>
+                  <a:srgbClr val="2C3138"/>
+                </a:solidFill>
+                <a:latin typeface="Consolas" pitchFamily="34" charset="0"/>
+                <a:ea typeface="Consolas" pitchFamily="34" charset="-122"/>
+                <a:cs typeface="Consolas" pitchFamily="34" charset="-120"/>
+              </a:rPr>
+              <a:t>add.save("model.obj")   # + .mtl for colours</a:t>
+            </a:r>
+            <a:endParaRPr lang="en-US" sz="1250" dirty="0"/>
+          </a:p>
+          <a:p>
+            <a:pPr indent="0" marL="0">
+              <a:lnSpc>
+                <a:spcPts val="1600"/>
+              </a:lnSpc>
+              <a:buNone/>
+            </a:pPr>
+            <a:r>
+              <a:rPr lang="en-US" sz="1250" dirty="0">
+                <a:solidFill>
+                  <a:srgbClr val="2C3138"/>
+                </a:solidFill>
+                <a:latin typeface="Consolas" pitchFamily="34" charset="0"/>
+                <a:ea typeface="Consolas" pitchFamily="34" charset="-122"/>
+                <a:cs typeface="Consolas" pitchFamily="34" charset="-120"/>
+              </a:rPr>
+              <a:t>add.save("model.ply")</a:t>
+            </a:r>
+            <a:endParaRPr lang="en-US" sz="1250" dirty="0"/>
+          </a:p>
+          <a:p>
+            <a:pPr indent="0" marL="0">
+              <a:lnSpc>
+                <a:spcPts val="1600"/>
+              </a:lnSpc>
+              <a:buNone/>
+            </a:pPr>
+            <a:r>
+              <a:rPr lang="en-US" sz="1250" dirty="0">
+                <a:solidFill>
+                  <a:srgbClr val="2C3138"/>
+                </a:solidFill>
+                <a:latin typeface="Consolas" pitchFamily="34" charset="0"/>
+                <a:ea typeface="Consolas" pitchFamily="34" charset="-122"/>
+                <a:cs typeface="Consolas" pitchFamily="34" charset="-120"/>
+              </a:rPr>
+              <a:t>add.save("model.stl")   # for 3D printing</a:t>
+            </a:r>
+            <a:endParaRPr lang="en-US" sz="1250" dirty="0"/>
+          </a:p>
+        </p:txBody>
+      </p:sp>
+      <p:sp>
+        <p:nvSpPr>
+          <p:cNvPr id="7" name="Shape 5"/>
+          <p:cNvSpPr/>
+          <p:nvPr/>
+        </p:nvSpPr>
+        <p:spPr>
+          <a:xfrm>
+            <a:off x="566928" y="3154680"/>
+            <a:ext cx="3886200" cy="1234440"/>
+          </a:xfrm>
+          <a:prstGeom prst="roundRect">
+            <a:avLst>
+              <a:gd name="adj" fmla="val 3704"/>
+            </a:avLst>
+          </a:prstGeom>
+          <a:solidFill>
+            <a:srgbClr val="F6EFE8"/>
+          </a:solidFill>
+          <a:ln/>
+        </p:spPr>
+      </p:sp>
+      <p:sp>
+        <p:nvSpPr>
+          <p:cNvPr id="8" name="Text 6"/>
+          <p:cNvSpPr txBox="1"/>
+          <p:nvPr/>
+        </p:nvSpPr>
+        <p:spPr>
+          <a:xfrm>
+            <a:off x="768096" y="3300984"/>
+            <a:ext cx="3483864" cy="292608"/>
+          </a:xfrm>
+          <a:prstGeom prst="rect">
+            <a:avLst/>
+          </a:prstGeom>
+          <a:noFill/>
+          <a:ln/>
+        </p:spPr>
+        <p:txBody>
+          <a:bodyPr wrap="square" lIns="0" tIns="0" rIns="0" bIns="0" rtlCol="0" anchor="ctr"/>
+          <a:lstStyle/>
+          <a:p>
+            <a:pPr indent="0" marL="0">
+              <a:buNone/>
+            </a:pPr>
+            <a:r>
+              <a:rPr lang="en-US" sz="1500" b="1" dirty="0">
+                <a:solidFill>
+                  <a:srgbClr val="8A4B1E"/>
+                </a:solidFill>
+                <a:latin typeface="Calibri" pitchFamily="34" charset="0"/>
+                <a:ea typeface="Calibri" pitchFamily="34" charset="-122"/>
+                <a:cs typeface="Calibri" pitchFamily="34" charset="-120"/>
+              </a:rPr>
+              <a:t>Sketchfab</a:t>
+            </a:r>
+            <a:endParaRPr lang="en-US" sz="1500" dirty="0"/>
+          </a:p>
+        </p:txBody>
+      </p:sp>
+      <p:sp>
+        <p:nvSpPr>
+          <p:cNvPr id="9" name="Text 7"/>
+          <p:cNvSpPr txBox="1"/>
+          <p:nvPr/>
+        </p:nvSpPr>
+        <p:spPr>
+          <a:xfrm>
+            <a:off x="768096" y="3630168"/>
+            <a:ext cx="3483864" cy="612648"/>
+          </a:xfrm>
+          <a:prstGeom prst="rect">
+            <a:avLst/>
+          </a:prstGeom>
+          <a:noFill/>
+          <a:ln/>
+        </p:spPr>
+        <p:txBody>
+          <a:bodyPr wrap="square" lIns="0" tIns="0" rIns="0" bIns="0" rtlCol="0" anchor="t"/>
+          <a:lstStyle/>
+          <a:p>
+            <a:pPr indent="0" marL="0">
+              <a:lnSpc>
+                <a:spcPts val="1600"/>
+              </a:lnSpc>
+              <a:buNone/>
+            </a:pPr>
+            <a:r>
+              <a:rPr lang="en-US" sz="1250" dirty="0">
+                <a:solidFill>
+                  <a:srgbClr val="24282E"/>
+                </a:solidFill>
+                <a:latin typeface="Calibri" pitchFamily="34" charset="0"/>
+                <a:ea typeface="Calibri" pitchFamily="34" charset="-122"/>
+                <a:cs typeface="Calibri" pitchFamily="34" charset="-120"/>
+              </a:rPr>
+              <a:t>Put .obj and .mtl in one archive and upload -- anyone can turn the model in a browser.</a:t>
+            </a:r>
+            <a:endParaRPr lang="en-US" sz="1250" dirty="0"/>
+          </a:p>
+        </p:txBody>
+      </p:sp>
+      <p:sp>
+        <p:nvSpPr>
+          <p:cNvPr id="10" name="Shape 8"/>
+          <p:cNvSpPr/>
+          <p:nvPr/>
+        </p:nvSpPr>
+        <p:spPr>
+          <a:xfrm>
+            <a:off x="4690872" y="3154680"/>
+            <a:ext cx="3886200" cy="1234440"/>
+          </a:xfrm>
+          <a:prstGeom prst="roundRect">
+            <a:avLst>
+              <a:gd name="adj" fmla="val 3704"/>
+            </a:avLst>
+          </a:prstGeom>
+          <a:solidFill>
+            <a:srgbClr val="F6EFE8"/>
+          </a:solidFill>
+          <a:ln/>
+        </p:spPr>
+      </p:sp>
+      <p:sp>
+        <p:nvSpPr>
+          <p:cNvPr id="11" name="Text 9"/>
+          <p:cNvSpPr txBox="1"/>
+          <p:nvPr/>
+        </p:nvSpPr>
+        <p:spPr>
+          <a:xfrm>
+            <a:off x="4892040" y="3300984"/>
+            <a:ext cx="3483864" cy="292608"/>
+          </a:xfrm>
+          <a:prstGeom prst="rect">
+            <a:avLst/>
+          </a:prstGeom>
+          <a:noFill/>
+          <a:ln/>
+        </p:spPr>
+        <p:txBody>
+          <a:bodyPr wrap="square" lIns="0" tIns="0" rIns="0" bIns="0" rtlCol="0" anchor="ctr"/>
+          <a:lstStyle/>
+          <a:p>
+            <a:pPr indent="0" marL="0">
+              <a:buNone/>
+            </a:pPr>
+            <a:r>
+              <a:rPr lang="en-US" sz="1500" b="1" dirty="0">
+                <a:solidFill>
+                  <a:srgbClr val="8A4B1E"/>
+                </a:solidFill>
+                <a:latin typeface="Calibri" pitchFamily="34" charset="0"/>
+                <a:ea typeface="Calibri" pitchFamily="34" charset="-122"/>
+                <a:cs typeface="Calibri" pitchFamily="34" charset="-120"/>
+              </a:rPr>
+              <a:t>3D printing</a:t>
+            </a:r>
+            <a:endParaRPr lang="en-US" sz="1500" dirty="0"/>
+          </a:p>
+        </p:txBody>
+      </p:sp>
+      <p:sp>
+        <p:nvSpPr>
+          <p:cNvPr id="12" name="Text 10"/>
+          <p:cNvSpPr txBox="1"/>
+          <p:nvPr/>
+        </p:nvSpPr>
+        <p:spPr>
+          <a:xfrm>
+            <a:off x="4892040" y="3630168"/>
+            <a:ext cx="3483864" cy="612648"/>
+          </a:xfrm>
+          <a:prstGeom prst="rect">
+            <a:avLst/>
+          </a:prstGeom>
+          <a:noFill/>
+          <a:ln/>
+        </p:spPr>
+        <p:txBody>
+          <a:bodyPr wrap="square" lIns="0" tIns="0" rIns="0" bIns="0" rtlCol="0" anchor="t"/>
+          <a:lstStyle/>
+          <a:p>
+            <a:pPr indent="0" marL="0">
+              <a:lnSpc>
+                <a:spcPts val="1600"/>
+              </a:lnSpc>
+              <a:buNone/>
+            </a:pPr>
+            <a:r>
+              <a:rPr lang="en-US" sz="1250" dirty="0">
+                <a:solidFill>
+                  <a:srgbClr val="24282E"/>
+                </a:solidFill>
+                <a:latin typeface="Calibri" pitchFamily="34" charset="0"/>
+                <a:ea typeface="Calibri" pitchFamily="34" charset="-122"/>
+                <a:cs typeface="Calibri" pitchFamily="34" charset="-120"/>
+              </a:rPr>
+              <a:t>clean(..., normals=True), then save("m.stl"). The surface must be closed.</a:t>
+            </a:r>
+            <a:endParaRPr lang="en-US" sz="1250" dirty="0"/>
+          </a:p>
+        </p:txBody>
+      </p:sp>
+      <p:sp>
+        <p:nvSpPr>
+          <p:cNvPr id="13" name="Shape 11"/>
+          <p:cNvSpPr/>
+          <p:nvPr/>
+        </p:nvSpPr>
+        <p:spPr>
+          <a:xfrm>
+            <a:off x="566928" y="4626864"/>
+            <a:ext cx="3886200" cy="1234440"/>
+          </a:xfrm>
+          <a:prstGeom prst="roundRect">
+            <a:avLst>
+              <a:gd name="adj" fmla="val 3704"/>
+            </a:avLst>
+          </a:prstGeom>
+          <a:solidFill>
+            <a:srgbClr val="F6EFE8"/>
+          </a:solidFill>
+          <a:ln/>
+        </p:spPr>
+      </p:sp>
+      <p:sp>
+        <p:nvSpPr>
+          <p:cNvPr id="14" name="Text 12"/>
+          <p:cNvSpPr txBox="1"/>
+          <p:nvPr/>
+        </p:nvSpPr>
+        <p:spPr>
+          <a:xfrm>
+            <a:off x="768096" y="4773168"/>
+            <a:ext cx="3483864" cy="292608"/>
+          </a:xfrm>
+          <a:prstGeom prst="rect">
+            <a:avLst/>
+          </a:prstGeom>
+          <a:noFill/>
+          <a:ln/>
+        </p:spPr>
+        <p:txBody>
+          <a:bodyPr wrap="square" lIns="0" tIns="0" rIns="0" bIns="0" rtlCol="0" anchor="ctr"/>
+          <a:lstStyle/>
+          <a:p>
+            <a:pPr indent="0" marL="0">
+              <a:buNone/>
+            </a:pPr>
+            <a:r>
+              <a:rPr lang="en-US" sz="1500" b="1" dirty="0">
+                <a:solidFill>
+                  <a:srgbClr val="8A4B1E"/>
+                </a:solidFill>
+                <a:latin typeface="Calibri" pitchFamily="34" charset="0"/>
+                <a:ea typeface="Calibri" pitchFamily="34" charset="-122"/>
+                <a:cs typeface="Calibri" pitchFamily="34" charset="-120"/>
+              </a:rPr>
+              <a:t>Preview without MeshLab</a:t>
+            </a:r>
+            <a:endParaRPr lang="en-US" sz="1500" dirty="0"/>
+          </a:p>
+        </p:txBody>
+      </p:sp>
+      <p:sp>
+        <p:nvSpPr>
+          <p:cNvPr id="15" name="Text 13"/>
+          <p:cNvSpPr txBox="1"/>
+          <p:nvPr/>
+        </p:nvSpPr>
+        <p:spPr>
+          <a:xfrm>
+            <a:off x="768096" y="5102352"/>
+            <a:ext cx="3483864" cy="612648"/>
+          </a:xfrm>
+          <a:prstGeom prst="rect">
+            <a:avLst/>
+          </a:prstGeom>
+          <a:noFill/>
+          <a:ln/>
+        </p:spPr>
+        <p:txBody>
+          <a:bodyPr wrap="square" lIns="0" tIns="0" rIns="0" bIns="0" rtlCol="0" anchor="t"/>
+          <a:lstStyle/>
+          <a:p>
+            <a:pPr indent="0" marL="0">
+              <a:lnSpc>
+                <a:spcPts val="1600"/>
+              </a:lnSpc>
+              <a:buNone/>
+            </a:pPr>
+            <a:r>
+              <a:rPr lang="en-US" sz="1250" dirty="0">
+                <a:solidFill>
+                  <a:srgbClr val="24282E"/>
+                </a:solidFill>
+                <a:latin typeface="Calibri" pitchFamily="34" charset="0"/>
+                <a:ea typeface="Calibri" pitchFamily="34" charset="-122"/>
+                <a:cs typeface="Calibri" pitchFamily="34" charset="-120"/>
+              </a:rPr>
+              <a:t>python3 tools/preview.py model.off writes a PNG. No libraries either.</a:t>
+            </a:r>
+            <a:endParaRPr lang="en-US" sz="1250" dirty="0"/>
+          </a:p>
+        </p:txBody>
+      </p:sp>
+      <p:sp>
+        <p:nvSpPr>
+          <p:cNvPr id="16" name="Shape 14"/>
+          <p:cNvSpPr/>
+          <p:nvPr/>
+        </p:nvSpPr>
+        <p:spPr>
+          <a:xfrm>
+            <a:off x="4690872" y="4626864"/>
+            <a:ext cx="3886200" cy="1234440"/>
+          </a:xfrm>
+          <a:prstGeom prst="roundRect">
+            <a:avLst>
+              <a:gd name="adj" fmla="val 3704"/>
+            </a:avLst>
+          </a:prstGeom>
+          <a:solidFill>
+            <a:srgbClr val="F6EFE8"/>
+          </a:solidFill>
+          <a:ln/>
+        </p:spPr>
+      </p:sp>
+      <p:sp>
+        <p:nvSpPr>
+          <p:cNvPr id="17" name="Text 15"/>
+          <p:cNvSpPr txBox="1"/>
+          <p:nvPr/>
+        </p:nvSpPr>
+        <p:spPr>
+          <a:xfrm>
+            <a:off x="4892040" y="4773168"/>
+            <a:ext cx="3483864" cy="292608"/>
+          </a:xfrm>
+          <a:prstGeom prst="rect">
+            <a:avLst/>
+          </a:prstGeom>
+          <a:noFill/>
+          <a:ln/>
+        </p:spPr>
+        <p:txBody>
+          <a:bodyPr wrap="square" lIns="0" tIns="0" rIns="0" bIns="0" rtlCol="0" anchor="ctr"/>
+          <a:lstStyle/>
+          <a:p>
+            <a:pPr indent="0" marL="0">
+              <a:buNone/>
+            </a:pPr>
+            <a:r>
+              <a:rPr lang="en-US" sz="1500" b="1" dirty="0">
+                <a:solidFill>
+                  <a:srgbClr val="8A4B1E"/>
+                </a:solidFill>
+                <a:latin typeface="Calibri" pitchFamily="34" charset="0"/>
+                <a:ea typeface="Calibri" pitchFamily="34" charset="-122"/>
+                <a:cs typeface="Calibri" pitchFamily="34" charset="-120"/>
+              </a:rPr>
+              <a:t>Loading back</a:t>
+            </a:r>
+            <a:endParaRPr lang="en-US" sz="1500" dirty="0"/>
+          </a:p>
+        </p:txBody>
+      </p:sp>
+      <p:sp>
+        <p:nvSpPr>
+          <p:cNvPr id="18" name="Text 16"/>
+          <p:cNvSpPr txBox="1"/>
+          <p:nvPr/>
+        </p:nvSpPr>
+        <p:spPr>
+          <a:xfrm>
+            <a:off x="4892040" y="5102352"/>
+            <a:ext cx="3483864" cy="612648"/>
+          </a:xfrm>
+          <a:prstGeom prst="rect">
+            <a:avLst/>
+          </a:prstGeom>
+          <a:noFill/>
+          <a:ln/>
+        </p:spPr>
+        <p:txBody>
+          <a:bodyPr wrap="square" lIns="0" tIns="0" rIns="0" bIns="0" rtlCol="0" anchor="t"/>
+          <a:lstStyle/>
+          <a:p>
+            <a:pPr indent="0" marL="0">
+              <a:lnSpc>
+                <a:spcPts val="1600"/>
+              </a:lnSpc>
+              <a:buNone/>
+            </a:pPr>
+            <a:r>
+              <a:rPr lang="en-US" sz="1250" dirty="0">
+                <a:solidFill>
+                  <a:srgbClr val="24282E"/>
+                </a:solidFill>
+                <a:latin typeface="Calibri" pitchFamily="34" charset="0"/>
+                <a:ea typeface="Calibri" pitchFamily="34" charset="-122"/>
+                <a:cs typeface="Calibri" pitchFamily="34" charset="-120"/>
+              </a:rPr>
+              <a:t>load("letter.off") returns a mesh you can move and paint.</a:t>
+            </a:r>
+            <a:endParaRPr lang="en-US" sz="1250" dirty="0"/>
+          </a:p>
+        </p:txBody>
+      </p:sp>
+      <p:sp>
+        <p:nvSpPr>
+          <p:cNvPr id="19" name="Text 17"/>
+          <p:cNvSpPr txBox="1"/>
+          <p:nvPr/>
+        </p:nvSpPr>
+        <p:spPr>
+          <a:xfrm>
+            <a:off x="5303520" y="1691640"/>
+            <a:ext cx="3291840" cy="1097280"/>
+          </a:xfrm>
+          <a:prstGeom prst="rect">
+            <a:avLst/>
+          </a:prstGeom>
+          <a:noFill/>
+          <a:ln/>
+        </p:spPr>
+        <p:txBody>
+          <a:bodyPr wrap="square" lIns="0" tIns="0" rIns="0" bIns="0" rtlCol="0" anchor="t"/>
+          <a:lstStyle/>
+          <a:p>
+            <a:pPr indent="0" marL="0">
+              <a:buNone/>
+            </a:pPr>
+            <a:r>
+              <a:rPr lang="en-US" sz="1700" dirty="0">
+                <a:solidFill>
+                  <a:srgbClr val="8A4B1E"/>
+                </a:solidFill>
+                <a:latin typeface="Cambria" pitchFamily="34" charset="0"/>
+                <a:ea typeface="Cambria" pitchFamily="34" charset="-122"/>
+                <a:cs typeface="Cambria" pitchFamily="34" charset="-120"/>
+              </a:rPr>
+              <a:t>The MeshLab conversion step is gone -- add.py writes OBJ and MTL itself.</a:t>
+            </a:r>
+            <a:endParaRPr lang="en-US" sz="1700" dirty="0"/>
+          </a:p>
+        </p:txBody>
+      </p:sp>
+    </p:spTree>
+  </p:cSld>
+  <p:clrMapOvr>
+    <a:masterClrMapping/>
+  </p:clrMapOvr>
+</p:sld>
+</file>
+
+<file path=ppt/slides/slide34.xml><?xml version="1.0" encoding="utf-8"?>
+<p:sld xmlns:a="http://schemas.openxmlformats.org/drawingml/2006/main" xmlns:r="http://schemas.openxmlformats.org/officeDocument/2006/relationships" xmlns:p="http://schemas.openxmlformats.org/presentationml/2006/main">
+  <p:cSld name="Slide 34">
+    <p:bg>
+      <p:bgPr>
+        <a:solidFill>
+          <a:srgbClr val="FFFFFF"/>
+        </a:solidFill>
+      </p:bgPr>
+    </p:bg>
+    <p:spTree>
+      <p:nvGrpSpPr>
+        <p:cNvPr id="1" name=""/>
+        <p:cNvGrpSpPr/>
+        <p:nvPr/>
+      </p:nvGrpSpPr>
+      <p:grpSpPr>
+        <a:xfrm>
+          <a:off x="0" y="0"/>
+          <a:ext cx="0" cy="0"/>
+          <a:chOff x="0" y="0"/>
+          <a:chExt cx="0" cy="0"/>
+        </a:xfrm>
+      </p:grpSpPr>
+      <p:sp>
+        <p:nvSpPr>
+          <p:cNvPr id="2" name="Text 0"/>
+          <p:cNvSpPr txBox="1"/>
+          <p:nvPr/>
+        </p:nvSpPr>
+        <p:spPr>
+          <a:xfrm>
+            <a:off x="566928" y="329184"/>
+            <a:ext cx="8010144" cy="237744"/>
+          </a:xfrm>
+          <a:prstGeom prst="rect">
+            <a:avLst/>
+          </a:prstGeom>
+          <a:noFill/>
+          <a:ln/>
+        </p:spPr>
+        <p:txBody>
+          <a:bodyPr wrap="square" lIns="0" tIns="0" rIns="0" bIns="0" rtlCol="0" anchor="ctr"/>
+          <a:lstStyle/>
+          <a:p>
+            <a:pPr indent="0" marL="0">
+              <a:buNone/>
+            </a:pPr>
+            <a:r>
+              <a:rPr lang="en-US" sz="1100" b="1" spc="160" kern="0" dirty="0">
+                <a:solidFill>
+                  <a:srgbClr val="8A4B1E"/>
+                </a:solidFill>
+                <a:latin typeface="Calibri" pitchFamily="34" charset="0"/>
+                <a:ea typeface="Calibri" pitchFamily="34" charset="-122"/>
+                <a:cs typeface="Calibri" pitchFamily="34" charset="-120"/>
+              </a:rPr>
+              <a:t>GALLERY</a:t>
+            </a:r>
+            <a:endParaRPr lang="en-US" sz="1100" dirty="0"/>
+          </a:p>
+        </p:txBody>
+      </p:sp>
+      <p:sp>
+        <p:nvSpPr>
+          <p:cNvPr id="3" name="Text 1"/>
+          <p:cNvSpPr txBox="1"/>
+          <p:nvPr/>
+        </p:nvSpPr>
+        <p:spPr>
+          <a:xfrm>
+            <a:off x="566928" y="548640"/>
+            <a:ext cx="8010144" cy="658368"/>
+          </a:xfrm>
+          <a:prstGeom prst="rect">
+            <a:avLst/>
+          </a:prstGeom>
+          <a:noFill/>
+          <a:ln/>
+        </p:spPr>
+        <p:txBody>
+          <a:bodyPr wrap="square" lIns="0" tIns="0" rIns="0" bIns="0" rtlCol="0" anchor="t"/>
+          <a:lstStyle/>
+          <a:p>
+            <a:pPr indent="0" marL="0">
+              <a:buNone/>
+            </a:pPr>
+            <a:r>
+              <a:rPr lang="en-US" sz="3000" b="1" dirty="0">
+                <a:solidFill>
+                  <a:srgbClr val="24282E"/>
+                </a:solidFill>
+                <a:latin typeface="Cambria" pitchFamily="34" charset="0"/>
+                <a:ea typeface="Cambria" pitchFamily="34" charset="-122"/>
+                <a:cs typeface="Cambria" pitchFamily="34" charset="-120"/>
+              </a:rPr>
+              <a:t>Complete models</a:t>
+            </a:r>
+            <a:endParaRPr lang="en-US" sz="3000" dirty="0"/>
+          </a:p>
+        </p:txBody>
+      </p:sp>
+      <p:sp>
+        <p:nvSpPr>
+          <p:cNvPr id="4" name="Text 2"/>
+          <p:cNvSpPr txBox="1"/>
+          <p:nvPr/>
+        </p:nvSpPr>
+        <p:spPr>
+          <a:xfrm>
+            <a:off x="8119872" y="6382512"/>
+            <a:ext cx="457200" cy="237744"/>
+          </a:xfrm>
+          <a:prstGeom prst="rect">
+            <a:avLst/>
+          </a:prstGeom>
+          <a:noFill/>
+          <a:ln/>
+        </p:spPr>
+        <p:txBody>
+          <a:bodyPr wrap="square" lIns="0" tIns="0" rIns="0" bIns="0" rtlCol="0" anchor="ctr"/>
+          <a:lstStyle/>
+          <a:p>
+            <a:pPr algn="r" indent="0" marL="0">
+              <a:buNone/>
+            </a:pPr>
+            <a:r>
+              <a:rPr lang="en-US" sz="1000" dirty="0">
+                <a:solidFill>
+                  <a:srgbClr val="6B7280"/>
+                </a:solidFill>
+                <a:latin typeface="Calibri" pitchFamily="34" charset="0"/>
+                <a:ea typeface="Calibri" pitchFamily="34" charset="-122"/>
+                <a:cs typeface="Calibri" pitchFamily="34" charset="-120"/>
+              </a:rPr>
+              <a:t>33</a:t>
+            </a:r>
+            <a:endParaRPr lang="en-US" sz="1000" dirty="0"/>
+          </a:p>
+        </p:txBody>
+      </p:sp>
+      <p:sp>
+        <p:nvSpPr>
+          <p:cNvPr id="5" name="Shape 3"/>
+          <p:cNvSpPr/>
+          <p:nvPr/>
+        </p:nvSpPr>
+        <p:spPr>
+          <a:xfrm>
+            <a:off x="566928" y="1417320"/>
+            <a:ext cx="3931920" cy="2377440"/>
+          </a:xfrm>
+          <a:prstGeom prst="roundRect">
+            <a:avLst>
+              <a:gd name="adj" fmla="val 2308"/>
+            </a:avLst>
+          </a:prstGeom>
+          <a:solidFill>
+            <a:srgbClr val="FAFAFA"/>
+          </a:solidFill>
+          <a:ln w="9525">
+            <a:solidFill>
+              <a:srgbClr val="E3E1DD"/>
+            </a:solidFill>
+            <a:prstDash val="solid"/>
+          </a:ln>
+        </p:spPr>
+      </p:sp>
+      <p:pic>
+        <p:nvPicPr>
+          <p:cNvPr id="6" name="Image 0" descr="/home/claude/add3d/docs/images/temple.png">    </p:cNvPr>
+          <p:cNvPicPr>
+            <a:picLocks noChangeAspect="1"/>
+          </p:cNvPicPr>
+          <p:nvPr/>
+        </p:nvPicPr>
+        <p:blipFill>
+          <a:blip r:embed="rId1"/>
+          <a:srcRect l="0" r="0" t="0" b="0"/>
+          <a:stretch/>
+        </p:blipFill>
+        <p:spPr>
+          <a:xfrm>
+            <a:off x="621792" y="1472184"/>
+            <a:ext cx="3822192" cy="2267712"/>
+          </a:xfrm>
+          <a:prstGeom prst="rect">
+            <a:avLst/>
+          </a:prstGeom>
+        </p:spPr>
+      </p:pic>
+      <p:sp>
+        <p:nvSpPr>
+          <p:cNvPr id="7" name="Text 4"/>
+          <p:cNvSpPr txBox="1"/>
+          <p:nvPr/>
+        </p:nvSpPr>
+        <p:spPr>
+          <a:xfrm>
+            <a:off x="566928" y="3858768"/>
+            <a:ext cx="3931920" cy="457200"/>
+          </a:xfrm>
+          <a:prstGeom prst="rect">
+            <a:avLst/>
+          </a:prstGeom>
+          <a:noFill/>
+          <a:ln/>
+        </p:spPr>
+        <p:txBody>
+          <a:bodyPr wrap="square" lIns="0" tIns="0" rIns="0" bIns="0" rtlCol="0" anchor="t"/>
+          <a:lstStyle/>
+          <a:p>
+            <a:pPr algn="ctr" indent="0" marL="0">
+              <a:buNone/>
+            </a:pPr>
+            <a:r>
+              <a:rPr lang="en-US" sz="1100" dirty="0">
+                <a:solidFill>
+                  <a:srgbClr val="6B7280"/>
+                </a:solidFill>
+                <a:latin typeface="Calibri" pitchFamily="34" charset="0"/>
+                <a:ea typeface="Calibri" pitchFamily="34" charset="-122"/>
+                <a:cs typeface="Calibri" pitchFamily="34" charset="-120"/>
+              </a:rPr>
+              <a:t>25_temple.py -- columns on a circle, a chequered floor</a:t>
+            </a:r>
+            <a:endParaRPr lang="en-US" sz="1100" dirty="0"/>
+          </a:p>
+        </p:txBody>
+      </p:sp>
+      <p:sp>
+        <p:nvSpPr>
+          <p:cNvPr id="8" name="Shape 5"/>
+          <p:cNvSpPr/>
+          <p:nvPr/>
+        </p:nvSpPr>
+        <p:spPr>
+          <a:xfrm>
+            <a:off x="4663440" y="1417320"/>
+            <a:ext cx="3913632" cy="2377440"/>
+          </a:xfrm>
+          <a:prstGeom prst="roundRect">
+            <a:avLst>
+              <a:gd name="adj" fmla="val 2308"/>
+            </a:avLst>
+          </a:prstGeom>
+          <a:solidFill>
+            <a:srgbClr val="FAFAFA"/>
+          </a:solidFill>
+          <a:ln w="9525">
+            <a:solidFill>
+              <a:srgbClr val="E3E1DD"/>
+            </a:solidFill>
+            <a:prstDash val="solid"/>
+          </a:ln>
+        </p:spPr>
+      </p:sp>
+      <p:pic>
+        <p:nvPicPr>
+          <p:cNvPr id="9" name="Image 1" descr="/home/claude/add3d/docs/images/bridge.png">    </p:cNvPr>
+          <p:cNvPicPr>
+            <a:picLocks noChangeAspect="1"/>
+          </p:cNvPicPr>
+          <p:nvPr/>
+        </p:nvPicPr>
+        <p:blipFill>
+          <a:blip r:embed="rId2"/>
+          <a:srcRect l="0" r="0" t="0" b="0"/>
+          <a:stretch/>
+        </p:blipFill>
+        <p:spPr>
+          <a:xfrm>
+            <a:off x="4718304" y="1472184"/>
+            <a:ext cx="3803904" cy="2267712"/>
+          </a:xfrm>
+          <a:prstGeom prst="rect">
+            <a:avLst/>
+          </a:prstGeom>
+        </p:spPr>
+      </p:pic>
+      <p:sp>
+        <p:nvSpPr>
+          <p:cNvPr id="10" name="Text 6"/>
+          <p:cNvSpPr txBox="1"/>
+          <p:nvPr/>
+        </p:nvSpPr>
+        <p:spPr>
+          <a:xfrm>
+            <a:off x="4663440" y="3858768"/>
+            <a:ext cx="3913632" cy="457200"/>
+          </a:xfrm>
+          <a:prstGeom prst="rect">
+            <a:avLst/>
+          </a:prstGeom>
+          <a:noFill/>
+          <a:ln/>
+        </p:spPr>
+        <p:txBody>
+          <a:bodyPr wrap="square" lIns="0" tIns="0" rIns="0" bIns="0" rtlCol="0" anchor="t"/>
+          <a:lstStyle/>
+          <a:p>
+            <a:pPr algn="ctr" indent="0" marL="0">
+              <a:buNone/>
+            </a:pPr>
+            <a:r>
+              <a:rPr lang="en-US" sz="1100" dirty="0">
+                <a:solidFill>
+                  <a:srgbClr val="6B7280"/>
+                </a:solidFill>
+                <a:latin typeface="Calibri" pitchFamily="34" charset="0"/>
+                <a:ea typeface="Calibri" pitchFamily="34" charset="-122"/>
+                <a:cs typeface="Calibri" pitchFamily="34" charset="-120"/>
+              </a:rPr>
+              <a:t>29_bridge.py -- beams, cables, hangers, cars along the road</a:t>
+            </a:r>
+            <a:endParaRPr lang="en-US" sz="1100" dirty="0"/>
+          </a:p>
+        </p:txBody>
+      </p:sp>
+      <p:sp>
+        <p:nvSpPr>
+          <p:cNvPr id="11" name="Shape 7"/>
+          <p:cNvSpPr/>
+          <p:nvPr/>
+        </p:nvSpPr>
+        <p:spPr>
+          <a:xfrm>
+            <a:off x="566928" y="4160520"/>
+            <a:ext cx="3931920" cy="1920240"/>
+          </a:xfrm>
+          <a:prstGeom prst="roundRect">
+            <a:avLst>
+              <a:gd name="adj" fmla="val 2857"/>
+            </a:avLst>
+          </a:prstGeom>
+          <a:solidFill>
+            <a:srgbClr val="FAFAFA"/>
+          </a:solidFill>
+          <a:ln w="9525">
+            <a:solidFill>
+              <a:srgbClr val="E3E1DD"/>
+            </a:solidFill>
+            <a:prstDash val="solid"/>
+          </a:ln>
+        </p:spPr>
+      </p:sp>
+      <p:pic>
+        <p:nvPicPr>
+          <p:cNvPr id="12" name="Image 2" descr="/home/claude/add3d/docs/images/voxel_island.png">    </p:cNvPr>
+          <p:cNvPicPr>
+            <a:picLocks noChangeAspect="1"/>
+          </p:cNvPicPr>
+          <p:nvPr/>
+        </p:nvPicPr>
+        <p:blipFill>
+          <a:blip r:embed="rId3"/>
+          <a:srcRect l="0" r="0" t="0" b="0"/>
+          <a:stretch/>
+        </p:blipFill>
+        <p:spPr>
+          <a:xfrm>
+            <a:off x="621792" y="4215384"/>
+            <a:ext cx="3822192" cy="1810512"/>
+          </a:xfrm>
+          <a:prstGeom prst="rect">
+            <a:avLst/>
+          </a:prstGeom>
+        </p:spPr>
+      </p:pic>
+      <p:sp>
+        <p:nvSpPr>
+          <p:cNvPr id="13" name="Shape 8"/>
+          <p:cNvSpPr/>
+          <p:nvPr/>
+        </p:nvSpPr>
+        <p:spPr>
+          <a:xfrm>
+            <a:off x="4663440" y="4160520"/>
+            <a:ext cx="3913632" cy="1920240"/>
+          </a:xfrm>
+          <a:prstGeom prst="roundRect">
+            <a:avLst>
+              <a:gd name="adj" fmla="val 2857"/>
+            </a:avLst>
+          </a:prstGeom>
+          <a:solidFill>
+            <a:srgbClr val="FAFAFA"/>
+          </a:solidFill>
+          <a:ln w="9525">
+            <a:solidFill>
+              <a:srgbClr val="E3E1DD"/>
+            </a:solidFill>
+            <a:prstDash val="solid"/>
+          </a:ln>
+        </p:spPr>
+      </p:sp>
+      <p:pic>
+        <p:nvPicPr>
+          <p:cNvPr id="14" name="Image 3" descr="/home/claude/add3d/docs/images/vector_fields.png">    </p:cNvPr>
+          <p:cNvPicPr>
+            <a:picLocks noChangeAspect="1"/>
+          </p:cNvPicPr>
+          <p:nvPr/>
+        </p:nvPicPr>
+        <p:blipFill>
+          <a:blip r:embed="rId4"/>
+          <a:srcRect l="0" r="0" t="0" b="0"/>
+          <a:stretch/>
+        </p:blipFill>
+        <p:spPr>
+          <a:xfrm>
+            <a:off x="4718304" y="4215384"/>
+            <a:ext cx="3803904" cy="1810512"/>
+          </a:xfrm>
+          <a:prstGeom prst="rect">
+            <a:avLst/>
+          </a:prstGeom>
+        </p:spPr>
+      </p:pic>
+    </p:spTree>
+  </p:cSld>
+  <p:clrMapOvr>
+    <a:masterClrMapping/>
+  </p:clrMapOvr>
+</p:sld>
+</file>
+
+<file path=ppt/slides/slide35.xml><?xml version="1.0" encoding="utf-8"?>
+<p:sld xmlns:a="http://schemas.openxmlformats.org/drawingml/2006/main" xmlns:r="http://schemas.openxmlformats.org/officeDocument/2006/relationships" xmlns:p="http://schemas.openxmlformats.org/presentationml/2006/main">
+  <p:cSld name="Slide 35">
+    <p:bg>
+      <p:bgPr>
+        <a:solidFill>
+          <a:srgbClr val="FFFFFF"/>
+        </a:solidFill>
+      </p:bgPr>
+    </p:bg>
+    <p:spTree>
+      <p:nvGrpSpPr>
+        <p:cNvPr id="1" name=""/>
+        <p:cNvGrpSpPr/>
+        <p:nvPr/>
+      </p:nvGrpSpPr>
+      <p:grpSpPr>
+        <a:xfrm>
+          <a:off x="0" y="0"/>
+          <a:ext cx="0" cy="0"/>
+          <a:chOff x="0" y="0"/>
+          <a:chExt cx="0" cy="0"/>
+        </a:xfrm>
+      </p:grpSpPr>
+      <p:sp>
+        <p:nvSpPr>
+          <p:cNvPr id="2" name="Text 0"/>
+          <p:cNvSpPr txBox="1"/>
+          <p:nvPr/>
+        </p:nvSpPr>
+        <p:spPr>
+          <a:xfrm>
+            <a:off x="566928" y="329184"/>
+            <a:ext cx="8010144" cy="237744"/>
+          </a:xfrm>
+          <a:prstGeom prst="rect">
+            <a:avLst/>
+          </a:prstGeom>
+          <a:noFill/>
+          <a:ln/>
+        </p:spPr>
+        <p:txBody>
+          <a:bodyPr wrap="square" lIns="0" tIns="0" rIns="0" bIns="0" rtlCol="0" anchor="ctr"/>
+          <a:lstStyle/>
+          <a:p>
+            <a:pPr indent="0" marL="0">
+              <a:buNone/>
+            </a:pPr>
+            <a:r>
+              <a:rPr lang="en-US" sz="1100" b="1" spc="160" kern="0" dirty="0">
+                <a:solidFill>
+                  <a:srgbClr val="8A4B1E"/>
+                </a:solidFill>
+                <a:latin typeface="Calibri" pitchFamily="34" charset="0"/>
+                <a:ea typeface="Calibri" pitchFamily="34" charset="-122"/>
+                <a:cs typeface="Calibri" pitchFamily="34" charset="-120"/>
+              </a:rPr>
+              <a:t>GALLERY</a:t>
+            </a:r>
+            <a:endParaRPr lang="en-US" sz="1100" dirty="0"/>
+          </a:p>
+        </p:txBody>
+      </p:sp>
+      <p:sp>
+        <p:nvSpPr>
+          <p:cNvPr id="3" name="Text 1"/>
+          <p:cNvSpPr txBox="1"/>
+          <p:nvPr/>
+        </p:nvSpPr>
+        <p:spPr>
+          <a:xfrm>
+            <a:off x="566928" y="548640"/>
+            <a:ext cx="8010144" cy="658368"/>
+          </a:xfrm>
+          <a:prstGeom prst="rect">
+            <a:avLst/>
+          </a:prstGeom>
+          <a:noFill/>
+          <a:ln/>
+        </p:spPr>
+        <p:txBody>
+          <a:bodyPr wrap="square" lIns="0" tIns="0" rIns="0" bIns="0" rtlCol="0" anchor="t"/>
+          <a:lstStyle/>
+          <a:p>
+            <a:pPr indent="0" marL="0">
+              <a:buNone/>
+            </a:pPr>
+            <a:r>
+              <a:rPr lang="en-US" sz="3000" b="1" dirty="0">
+                <a:solidFill>
+                  <a:srgbClr val="24282E"/>
+                </a:solidFill>
+                <a:latin typeface="Cambria" pitchFamily="34" charset="0"/>
+                <a:ea typeface="Cambria" pitchFamily="34" charset="-122"/>
+                <a:cs typeface="Cambria" pitchFamily="34" charset="-120"/>
+              </a:rPr>
+              <a:t>Larger studies</a:t>
+            </a:r>
+            <a:endParaRPr lang="en-US" sz="3000" dirty="0"/>
+          </a:p>
+        </p:txBody>
+      </p:sp>
+      <p:sp>
+        <p:nvSpPr>
+          <p:cNvPr id="4" name="Text 2"/>
+          <p:cNvSpPr txBox="1"/>
+          <p:nvPr/>
+        </p:nvSpPr>
+        <p:spPr>
+          <a:xfrm>
+            <a:off x="8119872" y="6382512"/>
+            <a:ext cx="457200" cy="237744"/>
+          </a:xfrm>
+          <a:prstGeom prst="rect">
+            <a:avLst/>
+          </a:prstGeom>
+          <a:noFill/>
+          <a:ln/>
+        </p:spPr>
+        <p:txBody>
+          <a:bodyPr wrap="square" lIns="0" tIns="0" rIns="0" bIns="0" rtlCol="0" anchor="ctr"/>
+          <a:lstStyle/>
+          <a:p>
+            <a:pPr algn="r" indent="0" marL="0">
+              <a:buNone/>
+            </a:pPr>
+            <a:r>
+              <a:rPr lang="en-US" sz="1000" dirty="0">
+                <a:solidFill>
+                  <a:srgbClr val="6B7280"/>
+                </a:solidFill>
+                <a:latin typeface="Calibri" pitchFamily="34" charset="0"/>
+                <a:ea typeface="Calibri" pitchFamily="34" charset="-122"/>
+                <a:cs typeface="Calibri" pitchFamily="34" charset="-120"/>
+              </a:rPr>
+              <a:t>34</a:t>
+            </a:r>
+            <a:endParaRPr lang="en-US" sz="1000" dirty="0"/>
+          </a:p>
+        </p:txBody>
+      </p:sp>
+      <p:sp>
+        <p:nvSpPr>
+          <p:cNvPr id="5" name="Shape 3"/>
+          <p:cNvSpPr/>
+          <p:nvPr/>
+        </p:nvSpPr>
+        <p:spPr>
+          <a:xfrm>
+            <a:off x="566928" y="1417320"/>
+            <a:ext cx="3931920" cy="2377440"/>
+          </a:xfrm>
+          <a:prstGeom prst="roundRect">
+            <a:avLst>
+              <a:gd name="adj" fmla="val 2308"/>
+            </a:avLst>
+          </a:prstGeom>
+          <a:solidFill>
+            <a:srgbClr val="FAFAFA"/>
+          </a:solidFill>
+          <a:ln w="9525">
+            <a:solidFill>
+              <a:srgbClr val="E3E1DD"/>
+            </a:solidFill>
+            <a:prstDash val="solid"/>
+          </a:ln>
+        </p:spPr>
+      </p:sp>
+      <p:pic>
+        <p:nvPicPr>
+          <p:cNvPr id="6" name="Image 0" descr="/home/claude/add3d/docs/images/chess_set.png">    </p:cNvPr>
+          <p:cNvPicPr>
+            <a:picLocks noChangeAspect="1"/>
+          </p:cNvPicPr>
+          <p:nvPr/>
+        </p:nvPicPr>
+        <p:blipFill>
+          <a:blip r:embed="rId1"/>
+          <a:srcRect l="0" r="0" t="0" b="0"/>
+          <a:stretch/>
+        </p:blipFill>
+        <p:spPr>
+          <a:xfrm>
+            <a:off x="621792" y="1472184"/>
+            <a:ext cx="3822192" cy="2267712"/>
+          </a:xfrm>
+          <a:prstGeom prst="rect">
+            <a:avLst/>
+          </a:prstGeom>
+        </p:spPr>
+      </p:pic>
+      <p:sp>
+        <p:nvSpPr>
+          <p:cNvPr id="7" name="Text 4"/>
+          <p:cNvSpPr txBox="1"/>
+          <p:nvPr/>
+        </p:nvSpPr>
+        <p:spPr>
+          <a:xfrm>
+            <a:off x="566928" y="3858768"/>
+            <a:ext cx="3931920" cy="457200"/>
+          </a:xfrm>
+          <a:prstGeom prst="rect">
+            <a:avLst/>
+          </a:prstGeom>
+          <a:noFill/>
+          <a:ln/>
+        </p:spPr>
+        <p:txBody>
+          <a:bodyPr wrap="square" lIns="0" tIns="0" rIns="0" bIns="0" rtlCol="0" anchor="t"/>
+          <a:lstStyle/>
+          <a:p>
+            <a:pPr algn="ctr" indent="0" marL="0">
+              <a:buNone/>
+            </a:pPr>
+            <a:r>
+              <a:rPr lang="en-US" sz="1100" dirty="0">
+                <a:solidFill>
+                  <a:srgbClr val="6B7280"/>
+                </a:solidFill>
+                <a:latin typeface="Calibri" pitchFamily="34" charset="0"/>
+                <a:ea typeface="Calibri" pitchFamily="34" charset="-122"/>
+                <a:cs typeface="Calibri" pitchFamily="34" charset="-120"/>
+              </a:rPr>
+              <a:t>18_chess_set.py -- lathe, layers, booleans</a:t>
+            </a:r>
+            <a:endParaRPr lang="en-US" sz="1100" dirty="0"/>
+          </a:p>
+        </p:txBody>
+      </p:sp>
+      <p:sp>
+        <p:nvSpPr>
+          <p:cNvPr id="8" name="Shape 5"/>
+          <p:cNvSpPr/>
+          <p:nvPr/>
+        </p:nvSpPr>
+        <p:spPr>
+          <a:xfrm>
+            <a:off x="4663440" y="1417320"/>
+            <a:ext cx="3913632" cy="2377440"/>
+          </a:xfrm>
+          <a:prstGeom prst="roundRect">
+            <a:avLst>
+              <a:gd name="adj" fmla="val 2308"/>
+            </a:avLst>
+          </a:prstGeom>
+          <a:solidFill>
+            <a:srgbClr val="FAFAFA"/>
+          </a:solidFill>
+          <a:ln w="9525">
+            <a:solidFill>
+              <a:srgbClr val="E3E1DD"/>
+            </a:solidFill>
+            <a:prstDash val="solid"/>
+          </a:ln>
+        </p:spPr>
+      </p:sp>
+      <p:pic>
+        <p:nvPicPr>
+          <p:cNvPr id="9" name="Image 1" descr="/home/claude/add3d/docs/images/fractals.png">    </p:cNvPr>
+          <p:cNvPicPr>
+            <a:picLocks noChangeAspect="1"/>
+          </p:cNvPicPr>
+          <p:nvPr/>
+        </p:nvPicPr>
+        <p:blipFill>
+          <a:blip r:embed="rId2"/>
+          <a:srcRect l="0" r="0" t="0" b="0"/>
+          <a:stretch/>
+        </p:blipFill>
+        <p:spPr>
+          <a:xfrm>
+            <a:off x="4718304" y="1472184"/>
+            <a:ext cx="3803904" cy="2267712"/>
+          </a:xfrm>
+          <a:prstGeom prst="rect">
+            <a:avLst/>
+          </a:prstGeom>
+        </p:spPr>
+      </p:pic>
+      <p:sp>
+        <p:nvSpPr>
+          <p:cNvPr id="10" name="Text 6"/>
+          <p:cNvSpPr txBox="1"/>
+          <p:nvPr/>
+        </p:nvSpPr>
+        <p:spPr>
+          <a:xfrm>
+            <a:off x="4663440" y="3858768"/>
+            <a:ext cx="3913632" cy="457200"/>
+          </a:xfrm>
+          <a:prstGeom prst="rect">
+            <a:avLst/>
+          </a:prstGeom>
+          <a:noFill/>
+          <a:ln/>
+        </p:spPr>
+        <p:txBody>
+          <a:bodyPr wrap="square" lIns="0" tIns="0" rIns="0" bIns="0" rtlCol="0" anchor="t"/>
+          <a:lstStyle/>
+          <a:p>
+            <a:pPr algn="ctr" indent="0" marL="0">
+              <a:buNone/>
+            </a:pPr>
+            <a:r>
+              <a:rPr lang="en-US" sz="1100" dirty="0">
+                <a:solidFill>
+                  <a:srgbClr val="6B7280"/>
+                </a:solidFill>
+                <a:latin typeface="Calibri" pitchFamily="34" charset="0"/>
+                <a:ea typeface="Calibri" pitchFamily="34" charset="-122"/>
+                <a:cs typeface="Calibri" pitchFamily="34" charset="-120"/>
+              </a:rPr>
+              <a:t>17_fractals.py -- Menger sponge, Sierpinski, a tree</a:t>
+            </a:r>
+            <a:endParaRPr lang="en-US" sz="1100" dirty="0"/>
+          </a:p>
+        </p:txBody>
+      </p:sp>
+      <p:sp>
+        <p:nvSpPr>
+          <p:cNvPr id="11" name="Shape 7"/>
+          <p:cNvSpPr/>
+          <p:nvPr/>
+        </p:nvSpPr>
+        <p:spPr>
+          <a:xfrm>
+            <a:off x="566928" y="4160520"/>
+            <a:ext cx="3931920" cy="1920240"/>
+          </a:xfrm>
+          <a:prstGeom prst="roundRect">
+            <a:avLst>
+              <a:gd name="adj" fmla="val 2857"/>
+            </a:avLst>
+          </a:prstGeom>
+          <a:solidFill>
+            <a:srgbClr val="FAFAFA"/>
+          </a:solidFill>
+          <a:ln w="9525">
+            <a:solidFill>
+              <a:srgbClr val="E3E1DD"/>
+            </a:solidFill>
+            <a:prstDash val="solid"/>
+          </a:ln>
+        </p:spPr>
+      </p:sp>
+      <p:pic>
+        <p:nvPicPr>
+          <p:cNvPr id="12" name="Image 2" descr="/home/claude/add3d/docs/images/city.png">    </p:cNvPr>
+          <p:cNvPicPr>
+            <a:picLocks noChangeAspect="1"/>
+          </p:cNvPicPr>
+          <p:nvPr/>
+        </p:nvPicPr>
+        <p:blipFill>
+          <a:blip r:embed="rId3"/>
+          <a:srcRect l="0" r="0" t="0" b="0"/>
+          <a:stretch/>
+        </p:blipFill>
+        <p:spPr>
+          <a:xfrm>
+            <a:off x="621792" y="4215384"/>
+            <a:ext cx="3822192" cy="1810512"/>
+          </a:xfrm>
+          <a:prstGeom prst="rect">
+            <a:avLst/>
+          </a:prstGeom>
+        </p:spPr>
+      </p:pic>
+      <p:sp>
+        <p:nvSpPr>
+          <p:cNvPr id="13" name="Shape 8"/>
+          <p:cNvSpPr/>
+          <p:nvPr/>
+        </p:nvSpPr>
+        <p:spPr>
+          <a:xfrm>
+            <a:off x="4663440" y="4160520"/>
+            <a:ext cx="3913632" cy="1920240"/>
+          </a:xfrm>
+          <a:prstGeom prst="roundRect">
+            <a:avLst>
+              <a:gd name="adj" fmla="val 2857"/>
+            </a:avLst>
+          </a:prstGeom>
+          <a:solidFill>
+            <a:srgbClr val="FAFAFA"/>
+          </a:solidFill>
+          <a:ln w="9525">
+            <a:solidFill>
+              <a:srgbClr val="E3E1DD"/>
+            </a:solidFill>
+            <a:prstDash val="solid"/>
+          </a:ln>
+        </p:spPr>
+      </p:sp>
+      <p:pic>
+        <p:nvPicPr>
+          <p:cNvPr id="14" name="Image 3" descr="/home/claude/add3d/docs/images/example4.png">    </p:cNvPr>
+          <p:cNvPicPr>
+            <a:picLocks noChangeAspect="1"/>
+          </p:cNvPicPr>
+          <p:nvPr/>
+        </p:nvPicPr>
+        <p:blipFill>
+          <a:blip r:embed="rId4"/>
+          <a:srcRect l="0" r="0" t="0" b="0"/>
+          <a:stretch/>
+        </p:blipFill>
+        <p:spPr>
+          <a:xfrm>
+            <a:off x="4718304" y="4215384"/>
+            <a:ext cx="3803904" cy="1810512"/>
+          </a:xfrm>
+          <a:prstGeom prst="rect">
+            <a:avLst/>
+          </a:prstGeom>
+        </p:spPr>
+      </p:pic>
+    </p:spTree>
+  </p:cSld>
+  <p:clrMapOvr>
+    <a:masterClrMapping/>
+  </p:clrMapOvr>
+</p:sld>
+</file>
+
+<file path=ppt/slides/slide36.xml><?xml version="1.0" encoding="utf-8"?>
+<p:sld xmlns:a="http://schemas.openxmlformats.org/drawingml/2006/main" xmlns:r="http://schemas.openxmlformats.org/officeDocument/2006/relationships" xmlns:p="http://schemas.openxmlformats.org/presentationml/2006/main">
+  <p:cSld name="Slide 36">
+    <p:bg>
+      <p:bgPr>
+        <a:solidFill>
+          <a:srgbClr val="FFFFFF"/>
+        </a:solidFill>
+      </p:bgPr>
+    </p:bg>
+    <p:spTree>
+      <p:nvGrpSpPr>
+        <p:cNvPr id="1" name=""/>
+        <p:cNvGrpSpPr/>
+        <p:nvPr/>
+      </p:nvGrpSpPr>
+      <p:grpSpPr>
+        <a:xfrm>
+          <a:off x="0" y="0"/>
+          <a:ext cx="0" cy="0"/>
+          <a:chOff x="0" y="0"/>
+          <a:chExt cx="0" cy="0"/>
+        </a:xfrm>
+      </p:grpSpPr>
+      <p:sp>
+        <p:nvSpPr>
+          <p:cNvPr id="2" name="Text 0"/>
+          <p:cNvSpPr txBox="1"/>
+          <p:nvPr/>
+        </p:nvSpPr>
+        <p:spPr>
+          <a:xfrm>
+            <a:off x="566928" y="329184"/>
+            <a:ext cx="8010144" cy="237744"/>
+          </a:xfrm>
+          <a:prstGeom prst="rect">
+            <a:avLst/>
+          </a:prstGeom>
+          <a:noFill/>
+          <a:ln/>
+        </p:spPr>
+        <p:txBody>
+          <a:bodyPr wrap="square" lIns="0" tIns="0" rIns="0" bIns="0" rtlCol="0" anchor="ctr"/>
+          <a:lstStyle/>
+          <a:p>
+            <a:pPr indent="0" marL="0">
+              <a:buNone/>
+            </a:pPr>
+            <a:r>
+              <a:rPr lang="en-US" sz="1100" b="1" spc="160" kern="0" dirty="0">
+                <a:solidFill>
+                  <a:srgbClr val="8A4B1E"/>
+                </a:solidFill>
+                <a:latin typeface="Calibri" pitchFamily="34" charset="0"/>
+                <a:ea typeface="Calibri" pitchFamily="34" charset="-122"/>
+                <a:cs typeface="Calibri" pitchFamily="34" charset="-120"/>
+              </a:rPr>
+              <a:t>COMPATIBILITY</a:t>
+            </a:r>
+            <a:endParaRPr lang="en-US" sz="1100" dirty="0"/>
+          </a:p>
+        </p:txBody>
+      </p:sp>
+      <p:sp>
+        <p:nvSpPr>
+          <p:cNvPr id="3" name="Text 1"/>
+          <p:cNvSpPr txBox="1"/>
+          <p:nvPr/>
+        </p:nvSpPr>
+        <p:spPr>
+          <a:xfrm>
+            <a:off x="566928" y="548640"/>
+            <a:ext cx="8010144" cy="658368"/>
+          </a:xfrm>
+          <a:prstGeom prst="rect">
+            <a:avLst/>
+          </a:prstGeom>
+          <a:noFill/>
+          <a:ln/>
+        </p:spPr>
+        <p:txBody>
+          <a:bodyPr wrap="square" lIns="0" tIns="0" rIns="0" bIns="0" rtlCol="0" anchor="t"/>
+          <a:lstStyle/>
+          <a:p>
+            <a:pPr indent="0" marL="0">
+              <a:buNone/>
+            </a:pPr>
+            <a:r>
+              <a:rPr lang="en-US" sz="3000" b="1" dirty="0">
+                <a:solidFill>
+                  <a:srgbClr val="24282E"/>
+                </a:solidFill>
+                <a:latin typeface="Cambria" pitchFamily="34" charset="0"/>
+                <a:ea typeface="Cambria" pitchFamily="34" charset="-122"/>
+                <a:cs typeface="Cambria" pitchFamily="34" charset="-120"/>
+              </a:rPr>
+              <a:t>From 1.2 to 2.0</a:t>
+            </a:r>
+            <a:endParaRPr lang="en-US" sz="3000" dirty="0"/>
+          </a:p>
+        </p:txBody>
+      </p:sp>
+      <p:sp>
+        <p:nvSpPr>
+          <p:cNvPr id="4" name="Text 2"/>
+          <p:cNvSpPr txBox="1"/>
+          <p:nvPr/>
+        </p:nvSpPr>
+        <p:spPr>
+          <a:xfrm>
+            <a:off x="8119872" y="6382512"/>
+            <a:ext cx="457200" cy="237744"/>
+          </a:xfrm>
+          <a:prstGeom prst="rect">
+            <a:avLst/>
+          </a:prstGeom>
+          <a:noFill/>
+          <a:ln/>
+        </p:spPr>
+        <p:txBody>
+          <a:bodyPr wrap="square" lIns="0" tIns="0" rIns="0" bIns="0" rtlCol="0" anchor="ctr"/>
+          <a:lstStyle/>
+          <a:p>
+            <a:pPr algn="r" indent="0" marL="0">
+              <a:buNone/>
+            </a:pPr>
+            <a:r>
+              <a:rPr lang="en-US" sz="1000" dirty="0">
+                <a:solidFill>
+                  <a:srgbClr val="6B7280"/>
+                </a:solidFill>
+                <a:latin typeface="Calibri" pitchFamily="34" charset="0"/>
+                <a:ea typeface="Calibri" pitchFamily="34" charset="-122"/>
+                <a:cs typeface="Calibri" pitchFamily="34" charset="-120"/>
+              </a:rPr>
+              <a:t>35</a:t>
+            </a:r>
+            <a:endParaRPr lang="en-US" sz="1000" dirty="0"/>
+          </a:p>
+        </p:txBody>
+      </p:sp>
       <p:graphicFrame>
         <p:nvGraphicFramePr>
-          <p:cNvPr id="32" name="Table 0"/>
+          <p:cNvPr id="37" name="Table 0"/>
           <p:cNvGraphicFramePr>
             <a:graphicFrameLocks noGrp="1"/>
           </p:cNvGraphicFramePr>
@@ -17277,7 +21236,7 @@
                           <a:ea typeface="Calibri" pitchFamily="34" charset="-122"/>
                           <a:cs typeface="Calibri" pitchFamily="34" charset="-120"/>
                         </a:rPr>
-                        <a:t>add.py 2.1</a:t>
+                        <a:t>add.py 2.0</a:t>
                       </a:r>
                       <a:endParaRPr lang="en-US" sz="1200" dirty="0">
                         <a:latin typeface="Calibri" charset="0"/>
@@ -19032,7 +22991,7 @@
                 <a:ea typeface="Calibri" pitchFamily="34" charset="-122"/>
                 <a:cs typeface="Calibri" pitchFamily="34" charset="-120"/>
               </a:rPr>
-              <a:t>All the old names still work. Twelve models written for 1.2 live in tests/legacy/, and the tests check that they produce exactly as many faces as before. examples/32_old_names.py is a whole model in the 1.2 vocabulary.</a:t>
+              <a:t>All the old names still work. Twelve models written for 1.2 live in tests/legacy/, and the tests check that they produce exactly as many faces as before (only sphere changed: it is geodesic now; quadsphere is the old one). examples/32_old_names.py is a whole model in the 1.2 vocabulary.</a:t>
             </a:r>
             <a:endParaRPr lang="en-US" sz="1300" dirty="0"/>
           </a:p>
@@ -19046,9 +23005,9 @@
 </p:sld>
 </file>
 
-<file path=ppt/slides/slide32.xml><?xml version="1.0" encoding="utf-8"?>
+<file path=ppt/slides/slide37.xml><?xml version="1.0" encoding="utf-8"?>
 <p:sld xmlns:a="http://schemas.openxmlformats.org/drawingml/2006/main" xmlns:r="http://schemas.openxmlformats.org/officeDocument/2006/relationships" xmlns:p="http://schemas.openxmlformats.org/presentationml/2006/main">
-  <p:cSld name="Slide 32">
+  <p:cSld name="Slide 37">
     <p:bg>
       <p:bgPr>
         <a:solidFill>

--- a/slides/add_py_2026_en.pptx
+++ b/slides/add_py_2026_en.pptx
@@ -42,9 +42,10 @@
     <p:sldId id="290" r:id="rId36"/>
     <p:sldId id="291" r:id="rId37"/>
     <p:sldId id="292" r:id="rId38"/>
+    <p:sldId id="293" r:id="rId39"/>
   </p:sldIdLst>
   <p:notesMasterIdLst>
-    <p:notesMasterId r:id="rId39"/>
+    <p:notesMasterId r:id="rId40"/>
   </p:notesMasterIdLst>
   <p:sldSz cx="9144000" cy="6858000"/>
   <p:notesSz cx="6858000" cy="9144000"/>
@@ -3002,7 +3003,7 @@
           <a:p>
             <a:r>
               <a:rPr lang="en-US" dirty="0"/>
-              <a:t>42 example programs; every public function is used by at least one of them (python3 tools/coverage.py), and every model fits the Sketchfab limits.</a:t>
+              <a:t/>
             </a:r>
             <a:endParaRPr lang="en-US" dirty="0"/>
           </a:p>
@@ -3090,7 +3091,7 @@
           <a:p>
             <a:r>
               <a:rPr lang="en-US" dirty="0"/>
-              <a:t/>
+              <a:t>42 example programs; every public function is used by at least one of them (python3 tools/coverage.py), and every model fits the Sketchfab limits.</a:t>
             </a:r>
             <a:endParaRPr lang="en-US" dirty="0"/>
           </a:p>
@@ -3178,7 +3179,7 @@
           <a:p>
             <a:r>
               <a:rPr lang="en-US" dirty="0"/>
-              <a:t>For students: start with examples/01_first_model.py, then 02_primitives.py. For the assignment, examples 06-16 and the complete models 22-33 are the most useful.</a:t>
+              <a:t/>
             </a:r>
             <a:endParaRPr lang="en-US" dirty="0"/>
           </a:p>
@@ -3202,6 +3203,94 @@
             <a:fld id="{F7021451-1387-4CA6-816F-3879F97B5CBC}" type="slidenum">
               <a:rPr lang="en-US"/>
               <a:t>37</a:t>
+            </a:fld>
+            <a:endParaRPr lang="en-US"/>
+          </a:p>
+        </p:txBody>
+      </p:sp>
+    </p:spTree>
+    <p:extLst>
+      <p:ext uri="{BB962C8B-B14F-4D97-AF65-F5344CB8AC3E}">
+        <p14:creationId xmlns:p14="http://schemas.microsoft.com/office/powerpoint/2010/main" val="1024086991"/>
+      </p:ext>
+    </p:extLst>
+  </p:cSld>
+  <p:clrMapOvr>
+    <a:masterClrMapping/>
+  </p:clrMapOvr>
+</p:notes>
+</file>
+
+<file path=ppt/notesSlides/notesSlide38.xml><?xml version="1.0" encoding="utf-8"?>
+<p:notes xmlns:a="http://schemas.openxmlformats.org/drawingml/2006/main" xmlns:r="http://schemas.openxmlformats.org/officeDocument/2006/relationships" xmlns:p="http://schemas.openxmlformats.org/presentationml/2006/main">
+  <p:cSld>
+    <p:spTree>
+      <p:nvGrpSpPr>
+        <p:cNvPr id="1" name=""/>
+        <p:cNvGrpSpPr/>
+        <p:nvPr/>
+      </p:nvGrpSpPr>
+      <p:grpSpPr>
+        <a:xfrm>
+          <a:off x="0" y="0"/>
+          <a:ext cx="0" cy="0"/>
+          <a:chOff x="0" y="0"/>
+          <a:chExt cx="0" cy="0"/>
+        </a:xfrm>
+      </p:grpSpPr>
+      <p:sp>
+        <p:nvSpPr>
+          <p:cNvPr id="2" name="Slide Image Placeholder 1"/>
+          <p:cNvSpPr>
+            <a:spLocks noGrp="1" noRot="1" noChangeAspect="1"/>
+          </p:cNvSpPr>
+          <p:nvPr>
+            <p:ph type="sldImg"/>
+          </p:nvPr>
+        </p:nvSpPr>
+        <p:spPr/>
+      </p:sp>
+      <p:sp>
+        <p:nvSpPr>
+          <p:cNvPr id="3" name="Notes Placeholder 2"/>
+          <p:cNvSpPr>
+            <a:spLocks noGrp="1"/>
+          </p:cNvSpPr>
+          <p:nvPr>
+            <p:ph type="body" idx="1"/>
+          </p:nvPr>
+        </p:nvSpPr>
+        <p:spPr/>
+        <p:txBody>
+          <a:bodyPr/>
+          <a:lstStyle/>
+          <a:p>
+            <a:r>
+              <a:rPr lang="en-US" dirty="0"/>
+              <a:t>For students: start with examples/01_first_model.py, then 02_primitives.py. For the assignment, examples 06-16 and the complete models 22-33 are the most useful.</a:t>
+            </a:r>
+            <a:endParaRPr lang="en-US" dirty="0"/>
+          </a:p>
+        </p:txBody>
+      </p:sp>
+      <p:sp>
+        <p:nvSpPr>
+          <p:cNvPr id="4" name="Slide Number Placeholder 3"/>
+          <p:cNvSpPr>
+            <a:spLocks noGrp="1"/>
+          </p:cNvSpPr>
+          <p:nvPr>
+            <p:ph type="sldNum" sz="quarter" idx="10"/>
+          </p:nvPr>
+        </p:nvSpPr>
+        <p:spPr/>
+        <p:txBody>
+          <a:bodyPr/>
+          <a:lstStyle/>
+          <a:p>
+            <a:fld id="{F7021451-1387-4CA6-816F-3879F97B5CBC}" type="slidenum">
+              <a:rPr lang="en-US"/>
+              <a:t>38</a:t>
             </a:fld>
             <a:endParaRPr lang="en-US"/>
           </a:p>
@@ -19456,7 +19545,7 @@
                 <a:ea typeface="Calibri" pitchFamily="34" charset="-122"/>
                 <a:cs typeface="Calibri" pitchFamily="34" charset="-120"/>
               </a:rPr>
-              <a:t>FILES</a:t>
+              <a:t>46_CASTLE.PY, STREAM()</a:t>
             </a:r>
             <a:endParaRPr lang="en-US" sz="1100" dirty="0"/>
           </a:p>
@@ -19495,7 +19584,7 @@
                 <a:ea typeface="Cambria" pitchFamily="34" charset="-122"/>
                 <a:cs typeface="Cambria" pitchFamily="34" charset="-120"/>
               </a:rPr>
-              <a:t>Saving and sharing a model</a:t>
+              <a:t>The castle: a model bigger than memory</a:t>
             </a:r>
             <a:endParaRPr lang="en-US" sz="3000" dirty="0"/>
           </a:p>
@@ -19548,12 +19637,279 @@
         </p:nvSpPr>
         <p:spPr>
           <a:xfrm>
-            <a:off x="566928" y="1463040"/>
-            <a:ext cx="4572000" cy="1508760"/>
+            <a:off x="566928" y="1325880"/>
+            <a:ext cx="4846320" cy="3108960"/>
           </a:xfrm>
           <a:prstGeom prst="roundRect">
             <a:avLst>
-              <a:gd name="adj" fmla="val 3636"/>
+              <a:gd name="adj" fmla="val 1765"/>
+            </a:avLst>
+          </a:prstGeom>
+          <a:solidFill>
+            <a:srgbClr val="FAFAFA"/>
+          </a:solidFill>
+          <a:ln w="9525">
+            <a:solidFill>
+              <a:srgbClr val="E3E1DD"/>
+            </a:solidFill>
+            <a:prstDash val="solid"/>
+          </a:ln>
+        </p:spPr>
+      </p:sp>
+      <p:pic>
+        <p:nvPicPr>
+          <p:cNvPr id="6" name="Image 0" descr="/home/claude/add3d/docs/images/castle.png">    </p:cNvPr>
+          <p:cNvPicPr>
+            <a:picLocks noChangeAspect="1"/>
+          </p:cNvPicPr>
+          <p:nvPr/>
+        </p:nvPicPr>
+        <p:blipFill>
+          <a:blip r:embed="rId1"/>
+          <a:srcRect l="0" r="0" t="0" b="0"/>
+          <a:stretch/>
+        </p:blipFill>
+        <p:spPr>
+          <a:xfrm>
+            <a:off x="621792" y="1380744"/>
+            <a:ext cx="4736592" cy="2999232"/>
+          </a:xfrm>
+          <a:prstGeom prst="rect">
+            <a:avLst/>
+          </a:prstGeom>
+        </p:spPr>
+      </p:pic>
+      <p:sp>
+        <p:nvSpPr>
+          <p:cNvPr id="7" name="Text 4"/>
+          <p:cNvSpPr txBox="1"/>
+          <p:nvPr/>
+        </p:nvSpPr>
+        <p:spPr>
+          <a:xfrm>
+            <a:off x="566928" y="4498848"/>
+            <a:ext cx="4846320" cy="457200"/>
+          </a:xfrm>
+          <a:prstGeom prst="rect">
+            <a:avLst/>
+          </a:prstGeom>
+          <a:noFill/>
+          <a:ln/>
+        </p:spPr>
+        <p:txBody>
+          <a:bodyPr wrap="square" lIns="0" tIns="0" rIns="0" bIns="0" rtlCol="0" anchor="t"/>
+          <a:lstStyle/>
+          <a:p>
+            <a:pPr algn="ctr" indent="0" marL="0">
+              <a:buNone/>
+            </a:pPr>
+            <a:r>
+              <a:rPr lang="en-US" sz="1100" dirty="0">
+                <a:solidFill>
+                  <a:srgbClr val="6B7280"/>
+                </a:solidFill>
+                <a:latin typeface="Calibri" pitchFamily="34" charset="0"/>
+                <a:ea typeface="Calibri" pitchFamily="34" charset="-122"/>
+                <a:cs typeface="Calibri" pitchFamily="34" charset="-120"/>
+              </a:rPr>
+              <a:t>26 MB and 48 materials for Sketchfab; --full 180 MB; --ultra over 1 GB</a:t>
+            </a:r>
+            <a:endParaRPr lang="en-US" sz="1100" dirty="0"/>
+          </a:p>
+        </p:txBody>
+      </p:sp>
+      <p:sp>
+        <p:nvSpPr>
+          <p:cNvPr id="8" name="Shape 5"/>
+          <p:cNvSpPr/>
+          <p:nvPr/>
+        </p:nvSpPr>
+        <p:spPr>
+          <a:xfrm>
+            <a:off x="5349240" y="1325880"/>
+            <a:ext cx="3246120" cy="1417320"/>
+          </a:xfrm>
+          <a:prstGeom prst="roundRect">
+            <a:avLst>
+              <a:gd name="adj" fmla="val 3871"/>
+            </a:avLst>
+          </a:prstGeom>
+          <a:solidFill>
+            <a:srgbClr val="FAFAFA"/>
+          </a:solidFill>
+          <a:ln w="9525">
+            <a:solidFill>
+              <a:srgbClr val="E3E1DD"/>
+            </a:solidFill>
+            <a:prstDash val="solid"/>
+          </a:ln>
+        </p:spPr>
+      </p:sp>
+      <p:pic>
+        <p:nvPicPr>
+          <p:cNvPr id="9" name="Image 1" descr="/home/claude/add3d/docs/images/castle_hall.png">    </p:cNvPr>
+          <p:cNvPicPr>
+            <a:picLocks noChangeAspect="1"/>
+          </p:cNvPicPr>
+          <p:nvPr/>
+        </p:nvPicPr>
+        <p:blipFill>
+          <a:blip r:embed="rId2"/>
+          <a:srcRect l="0" r="0" t="0" b="0"/>
+          <a:stretch/>
+        </p:blipFill>
+        <p:spPr>
+          <a:xfrm>
+            <a:off x="5404104" y="1380744"/>
+            <a:ext cx="3136392" cy="1307592"/>
+          </a:xfrm>
+          <a:prstGeom prst="rect">
+            <a:avLst/>
+          </a:prstGeom>
+        </p:spPr>
+      </p:pic>
+      <p:sp>
+        <p:nvSpPr>
+          <p:cNvPr id="10" name="Text 6"/>
+          <p:cNvSpPr txBox="1"/>
+          <p:nvPr/>
+        </p:nvSpPr>
+        <p:spPr>
+          <a:xfrm>
+            <a:off x="5349240" y="2807208"/>
+            <a:ext cx="3246120" cy="457200"/>
+          </a:xfrm>
+          <a:prstGeom prst="rect">
+            <a:avLst/>
+          </a:prstGeom>
+          <a:noFill/>
+          <a:ln/>
+        </p:spPr>
+        <p:txBody>
+          <a:bodyPr wrap="square" lIns="0" tIns="0" rIns="0" bIns="0" rtlCol="0" anchor="t"/>
+          <a:lstStyle/>
+          <a:p>
+            <a:pPr algn="ctr" indent="0" marL="0">
+              <a:buNone/>
+            </a:pPr>
+            <a:r>
+              <a:rPr lang="en-US" sz="1100" dirty="0">
+                <a:solidFill>
+                  <a:srgbClr val="6B7280"/>
+                </a:solidFill>
+                <a:latin typeface="Calibri" pitchFamily="34" charset="0"/>
+                <a:ea typeface="Calibri" pitchFamily="34" charset="-122"/>
+                <a:cs typeface="Calibri" pitchFamily="34" charset="-120"/>
+              </a:rPr>
+              <a:t>the throne hall and the feast</a:t>
+            </a:r>
+            <a:endParaRPr lang="en-US" sz="1100" dirty="0"/>
+          </a:p>
+        </p:txBody>
+      </p:sp>
+      <p:sp>
+        <p:nvSpPr>
+          <p:cNvPr id="11" name="Shape 7"/>
+          <p:cNvSpPr/>
+          <p:nvPr/>
+        </p:nvSpPr>
+        <p:spPr>
+          <a:xfrm>
+            <a:off x="5349240" y="3017520"/>
+            <a:ext cx="3246120" cy="1417320"/>
+          </a:xfrm>
+          <a:prstGeom prst="roundRect">
+            <a:avLst>
+              <a:gd name="adj" fmla="val 3871"/>
+            </a:avLst>
+          </a:prstGeom>
+          <a:solidFill>
+            <a:srgbClr val="FAFAFA"/>
+          </a:solidFill>
+          <a:ln w="9525">
+            <a:solidFill>
+              <a:srgbClr val="E3E1DD"/>
+            </a:solidFill>
+            <a:prstDash val="solid"/>
+          </a:ln>
+        </p:spPr>
+      </p:sp>
+      <p:pic>
+        <p:nvPicPr>
+          <p:cNvPr id="12" name="Image 2" descr="/home/claude/add3d/docs/images/castle_treasury.png">    </p:cNvPr>
+          <p:cNvPicPr>
+            <a:picLocks noChangeAspect="1"/>
+          </p:cNvPicPr>
+          <p:nvPr/>
+        </p:nvPicPr>
+        <p:blipFill>
+          <a:blip r:embed="rId3"/>
+          <a:srcRect l="0" r="0" t="0" b="0"/>
+          <a:stretch/>
+        </p:blipFill>
+        <p:spPr>
+          <a:xfrm>
+            <a:off x="5404104" y="3072384"/>
+            <a:ext cx="3136392" cy="1307592"/>
+          </a:xfrm>
+          <a:prstGeom prst="rect">
+            <a:avLst/>
+          </a:prstGeom>
+        </p:spPr>
+      </p:pic>
+      <p:sp>
+        <p:nvSpPr>
+          <p:cNvPr id="13" name="Text 8"/>
+          <p:cNvSpPr txBox="1"/>
+          <p:nvPr/>
+        </p:nvSpPr>
+        <p:spPr>
+          <a:xfrm>
+            <a:off x="5349240" y="4498848"/>
+            <a:ext cx="3246120" cy="457200"/>
+          </a:xfrm>
+          <a:prstGeom prst="rect">
+            <a:avLst/>
+          </a:prstGeom>
+          <a:noFill/>
+          <a:ln/>
+        </p:spPr>
+        <p:txBody>
+          <a:bodyPr wrap="square" lIns="0" tIns="0" rIns="0" bIns="0" rtlCol="0" anchor="t"/>
+          <a:lstStyle/>
+          <a:p>
+            <a:pPr algn="ctr" indent="0" marL="0">
+              <a:buNone/>
+            </a:pPr>
+            <a:r>
+              <a:rPr lang="en-US" sz="1100" dirty="0">
+                <a:solidFill>
+                  <a:srgbClr val="6B7280"/>
+                </a:solidFill>
+                <a:latin typeface="Calibri" pitchFamily="34" charset="0"/>
+                <a:ea typeface="Calibri" pitchFamily="34" charset="-122"/>
+                <a:cs typeface="Calibri" pitchFamily="34" charset="-120"/>
+              </a:rPr>
+              <a:t>the dragon on the treasure</a:t>
+            </a:r>
+            <a:endParaRPr lang="en-US" sz="1100" dirty="0"/>
+          </a:p>
+        </p:txBody>
+      </p:sp>
+      <p:sp>
+        <p:nvSpPr>
+          <p:cNvPr id="14" name="Shape 9"/>
+          <p:cNvSpPr/>
+          <p:nvPr/>
+        </p:nvSpPr>
+        <p:spPr>
+          <a:xfrm>
+            <a:off x="566928" y="5074920"/>
+            <a:ext cx="8321040" cy="960120"/>
+          </a:xfrm>
+          <a:prstGeom prst="roundRect">
+            <a:avLst>
+              <a:gd name="adj" fmla="val 5714"/>
             </a:avLst>
           </a:prstGeom>
           <a:solidFill>
@@ -19569,14 +19925,14 @@
       </p:sp>
       <p:sp>
         <p:nvSpPr>
-          <p:cNvPr id="6" name="Text 4"/>
-          <p:cNvSpPr txBox="1"/>
-          <p:nvPr/>
-        </p:nvSpPr>
-        <p:spPr>
-          <a:xfrm>
-            <a:off x="713232" y="1591056"/>
-            <a:ext cx="4279392" cy="1252728"/>
+          <p:cNvPr id="15" name="Text 10"/>
+          <p:cNvSpPr txBox="1"/>
+          <p:nvPr/>
+        </p:nvSpPr>
+        <p:spPr>
+          <a:xfrm>
+            <a:off x="713232" y="5202936"/>
+            <a:ext cx="8028432" cy="704088"/>
           </a:xfrm>
           <a:prstGeom prst="rect">
             <a:avLst/>
@@ -19595,7 +19951,7 @@
               <a:buNone/>
             </a:pPr>
             <a:r>
-              <a:rPr lang="en-US" sz="1250" dirty="0">
+              <a:rPr lang="en-US" sz="1100" dirty="0">
                 <a:solidFill>
                   <a:srgbClr val="2C3138"/>
                 </a:solidFill>
@@ -19603,9 +19959,9 @@
                 <a:ea typeface="Consolas" pitchFamily="34" charset="-122"/>
                 <a:cs typeface="Consolas" pitchFamily="34" charset="-120"/>
               </a:rPr>
-              <a:t>add.save("model.off")   # the course format</a:t>
-            </a:r>
-            <a:endParaRPr lang="en-US" sz="1250" dirty="0"/>
+              <a:t>out = add.stream("castle.obj")   # parts go to disk at once</a:t>
+            </a:r>
+            <a:endParaRPr lang="en-US" sz="1100" dirty="0"/>
           </a:p>
           <a:p>
             <a:pPr indent="0" marL="0">
@@ -19615,7 +19971,7 @@
               <a:buNone/>
             </a:pPr>
             <a:r>
-              <a:rPr lang="en-US" sz="1250" dirty="0">
+              <a:rPr lang="en-US" sz="1100" dirty="0">
                 <a:solidFill>
                   <a:srgbClr val="2C3138"/>
                 </a:solidFill>
@@ -19623,9 +19979,9 @@
                 <a:ea typeface="Consolas" pitchFamily="34" charset="-122"/>
                 <a:cs typeface="Consolas" pitchFamily="34" charset="-120"/>
               </a:rPr>
-              <a:t>add.save("model.obj")   # + .mtl for colours</a:t>
-            </a:r>
-            <a:endParaRPr lang="en-US" sz="1250" dirty="0"/>
+              <a:t>wall_of_bricks(); out.add()      # scene written, then cleared</a:t>
+            </a:r>
+            <a:endParaRPr lang="en-US" sz="1100" dirty="0"/>
           </a:p>
           <a:p>
             <a:pPr indent="0" marL="0">
@@ -19635,7 +19991,7 @@
               <a:buNone/>
             </a:pPr>
             <a:r>
-              <a:rPr lang="en-US" sz="1250" dirty="0">
+              <a:rPr lang="en-US" sz="1100" dirty="0">
                 <a:solidFill>
                   <a:srgbClr val="2C3138"/>
                 </a:solidFill>
@@ -19643,480 +19999,9 @@
                 <a:ea typeface="Consolas" pitchFamily="34" charset="-122"/>
                 <a:cs typeface="Consolas" pitchFamily="34" charset="-120"/>
               </a:rPr>
-              <a:t>add.save("model.ply")</a:t>
-            </a:r>
-            <a:endParaRPr lang="en-US" sz="1250" dirty="0"/>
-          </a:p>
-          <a:p>
-            <a:pPr indent="0" marL="0">
-              <a:lnSpc>
-                <a:spcPts val="1600"/>
-              </a:lnSpc>
-              <a:buNone/>
-            </a:pPr>
-            <a:r>
-              <a:rPr lang="en-US" sz="1250" dirty="0">
-                <a:solidFill>
-                  <a:srgbClr val="2C3138"/>
-                </a:solidFill>
-                <a:latin typeface="Consolas" pitchFamily="34" charset="0"/>
-                <a:ea typeface="Consolas" pitchFamily="34" charset="-122"/>
-                <a:cs typeface="Consolas" pitchFamily="34" charset="-120"/>
-              </a:rPr>
-              <a:t>add.save("model.stl")   # for 3D printing</a:t>
-            </a:r>
-            <a:endParaRPr lang="en-US" sz="1250" dirty="0"/>
-          </a:p>
-        </p:txBody>
-      </p:sp>
-      <p:sp>
-        <p:nvSpPr>
-          <p:cNvPr id="7" name="Shape 5"/>
-          <p:cNvSpPr/>
-          <p:nvPr/>
-        </p:nvSpPr>
-        <p:spPr>
-          <a:xfrm>
-            <a:off x="566928" y="3154680"/>
-            <a:ext cx="3886200" cy="1234440"/>
-          </a:xfrm>
-          <a:prstGeom prst="roundRect">
-            <a:avLst>
-              <a:gd name="adj" fmla="val 3704"/>
-            </a:avLst>
-          </a:prstGeom>
-          <a:solidFill>
-            <a:srgbClr val="F6EFE8"/>
-          </a:solidFill>
-          <a:ln/>
-        </p:spPr>
-      </p:sp>
-      <p:sp>
-        <p:nvSpPr>
-          <p:cNvPr id="8" name="Text 6"/>
-          <p:cNvSpPr txBox="1"/>
-          <p:nvPr/>
-        </p:nvSpPr>
-        <p:spPr>
-          <a:xfrm>
-            <a:off x="768096" y="3300984"/>
-            <a:ext cx="3483864" cy="292608"/>
-          </a:xfrm>
-          <a:prstGeom prst="rect">
-            <a:avLst/>
-          </a:prstGeom>
-          <a:noFill/>
-          <a:ln/>
-        </p:spPr>
-        <p:txBody>
-          <a:bodyPr wrap="square" lIns="0" tIns="0" rIns="0" bIns="0" rtlCol="0" anchor="ctr"/>
-          <a:lstStyle/>
-          <a:p>
-            <a:pPr indent="0" marL="0">
-              <a:buNone/>
-            </a:pPr>
-            <a:r>
-              <a:rPr lang="en-US" sz="1500" b="1" dirty="0">
-                <a:solidFill>
-                  <a:srgbClr val="8A4B1E"/>
-                </a:solidFill>
-                <a:latin typeface="Calibri" pitchFamily="34" charset="0"/>
-                <a:ea typeface="Calibri" pitchFamily="34" charset="-122"/>
-                <a:cs typeface="Calibri" pitchFamily="34" charset="-120"/>
-              </a:rPr>
-              <a:t>Sketchfab</a:t>
-            </a:r>
-            <a:endParaRPr lang="en-US" sz="1500" dirty="0"/>
-          </a:p>
-        </p:txBody>
-      </p:sp>
-      <p:sp>
-        <p:nvSpPr>
-          <p:cNvPr id="9" name="Text 7"/>
-          <p:cNvSpPr txBox="1"/>
-          <p:nvPr/>
-        </p:nvSpPr>
-        <p:spPr>
-          <a:xfrm>
-            <a:off x="768096" y="3630168"/>
-            <a:ext cx="3483864" cy="612648"/>
-          </a:xfrm>
-          <a:prstGeom prst="rect">
-            <a:avLst/>
-          </a:prstGeom>
-          <a:noFill/>
-          <a:ln/>
-        </p:spPr>
-        <p:txBody>
-          <a:bodyPr wrap="square" lIns="0" tIns="0" rIns="0" bIns="0" rtlCol="0" anchor="t"/>
-          <a:lstStyle/>
-          <a:p>
-            <a:pPr indent="0" marL="0">
-              <a:lnSpc>
-                <a:spcPts val="1600"/>
-              </a:lnSpc>
-              <a:buNone/>
-            </a:pPr>
-            <a:r>
-              <a:rPr lang="en-US" sz="1250" dirty="0">
-                <a:solidFill>
-                  <a:srgbClr val="24282E"/>
-                </a:solidFill>
-                <a:latin typeface="Calibri" pitchFamily="34" charset="0"/>
-                <a:ea typeface="Calibri" pitchFamily="34" charset="-122"/>
-                <a:cs typeface="Calibri" pitchFamily="34" charset="-120"/>
-              </a:rPr>
-              <a:t>Put .obj and .mtl in one archive and upload -- anyone can turn the model in a browser.</a:t>
-            </a:r>
-            <a:endParaRPr lang="en-US" sz="1250" dirty="0"/>
-          </a:p>
-        </p:txBody>
-      </p:sp>
-      <p:sp>
-        <p:nvSpPr>
-          <p:cNvPr id="10" name="Shape 8"/>
-          <p:cNvSpPr/>
-          <p:nvPr/>
-        </p:nvSpPr>
-        <p:spPr>
-          <a:xfrm>
-            <a:off x="4690872" y="3154680"/>
-            <a:ext cx="3886200" cy="1234440"/>
-          </a:xfrm>
-          <a:prstGeom prst="roundRect">
-            <a:avLst>
-              <a:gd name="adj" fmla="val 3704"/>
-            </a:avLst>
-          </a:prstGeom>
-          <a:solidFill>
-            <a:srgbClr val="F6EFE8"/>
-          </a:solidFill>
-          <a:ln/>
-        </p:spPr>
-      </p:sp>
-      <p:sp>
-        <p:nvSpPr>
-          <p:cNvPr id="11" name="Text 9"/>
-          <p:cNvSpPr txBox="1"/>
-          <p:nvPr/>
-        </p:nvSpPr>
-        <p:spPr>
-          <a:xfrm>
-            <a:off x="4892040" y="3300984"/>
-            <a:ext cx="3483864" cy="292608"/>
-          </a:xfrm>
-          <a:prstGeom prst="rect">
-            <a:avLst/>
-          </a:prstGeom>
-          <a:noFill/>
-          <a:ln/>
-        </p:spPr>
-        <p:txBody>
-          <a:bodyPr wrap="square" lIns="0" tIns="0" rIns="0" bIns="0" rtlCol="0" anchor="ctr"/>
-          <a:lstStyle/>
-          <a:p>
-            <a:pPr indent="0" marL="0">
-              <a:buNone/>
-            </a:pPr>
-            <a:r>
-              <a:rPr lang="en-US" sz="1500" b="1" dirty="0">
-                <a:solidFill>
-                  <a:srgbClr val="8A4B1E"/>
-                </a:solidFill>
-                <a:latin typeface="Calibri" pitchFamily="34" charset="0"/>
-                <a:ea typeface="Calibri" pitchFamily="34" charset="-122"/>
-                <a:cs typeface="Calibri" pitchFamily="34" charset="-120"/>
-              </a:rPr>
-              <a:t>3D printing</a:t>
-            </a:r>
-            <a:endParaRPr lang="en-US" sz="1500" dirty="0"/>
-          </a:p>
-        </p:txBody>
-      </p:sp>
-      <p:sp>
-        <p:nvSpPr>
-          <p:cNvPr id="12" name="Text 10"/>
-          <p:cNvSpPr txBox="1"/>
-          <p:nvPr/>
-        </p:nvSpPr>
-        <p:spPr>
-          <a:xfrm>
-            <a:off x="4892040" y="3630168"/>
-            <a:ext cx="3483864" cy="612648"/>
-          </a:xfrm>
-          <a:prstGeom prst="rect">
-            <a:avLst/>
-          </a:prstGeom>
-          <a:noFill/>
-          <a:ln/>
-        </p:spPr>
-        <p:txBody>
-          <a:bodyPr wrap="square" lIns="0" tIns="0" rIns="0" bIns="0" rtlCol="0" anchor="t"/>
-          <a:lstStyle/>
-          <a:p>
-            <a:pPr indent="0" marL="0">
-              <a:lnSpc>
-                <a:spcPts val="1600"/>
-              </a:lnSpc>
-              <a:buNone/>
-            </a:pPr>
-            <a:r>
-              <a:rPr lang="en-US" sz="1250" dirty="0">
-                <a:solidFill>
-                  <a:srgbClr val="24282E"/>
-                </a:solidFill>
-                <a:latin typeface="Calibri" pitchFamily="34" charset="0"/>
-                <a:ea typeface="Calibri" pitchFamily="34" charset="-122"/>
-                <a:cs typeface="Calibri" pitchFamily="34" charset="-120"/>
-              </a:rPr>
-              <a:t>clean(..., normals=True), then save("m.stl"). The surface must be closed.</a:t>
-            </a:r>
-            <a:endParaRPr lang="en-US" sz="1250" dirty="0"/>
-          </a:p>
-        </p:txBody>
-      </p:sp>
-      <p:sp>
-        <p:nvSpPr>
-          <p:cNvPr id="13" name="Shape 11"/>
-          <p:cNvSpPr/>
-          <p:nvPr/>
-        </p:nvSpPr>
-        <p:spPr>
-          <a:xfrm>
-            <a:off x="566928" y="4626864"/>
-            <a:ext cx="3886200" cy="1234440"/>
-          </a:xfrm>
-          <a:prstGeom prst="roundRect">
-            <a:avLst>
-              <a:gd name="adj" fmla="val 3704"/>
-            </a:avLst>
-          </a:prstGeom>
-          <a:solidFill>
-            <a:srgbClr val="F6EFE8"/>
-          </a:solidFill>
-          <a:ln/>
-        </p:spPr>
-      </p:sp>
-      <p:sp>
-        <p:nvSpPr>
-          <p:cNvPr id="14" name="Text 12"/>
-          <p:cNvSpPr txBox="1"/>
-          <p:nvPr/>
-        </p:nvSpPr>
-        <p:spPr>
-          <a:xfrm>
-            <a:off x="768096" y="4773168"/>
-            <a:ext cx="3483864" cy="292608"/>
-          </a:xfrm>
-          <a:prstGeom prst="rect">
-            <a:avLst/>
-          </a:prstGeom>
-          <a:noFill/>
-          <a:ln/>
-        </p:spPr>
-        <p:txBody>
-          <a:bodyPr wrap="square" lIns="0" tIns="0" rIns="0" bIns="0" rtlCol="0" anchor="ctr"/>
-          <a:lstStyle/>
-          <a:p>
-            <a:pPr indent="0" marL="0">
-              <a:buNone/>
-            </a:pPr>
-            <a:r>
-              <a:rPr lang="en-US" sz="1500" b="1" dirty="0">
-                <a:solidFill>
-                  <a:srgbClr val="8A4B1E"/>
-                </a:solidFill>
-                <a:latin typeface="Calibri" pitchFamily="34" charset="0"/>
-                <a:ea typeface="Calibri" pitchFamily="34" charset="-122"/>
-                <a:cs typeface="Calibri" pitchFamily="34" charset="-120"/>
-              </a:rPr>
-              <a:t>Preview without MeshLab</a:t>
-            </a:r>
-            <a:endParaRPr lang="en-US" sz="1500" dirty="0"/>
-          </a:p>
-        </p:txBody>
-      </p:sp>
-      <p:sp>
-        <p:nvSpPr>
-          <p:cNvPr id="15" name="Text 13"/>
-          <p:cNvSpPr txBox="1"/>
-          <p:nvPr/>
-        </p:nvSpPr>
-        <p:spPr>
-          <a:xfrm>
-            <a:off x="768096" y="5102352"/>
-            <a:ext cx="3483864" cy="612648"/>
-          </a:xfrm>
-          <a:prstGeom prst="rect">
-            <a:avLst/>
-          </a:prstGeom>
-          <a:noFill/>
-          <a:ln/>
-        </p:spPr>
-        <p:txBody>
-          <a:bodyPr wrap="square" lIns="0" tIns="0" rIns="0" bIns="0" rtlCol="0" anchor="t"/>
-          <a:lstStyle/>
-          <a:p>
-            <a:pPr indent="0" marL="0">
-              <a:lnSpc>
-                <a:spcPts val="1600"/>
-              </a:lnSpc>
-              <a:buNone/>
-            </a:pPr>
-            <a:r>
-              <a:rPr lang="en-US" sz="1250" dirty="0">
-                <a:solidFill>
-                  <a:srgbClr val="24282E"/>
-                </a:solidFill>
-                <a:latin typeface="Calibri" pitchFamily="34" charset="0"/>
-                <a:ea typeface="Calibri" pitchFamily="34" charset="-122"/>
-                <a:cs typeface="Calibri" pitchFamily="34" charset="-120"/>
-              </a:rPr>
-              <a:t>python3 tools/preview.py model.off writes a PNG. No libraries either.</a:t>
-            </a:r>
-            <a:endParaRPr lang="en-US" sz="1250" dirty="0"/>
-          </a:p>
-        </p:txBody>
-      </p:sp>
-      <p:sp>
-        <p:nvSpPr>
-          <p:cNvPr id="16" name="Shape 14"/>
-          <p:cNvSpPr/>
-          <p:nvPr/>
-        </p:nvSpPr>
-        <p:spPr>
-          <a:xfrm>
-            <a:off x="4690872" y="4626864"/>
-            <a:ext cx="3886200" cy="1234440"/>
-          </a:xfrm>
-          <a:prstGeom prst="roundRect">
-            <a:avLst>
-              <a:gd name="adj" fmla="val 3704"/>
-            </a:avLst>
-          </a:prstGeom>
-          <a:solidFill>
-            <a:srgbClr val="F6EFE8"/>
-          </a:solidFill>
-          <a:ln/>
-        </p:spPr>
-      </p:sp>
-      <p:sp>
-        <p:nvSpPr>
-          <p:cNvPr id="17" name="Text 15"/>
-          <p:cNvSpPr txBox="1"/>
-          <p:nvPr/>
-        </p:nvSpPr>
-        <p:spPr>
-          <a:xfrm>
-            <a:off x="4892040" y="4773168"/>
-            <a:ext cx="3483864" cy="292608"/>
-          </a:xfrm>
-          <a:prstGeom prst="rect">
-            <a:avLst/>
-          </a:prstGeom>
-          <a:noFill/>
-          <a:ln/>
-        </p:spPr>
-        <p:txBody>
-          <a:bodyPr wrap="square" lIns="0" tIns="0" rIns="0" bIns="0" rtlCol="0" anchor="ctr"/>
-          <a:lstStyle/>
-          <a:p>
-            <a:pPr indent="0" marL="0">
-              <a:buNone/>
-            </a:pPr>
-            <a:r>
-              <a:rPr lang="en-US" sz="1500" b="1" dirty="0">
-                <a:solidFill>
-                  <a:srgbClr val="8A4B1E"/>
-                </a:solidFill>
-                <a:latin typeface="Calibri" pitchFamily="34" charset="0"/>
-                <a:ea typeface="Calibri" pitchFamily="34" charset="-122"/>
-                <a:cs typeface="Calibri" pitchFamily="34" charset="-120"/>
-              </a:rPr>
-              <a:t>Loading back</a:t>
-            </a:r>
-            <a:endParaRPr lang="en-US" sz="1500" dirty="0"/>
-          </a:p>
-        </p:txBody>
-      </p:sp>
-      <p:sp>
-        <p:nvSpPr>
-          <p:cNvPr id="18" name="Text 16"/>
-          <p:cNvSpPr txBox="1"/>
-          <p:nvPr/>
-        </p:nvSpPr>
-        <p:spPr>
-          <a:xfrm>
-            <a:off x="4892040" y="5102352"/>
-            <a:ext cx="3483864" cy="612648"/>
-          </a:xfrm>
-          <a:prstGeom prst="rect">
-            <a:avLst/>
-          </a:prstGeom>
-          <a:noFill/>
-          <a:ln/>
-        </p:spPr>
-        <p:txBody>
-          <a:bodyPr wrap="square" lIns="0" tIns="0" rIns="0" bIns="0" rtlCol="0" anchor="t"/>
-          <a:lstStyle/>
-          <a:p>
-            <a:pPr indent="0" marL="0">
-              <a:lnSpc>
-                <a:spcPts val="1600"/>
-              </a:lnSpc>
-              <a:buNone/>
-            </a:pPr>
-            <a:r>
-              <a:rPr lang="en-US" sz="1250" dirty="0">
-                <a:solidFill>
-                  <a:srgbClr val="24282E"/>
-                </a:solidFill>
-                <a:latin typeface="Calibri" pitchFamily="34" charset="0"/>
-                <a:ea typeface="Calibri" pitchFamily="34" charset="-122"/>
-                <a:cs typeface="Calibri" pitchFamily="34" charset="-120"/>
-              </a:rPr>
-              <a:t>load("letter.off") returns a mesh you can move and paint.</a:t>
-            </a:r>
-            <a:endParaRPr lang="en-US" sz="1250" dirty="0"/>
-          </a:p>
-        </p:txBody>
-      </p:sp>
-      <p:sp>
-        <p:nvSpPr>
-          <p:cNvPr id="19" name="Text 17"/>
-          <p:cNvSpPr txBox="1"/>
-          <p:nvPr/>
-        </p:nvSpPr>
-        <p:spPr>
-          <a:xfrm>
-            <a:off x="5303520" y="1691640"/>
-            <a:ext cx="3291840" cy="1097280"/>
-          </a:xfrm>
-          <a:prstGeom prst="rect">
-            <a:avLst/>
-          </a:prstGeom>
-          <a:noFill/>
-          <a:ln/>
-        </p:spPr>
-        <p:txBody>
-          <a:bodyPr wrap="square" lIns="0" tIns="0" rIns="0" bIns="0" rtlCol="0" anchor="t"/>
-          <a:lstStyle/>
-          <a:p>
-            <a:pPr indent="0" marL="0">
-              <a:buNone/>
-            </a:pPr>
-            <a:r>
-              <a:rPr lang="en-US" sz="1700" dirty="0">
-                <a:solidFill>
-                  <a:srgbClr val="8A4B1E"/>
-                </a:solidFill>
-                <a:latin typeface="Cambria" pitchFamily="34" charset="0"/>
-                <a:ea typeface="Cambria" pitchFamily="34" charset="-122"/>
-                <a:cs typeface="Cambria" pitchFamily="34" charset="-120"/>
-              </a:rPr>
-              <a:t>The MeshLab conversion step is gone -- add.py writes OBJ and MTL itself.</a:t>
-            </a:r>
-            <a:endParaRPr lang="en-US" sz="1700" dirty="0"/>
+              <a:t>out.close()                      # writes castle.mtl</a:t>
+            </a:r>
+            <a:endParaRPr lang="en-US" sz="1100" dirty="0"/>
           </a:p>
         </p:txBody>
       </p:sp>
@@ -20185,7 +20070,7 @@
                 <a:ea typeface="Calibri" pitchFamily="34" charset="-122"/>
                 <a:cs typeface="Calibri" pitchFamily="34" charset="-120"/>
               </a:rPr>
-              <a:t>GALLERY</a:t>
+              <a:t>FILES</a:t>
             </a:r>
             <a:endParaRPr lang="en-US" sz="1100" dirty="0"/>
           </a:p>
@@ -20224,7 +20109,7 @@
                 <a:ea typeface="Cambria" pitchFamily="34" charset="-122"/>
                 <a:cs typeface="Cambria" pitchFamily="34" charset="-120"/>
               </a:rPr>
-              <a:t>Complete models</a:t>
+              <a:t>Saving and sharing a model</a:t>
             </a:r>
             <a:endParaRPr lang="en-US" sz="3000" dirty="0"/>
           </a:p>
@@ -20277,16 +20162,16 @@
         </p:nvSpPr>
         <p:spPr>
           <a:xfrm>
-            <a:off x="566928" y="1417320"/>
-            <a:ext cx="3931920" cy="2377440"/>
+            <a:off x="566928" y="1463040"/>
+            <a:ext cx="4572000" cy="1508760"/>
           </a:xfrm>
           <a:prstGeom prst="roundRect">
             <a:avLst>
-              <a:gd name="adj" fmla="val 2308"/>
+              <a:gd name="adj" fmla="val 3636"/>
             </a:avLst>
           </a:prstGeom>
           <a:solidFill>
-            <a:srgbClr val="FAFAFA"/>
+            <a:srgbClr val="F7F7F8"/>
           </a:solidFill>
           <a:ln w="9525">
             <a:solidFill>
@@ -20296,39 +20181,16 @@
           </a:ln>
         </p:spPr>
       </p:sp>
-      <p:pic>
-        <p:nvPicPr>
-          <p:cNvPr id="6" name="Image 0" descr="/home/claude/add3d/docs/images/temple.png">    </p:cNvPr>
-          <p:cNvPicPr>
-            <a:picLocks noChangeAspect="1"/>
-          </p:cNvPicPr>
-          <p:nvPr/>
-        </p:nvPicPr>
-        <p:blipFill>
-          <a:blip r:embed="rId1"/>
-          <a:srcRect l="0" r="0" t="0" b="0"/>
-          <a:stretch/>
-        </p:blipFill>
-        <p:spPr>
-          <a:xfrm>
-            <a:off x="621792" y="1472184"/>
-            <a:ext cx="3822192" cy="2267712"/>
-          </a:xfrm>
-          <a:prstGeom prst="rect">
-            <a:avLst/>
-          </a:prstGeom>
-        </p:spPr>
-      </p:pic>
-      <p:sp>
-        <p:nvSpPr>
-          <p:cNvPr id="7" name="Text 4"/>
-          <p:cNvSpPr txBox="1"/>
-          <p:nvPr/>
-        </p:nvSpPr>
-        <p:spPr>
-          <a:xfrm>
-            <a:off x="566928" y="3858768"/>
-            <a:ext cx="3931920" cy="457200"/>
+      <p:sp>
+        <p:nvSpPr>
+          <p:cNvPr id="6" name="Text 4"/>
+          <p:cNvSpPr txBox="1"/>
+          <p:nvPr/>
+        </p:nvSpPr>
+        <p:spPr>
+          <a:xfrm>
+            <a:off x="713232" y="1591056"/>
+            <a:ext cx="4279392" cy="1252728"/>
           </a:xfrm>
           <a:prstGeom prst="rect">
             <a:avLst/>
@@ -20340,84 +20202,158 @@
           <a:bodyPr wrap="square" lIns="0" tIns="0" rIns="0" bIns="0" rtlCol="0" anchor="t"/>
           <a:lstStyle/>
           <a:p>
-            <a:pPr algn="ctr" indent="0" marL="0">
-              <a:buNone/>
-            </a:pPr>
-            <a:r>
-              <a:rPr lang="en-US" sz="1100" dirty="0">
-                <a:solidFill>
-                  <a:srgbClr val="6B7280"/>
-                </a:solidFill>
-                <a:latin typeface="Calibri" pitchFamily="34" charset="0"/>
-                <a:ea typeface="Calibri" pitchFamily="34" charset="-122"/>
-                <a:cs typeface="Calibri" pitchFamily="34" charset="-120"/>
-              </a:rPr>
-              <a:t>25_temple.py -- columns on a circle, a chequered floor</a:t>
-            </a:r>
-            <a:endParaRPr lang="en-US" sz="1100" dirty="0"/>
-          </a:p>
-        </p:txBody>
-      </p:sp>
-      <p:sp>
-        <p:nvSpPr>
-          <p:cNvPr id="8" name="Shape 5"/>
+            <a:pPr indent="0" marL="0">
+              <a:lnSpc>
+                <a:spcPts val="1600"/>
+              </a:lnSpc>
+              <a:buNone/>
+            </a:pPr>
+            <a:r>
+              <a:rPr lang="en-US" sz="1250" dirty="0">
+                <a:solidFill>
+                  <a:srgbClr val="2C3138"/>
+                </a:solidFill>
+                <a:latin typeface="Consolas" pitchFamily="34" charset="0"/>
+                <a:ea typeface="Consolas" pitchFamily="34" charset="-122"/>
+                <a:cs typeface="Consolas" pitchFamily="34" charset="-120"/>
+              </a:rPr>
+              <a:t>add.save("model.off")   # the course format</a:t>
+            </a:r>
+            <a:endParaRPr lang="en-US" sz="1250" dirty="0"/>
+          </a:p>
+          <a:p>
+            <a:pPr indent="0" marL="0">
+              <a:lnSpc>
+                <a:spcPts val="1600"/>
+              </a:lnSpc>
+              <a:buNone/>
+            </a:pPr>
+            <a:r>
+              <a:rPr lang="en-US" sz="1250" dirty="0">
+                <a:solidFill>
+                  <a:srgbClr val="2C3138"/>
+                </a:solidFill>
+                <a:latin typeface="Consolas" pitchFamily="34" charset="0"/>
+                <a:ea typeface="Consolas" pitchFamily="34" charset="-122"/>
+                <a:cs typeface="Consolas" pitchFamily="34" charset="-120"/>
+              </a:rPr>
+              <a:t>add.save("model.obj")   # + .mtl for colours</a:t>
+            </a:r>
+            <a:endParaRPr lang="en-US" sz="1250" dirty="0"/>
+          </a:p>
+          <a:p>
+            <a:pPr indent="0" marL="0">
+              <a:lnSpc>
+                <a:spcPts val="1600"/>
+              </a:lnSpc>
+              <a:buNone/>
+            </a:pPr>
+            <a:r>
+              <a:rPr lang="en-US" sz="1250" dirty="0">
+                <a:solidFill>
+                  <a:srgbClr val="2C3138"/>
+                </a:solidFill>
+                <a:latin typeface="Consolas" pitchFamily="34" charset="0"/>
+                <a:ea typeface="Consolas" pitchFamily="34" charset="-122"/>
+                <a:cs typeface="Consolas" pitchFamily="34" charset="-120"/>
+              </a:rPr>
+              <a:t>add.save("model.ply")</a:t>
+            </a:r>
+            <a:endParaRPr lang="en-US" sz="1250" dirty="0"/>
+          </a:p>
+          <a:p>
+            <a:pPr indent="0" marL="0">
+              <a:lnSpc>
+                <a:spcPts val="1600"/>
+              </a:lnSpc>
+              <a:buNone/>
+            </a:pPr>
+            <a:r>
+              <a:rPr lang="en-US" sz="1250" dirty="0">
+                <a:solidFill>
+                  <a:srgbClr val="2C3138"/>
+                </a:solidFill>
+                <a:latin typeface="Consolas" pitchFamily="34" charset="0"/>
+                <a:ea typeface="Consolas" pitchFamily="34" charset="-122"/>
+                <a:cs typeface="Consolas" pitchFamily="34" charset="-120"/>
+              </a:rPr>
+              <a:t>add.save("model.stl")   # for 3D printing</a:t>
+            </a:r>
+            <a:endParaRPr lang="en-US" sz="1250" dirty="0"/>
+          </a:p>
+        </p:txBody>
+      </p:sp>
+      <p:sp>
+        <p:nvSpPr>
+          <p:cNvPr id="7" name="Shape 5"/>
           <p:cNvSpPr/>
           <p:nvPr/>
         </p:nvSpPr>
         <p:spPr>
           <a:xfrm>
-            <a:off x="4663440" y="1417320"/>
-            <a:ext cx="3913632" cy="2377440"/>
+            <a:off x="566928" y="3154680"/>
+            <a:ext cx="3886200" cy="1234440"/>
           </a:xfrm>
           <a:prstGeom prst="roundRect">
             <a:avLst>
-              <a:gd name="adj" fmla="val 2308"/>
+              <a:gd name="adj" fmla="val 3704"/>
             </a:avLst>
           </a:prstGeom>
           <a:solidFill>
-            <a:srgbClr val="FAFAFA"/>
+            <a:srgbClr val="F6EFE8"/>
           </a:solidFill>
-          <a:ln w="9525">
-            <a:solidFill>
-              <a:srgbClr val="E3E1DD"/>
-            </a:solidFill>
-            <a:prstDash val="solid"/>
-          </a:ln>
-        </p:spPr>
-      </p:sp>
-      <p:pic>
-        <p:nvPicPr>
-          <p:cNvPr id="9" name="Image 1" descr="/home/claude/add3d/docs/images/bridge.png">    </p:cNvPr>
-          <p:cNvPicPr>
-            <a:picLocks noChangeAspect="1"/>
-          </p:cNvPicPr>
-          <p:nvPr/>
-        </p:nvPicPr>
-        <p:blipFill>
-          <a:blip r:embed="rId2"/>
-          <a:srcRect l="0" r="0" t="0" b="0"/>
-          <a:stretch/>
-        </p:blipFill>
-        <p:spPr>
-          <a:xfrm>
-            <a:off x="4718304" y="1472184"/>
-            <a:ext cx="3803904" cy="2267712"/>
-          </a:xfrm>
-          <a:prstGeom prst="rect">
-            <a:avLst/>
-          </a:prstGeom>
-        </p:spPr>
-      </p:pic>
-      <p:sp>
-        <p:nvSpPr>
-          <p:cNvPr id="10" name="Text 6"/>
-          <p:cNvSpPr txBox="1"/>
-          <p:nvPr/>
-        </p:nvSpPr>
-        <p:spPr>
-          <a:xfrm>
-            <a:off x="4663440" y="3858768"/>
-            <a:ext cx="3913632" cy="457200"/>
+          <a:ln/>
+        </p:spPr>
+      </p:sp>
+      <p:sp>
+        <p:nvSpPr>
+          <p:cNvPr id="8" name="Text 6"/>
+          <p:cNvSpPr txBox="1"/>
+          <p:nvPr/>
+        </p:nvSpPr>
+        <p:spPr>
+          <a:xfrm>
+            <a:off x="768096" y="3300984"/>
+            <a:ext cx="3483864" cy="292608"/>
+          </a:xfrm>
+          <a:prstGeom prst="rect">
+            <a:avLst/>
+          </a:prstGeom>
+          <a:noFill/>
+          <a:ln/>
+        </p:spPr>
+        <p:txBody>
+          <a:bodyPr wrap="square" lIns="0" tIns="0" rIns="0" bIns="0" rtlCol="0" anchor="ctr"/>
+          <a:lstStyle/>
+          <a:p>
+            <a:pPr indent="0" marL="0">
+              <a:buNone/>
+            </a:pPr>
+            <a:r>
+              <a:rPr lang="en-US" sz="1500" b="1" dirty="0">
+                <a:solidFill>
+                  <a:srgbClr val="8A4B1E"/>
+                </a:solidFill>
+                <a:latin typeface="Calibri" pitchFamily="34" charset="0"/>
+                <a:ea typeface="Calibri" pitchFamily="34" charset="-122"/>
+                <a:cs typeface="Calibri" pitchFamily="34" charset="-120"/>
+              </a:rPr>
+              <a:t>Sketchfab</a:t>
+            </a:r>
+            <a:endParaRPr lang="en-US" sz="1500" dirty="0"/>
+          </a:p>
+        </p:txBody>
+      </p:sp>
+      <p:sp>
+        <p:nvSpPr>
+          <p:cNvPr id="9" name="Text 7"/>
+          <p:cNvSpPr txBox="1"/>
+          <p:nvPr/>
+        </p:nvSpPr>
+        <p:spPr>
+          <a:xfrm>
+            <a:off x="768096" y="3630168"/>
+            <a:ext cx="3483864" cy="612648"/>
           </a:xfrm>
           <a:prstGeom prst="rect">
             <a:avLst/>
@@ -20429,124 +20365,375 @@
           <a:bodyPr wrap="square" lIns="0" tIns="0" rIns="0" bIns="0" rtlCol="0" anchor="t"/>
           <a:lstStyle/>
           <a:p>
-            <a:pPr algn="ctr" indent="0" marL="0">
-              <a:buNone/>
-            </a:pPr>
-            <a:r>
-              <a:rPr lang="en-US" sz="1100" dirty="0">
-                <a:solidFill>
-                  <a:srgbClr val="6B7280"/>
-                </a:solidFill>
-                <a:latin typeface="Calibri" pitchFamily="34" charset="0"/>
-                <a:ea typeface="Calibri" pitchFamily="34" charset="-122"/>
-                <a:cs typeface="Calibri" pitchFamily="34" charset="-120"/>
-              </a:rPr>
-              <a:t>29_bridge.py -- beams, cables, hangers, cars along the road</a:t>
-            </a:r>
-            <a:endParaRPr lang="en-US" sz="1100" dirty="0"/>
-          </a:p>
-        </p:txBody>
-      </p:sp>
-      <p:sp>
-        <p:nvSpPr>
-          <p:cNvPr id="11" name="Shape 7"/>
+            <a:pPr indent="0" marL="0">
+              <a:lnSpc>
+                <a:spcPts val="1600"/>
+              </a:lnSpc>
+              <a:buNone/>
+            </a:pPr>
+            <a:r>
+              <a:rPr lang="en-US" sz="1250" dirty="0">
+                <a:solidFill>
+                  <a:srgbClr val="24282E"/>
+                </a:solidFill>
+                <a:latin typeface="Calibri" pitchFamily="34" charset="0"/>
+                <a:ea typeface="Calibri" pitchFamily="34" charset="-122"/>
+                <a:cs typeface="Calibri" pitchFamily="34" charset="-120"/>
+              </a:rPr>
+              <a:t>Put .obj and .mtl in one archive and upload -- anyone can turn the model in a browser.</a:t>
+            </a:r>
+            <a:endParaRPr lang="en-US" sz="1250" dirty="0"/>
+          </a:p>
+        </p:txBody>
+      </p:sp>
+      <p:sp>
+        <p:nvSpPr>
+          <p:cNvPr id="10" name="Shape 8"/>
           <p:cNvSpPr/>
           <p:nvPr/>
         </p:nvSpPr>
         <p:spPr>
           <a:xfrm>
-            <a:off x="566928" y="4160520"/>
-            <a:ext cx="3931920" cy="1920240"/>
+            <a:off x="4690872" y="3154680"/>
+            <a:ext cx="3886200" cy="1234440"/>
           </a:xfrm>
           <a:prstGeom prst="roundRect">
             <a:avLst>
-              <a:gd name="adj" fmla="val 2857"/>
+              <a:gd name="adj" fmla="val 3704"/>
             </a:avLst>
           </a:prstGeom>
           <a:solidFill>
-            <a:srgbClr val="FAFAFA"/>
+            <a:srgbClr val="F6EFE8"/>
           </a:solidFill>
-          <a:ln w="9525">
-            <a:solidFill>
-              <a:srgbClr val="E3E1DD"/>
-            </a:solidFill>
-            <a:prstDash val="solid"/>
-          </a:ln>
-        </p:spPr>
-      </p:sp>
-      <p:pic>
-        <p:nvPicPr>
-          <p:cNvPr id="12" name="Image 2" descr="/home/claude/add3d/docs/images/voxel_island.png">    </p:cNvPr>
-          <p:cNvPicPr>
-            <a:picLocks noChangeAspect="1"/>
-          </p:cNvPicPr>
-          <p:nvPr/>
-        </p:nvPicPr>
-        <p:blipFill>
-          <a:blip r:embed="rId3"/>
-          <a:srcRect l="0" r="0" t="0" b="0"/>
-          <a:stretch/>
-        </p:blipFill>
-        <p:spPr>
-          <a:xfrm>
-            <a:off x="621792" y="4215384"/>
-            <a:ext cx="3822192" cy="1810512"/>
-          </a:xfrm>
-          <a:prstGeom prst="rect">
-            <a:avLst/>
-          </a:prstGeom>
-        </p:spPr>
-      </p:pic>
-      <p:sp>
-        <p:nvSpPr>
-          <p:cNvPr id="13" name="Shape 8"/>
+          <a:ln/>
+        </p:spPr>
+      </p:sp>
+      <p:sp>
+        <p:nvSpPr>
+          <p:cNvPr id="11" name="Text 9"/>
+          <p:cNvSpPr txBox="1"/>
+          <p:nvPr/>
+        </p:nvSpPr>
+        <p:spPr>
+          <a:xfrm>
+            <a:off x="4892040" y="3300984"/>
+            <a:ext cx="3483864" cy="292608"/>
+          </a:xfrm>
+          <a:prstGeom prst="rect">
+            <a:avLst/>
+          </a:prstGeom>
+          <a:noFill/>
+          <a:ln/>
+        </p:spPr>
+        <p:txBody>
+          <a:bodyPr wrap="square" lIns="0" tIns="0" rIns="0" bIns="0" rtlCol="0" anchor="ctr"/>
+          <a:lstStyle/>
+          <a:p>
+            <a:pPr indent="0" marL="0">
+              <a:buNone/>
+            </a:pPr>
+            <a:r>
+              <a:rPr lang="en-US" sz="1500" b="1" dirty="0">
+                <a:solidFill>
+                  <a:srgbClr val="8A4B1E"/>
+                </a:solidFill>
+                <a:latin typeface="Calibri" pitchFamily="34" charset="0"/>
+                <a:ea typeface="Calibri" pitchFamily="34" charset="-122"/>
+                <a:cs typeface="Calibri" pitchFamily="34" charset="-120"/>
+              </a:rPr>
+              <a:t>3D printing</a:t>
+            </a:r>
+            <a:endParaRPr lang="en-US" sz="1500" dirty="0"/>
+          </a:p>
+        </p:txBody>
+      </p:sp>
+      <p:sp>
+        <p:nvSpPr>
+          <p:cNvPr id="12" name="Text 10"/>
+          <p:cNvSpPr txBox="1"/>
+          <p:nvPr/>
+        </p:nvSpPr>
+        <p:spPr>
+          <a:xfrm>
+            <a:off x="4892040" y="3630168"/>
+            <a:ext cx="3483864" cy="612648"/>
+          </a:xfrm>
+          <a:prstGeom prst="rect">
+            <a:avLst/>
+          </a:prstGeom>
+          <a:noFill/>
+          <a:ln/>
+        </p:spPr>
+        <p:txBody>
+          <a:bodyPr wrap="square" lIns="0" tIns="0" rIns="0" bIns="0" rtlCol="0" anchor="t"/>
+          <a:lstStyle/>
+          <a:p>
+            <a:pPr indent="0" marL="0">
+              <a:lnSpc>
+                <a:spcPts val="1600"/>
+              </a:lnSpc>
+              <a:buNone/>
+            </a:pPr>
+            <a:r>
+              <a:rPr lang="en-US" sz="1250" dirty="0">
+                <a:solidFill>
+                  <a:srgbClr val="24282E"/>
+                </a:solidFill>
+                <a:latin typeface="Calibri" pitchFamily="34" charset="0"/>
+                <a:ea typeface="Calibri" pitchFamily="34" charset="-122"/>
+                <a:cs typeface="Calibri" pitchFamily="34" charset="-120"/>
+              </a:rPr>
+              <a:t>clean(..., normals=True), then save("m.stl"). The surface must be closed.</a:t>
+            </a:r>
+            <a:endParaRPr lang="en-US" sz="1250" dirty="0"/>
+          </a:p>
+        </p:txBody>
+      </p:sp>
+      <p:sp>
+        <p:nvSpPr>
+          <p:cNvPr id="13" name="Shape 11"/>
           <p:cNvSpPr/>
           <p:nvPr/>
         </p:nvSpPr>
         <p:spPr>
           <a:xfrm>
-            <a:off x="4663440" y="4160520"/>
-            <a:ext cx="3913632" cy="1920240"/>
+            <a:off x="566928" y="4626864"/>
+            <a:ext cx="3886200" cy="1234440"/>
           </a:xfrm>
           <a:prstGeom prst="roundRect">
             <a:avLst>
-              <a:gd name="adj" fmla="val 2857"/>
+              <a:gd name="adj" fmla="val 3704"/>
             </a:avLst>
           </a:prstGeom>
           <a:solidFill>
-            <a:srgbClr val="FAFAFA"/>
+            <a:srgbClr val="F6EFE8"/>
           </a:solidFill>
-          <a:ln w="9525">
-            <a:solidFill>
-              <a:srgbClr val="E3E1DD"/>
-            </a:solidFill>
-            <a:prstDash val="solid"/>
-          </a:ln>
-        </p:spPr>
-      </p:sp>
-      <p:pic>
-        <p:nvPicPr>
-          <p:cNvPr id="14" name="Image 3" descr="/home/claude/add3d/docs/images/vector_fields.png">    </p:cNvPr>
-          <p:cNvPicPr>
-            <a:picLocks noChangeAspect="1"/>
-          </p:cNvPicPr>
-          <p:nvPr/>
-        </p:nvPicPr>
-        <p:blipFill>
-          <a:blip r:embed="rId4"/>
-          <a:srcRect l="0" r="0" t="0" b="0"/>
-          <a:stretch/>
-        </p:blipFill>
-        <p:spPr>
-          <a:xfrm>
-            <a:off x="4718304" y="4215384"/>
-            <a:ext cx="3803904" cy="1810512"/>
-          </a:xfrm>
-          <a:prstGeom prst="rect">
-            <a:avLst/>
-          </a:prstGeom>
-        </p:spPr>
-      </p:pic>
+          <a:ln/>
+        </p:spPr>
+      </p:sp>
+      <p:sp>
+        <p:nvSpPr>
+          <p:cNvPr id="14" name="Text 12"/>
+          <p:cNvSpPr txBox="1"/>
+          <p:nvPr/>
+        </p:nvSpPr>
+        <p:spPr>
+          <a:xfrm>
+            <a:off x="768096" y="4773168"/>
+            <a:ext cx="3483864" cy="292608"/>
+          </a:xfrm>
+          <a:prstGeom prst="rect">
+            <a:avLst/>
+          </a:prstGeom>
+          <a:noFill/>
+          <a:ln/>
+        </p:spPr>
+        <p:txBody>
+          <a:bodyPr wrap="square" lIns="0" tIns="0" rIns="0" bIns="0" rtlCol="0" anchor="ctr"/>
+          <a:lstStyle/>
+          <a:p>
+            <a:pPr indent="0" marL="0">
+              <a:buNone/>
+            </a:pPr>
+            <a:r>
+              <a:rPr lang="en-US" sz="1500" b="1" dirty="0">
+                <a:solidFill>
+                  <a:srgbClr val="8A4B1E"/>
+                </a:solidFill>
+                <a:latin typeface="Calibri" pitchFamily="34" charset="0"/>
+                <a:ea typeface="Calibri" pitchFamily="34" charset="-122"/>
+                <a:cs typeface="Calibri" pitchFamily="34" charset="-120"/>
+              </a:rPr>
+              <a:t>Preview without MeshLab</a:t>
+            </a:r>
+            <a:endParaRPr lang="en-US" sz="1500" dirty="0"/>
+          </a:p>
+        </p:txBody>
+      </p:sp>
+      <p:sp>
+        <p:nvSpPr>
+          <p:cNvPr id="15" name="Text 13"/>
+          <p:cNvSpPr txBox="1"/>
+          <p:nvPr/>
+        </p:nvSpPr>
+        <p:spPr>
+          <a:xfrm>
+            <a:off x="768096" y="5102352"/>
+            <a:ext cx="3483864" cy="612648"/>
+          </a:xfrm>
+          <a:prstGeom prst="rect">
+            <a:avLst/>
+          </a:prstGeom>
+          <a:noFill/>
+          <a:ln/>
+        </p:spPr>
+        <p:txBody>
+          <a:bodyPr wrap="square" lIns="0" tIns="0" rIns="0" bIns="0" rtlCol="0" anchor="t"/>
+          <a:lstStyle/>
+          <a:p>
+            <a:pPr indent="0" marL="0">
+              <a:lnSpc>
+                <a:spcPts val="1600"/>
+              </a:lnSpc>
+              <a:buNone/>
+            </a:pPr>
+            <a:r>
+              <a:rPr lang="en-US" sz="1250" dirty="0">
+                <a:solidFill>
+                  <a:srgbClr val="24282E"/>
+                </a:solidFill>
+                <a:latin typeface="Calibri" pitchFamily="34" charset="0"/>
+                <a:ea typeface="Calibri" pitchFamily="34" charset="-122"/>
+                <a:cs typeface="Calibri" pitchFamily="34" charset="-120"/>
+              </a:rPr>
+              <a:t>python3 tools/preview.py model.off writes a PNG. No libraries either.</a:t>
+            </a:r>
+            <a:endParaRPr lang="en-US" sz="1250" dirty="0"/>
+          </a:p>
+        </p:txBody>
+      </p:sp>
+      <p:sp>
+        <p:nvSpPr>
+          <p:cNvPr id="16" name="Shape 14"/>
+          <p:cNvSpPr/>
+          <p:nvPr/>
+        </p:nvSpPr>
+        <p:spPr>
+          <a:xfrm>
+            <a:off x="4690872" y="4626864"/>
+            <a:ext cx="3886200" cy="1234440"/>
+          </a:xfrm>
+          <a:prstGeom prst="roundRect">
+            <a:avLst>
+              <a:gd name="adj" fmla="val 3704"/>
+            </a:avLst>
+          </a:prstGeom>
+          <a:solidFill>
+            <a:srgbClr val="F6EFE8"/>
+          </a:solidFill>
+          <a:ln/>
+        </p:spPr>
+      </p:sp>
+      <p:sp>
+        <p:nvSpPr>
+          <p:cNvPr id="17" name="Text 15"/>
+          <p:cNvSpPr txBox="1"/>
+          <p:nvPr/>
+        </p:nvSpPr>
+        <p:spPr>
+          <a:xfrm>
+            <a:off x="4892040" y="4773168"/>
+            <a:ext cx="3483864" cy="292608"/>
+          </a:xfrm>
+          <a:prstGeom prst="rect">
+            <a:avLst/>
+          </a:prstGeom>
+          <a:noFill/>
+          <a:ln/>
+        </p:spPr>
+        <p:txBody>
+          <a:bodyPr wrap="square" lIns="0" tIns="0" rIns="0" bIns="0" rtlCol="0" anchor="ctr"/>
+          <a:lstStyle/>
+          <a:p>
+            <a:pPr indent="0" marL="0">
+              <a:buNone/>
+            </a:pPr>
+            <a:r>
+              <a:rPr lang="en-US" sz="1500" b="1" dirty="0">
+                <a:solidFill>
+                  <a:srgbClr val="8A4B1E"/>
+                </a:solidFill>
+                <a:latin typeface="Calibri" pitchFamily="34" charset="0"/>
+                <a:ea typeface="Calibri" pitchFamily="34" charset="-122"/>
+                <a:cs typeface="Calibri" pitchFamily="34" charset="-120"/>
+              </a:rPr>
+              <a:t>Loading back</a:t>
+            </a:r>
+            <a:endParaRPr lang="en-US" sz="1500" dirty="0"/>
+          </a:p>
+        </p:txBody>
+      </p:sp>
+      <p:sp>
+        <p:nvSpPr>
+          <p:cNvPr id="18" name="Text 16"/>
+          <p:cNvSpPr txBox="1"/>
+          <p:nvPr/>
+        </p:nvSpPr>
+        <p:spPr>
+          <a:xfrm>
+            <a:off x="4892040" y="5102352"/>
+            <a:ext cx="3483864" cy="612648"/>
+          </a:xfrm>
+          <a:prstGeom prst="rect">
+            <a:avLst/>
+          </a:prstGeom>
+          <a:noFill/>
+          <a:ln/>
+        </p:spPr>
+        <p:txBody>
+          <a:bodyPr wrap="square" lIns="0" tIns="0" rIns="0" bIns="0" rtlCol="0" anchor="t"/>
+          <a:lstStyle/>
+          <a:p>
+            <a:pPr indent="0" marL="0">
+              <a:lnSpc>
+                <a:spcPts val="1600"/>
+              </a:lnSpc>
+              <a:buNone/>
+            </a:pPr>
+            <a:r>
+              <a:rPr lang="en-US" sz="1250" dirty="0">
+                <a:solidFill>
+                  <a:srgbClr val="24282E"/>
+                </a:solidFill>
+                <a:latin typeface="Calibri" pitchFamily="34" charset="0"/>
+                <a:ea typeface="Calibri" pitchFamily="34" charset="-122"/>
+                <a:cs typeface="Calibri" pitchFamily="34" charset="-120"/>
+              </a:rPr>
+              <a:t>load("letter.off") returns a mesh you can move and paint.</a:t>
+            </a:r>
+            <a:endParaRPr lang="en-US" sz="1250" dirty="0"/>
+          </a:p>
+        </p:txBody>
+      </p:sp>
+      <p:sp>
+        <p:nvSpPr>
+          <p:cNvPr id="19" name="Text 17"/>
+          <p:cNvSpPr txBox="1"/>
+          <p:nvPr/>
+        </p:nvSpPr>
+        <p:spPr>
+          <a:xfrm>
+            <a:off x="5303520" y="1691640"/>
+            <a:ext cx="3291840" cy="1097280"/>
+          </a:xfrm>
+          <a:prstGeom prst="rect">
+            <a:avLst/>
+          </a:prstGeom>
+          <a:noFill/>
+          <a:ln/>
+        </p:spPr>
+        <p:txBody>
+          <a:bodyPr wrap="square" lIns="0" tIns="0" rIns="0" bIns="0" rtlCol="0" anchor="t"/>
+          <a:lstStyle/>
+          <a:p>
+            <a:pPr indent="0" marL="0">
+              <a:buNone/>
+            </a:pPr>
+            <a:r>
+              <a:rPr lang="en-US" sz="1700" dirty="0">
+                <a:solidFill>
+                  <a:srgbClr val="8A4B1E"/>
+                </a:solidFill>
+                <a:latin typeface="Cambria" pitchFamily="34" charset="0"/>
+                <a:ea typeface="Cambria" pitchFamily="34" charset="-122"/>
+                <a:cs typeface="Cambria" pitchFamily="34" charset="-120"/>
+              </a:rPr>
+              <a:t>The MeshLab conversion step is gone -- add.py writes OBJ and MTL itself.</a:t>
+            </a:r>
+            <a:endParaRPr lang="en-US" sz="1700" dirty="0"/>
+          </a:p>
+        </p:txBody>
+      </p:sp>
     </p:spTree>
   </p:cSld>
   <p:clrMapOvr>
@@ -20651,7 +20838,7 @@
                 <a:ea typeface="Cambria" pitchFamily="34" charset="-122"/>
                 <a:cs typeface="Cambria" pitchFamily="34" charset="-120"/>
               </a:rPr>
-              <a:t>Larger studies</a:t>
+              <a:t>Complete models</a:t>
             </a:r>
             <a:endParaRPr lang="en-US" sz="3000" dirty="0"/>
           </a:p>
@@ -20725,7 +20912,7 @@
       </p:sp>
       <p:pic>
         <p:nvPicPr>
-          <p:cNvPr id="6" name="Image 0" descr="/home/claude/add3d/docs/images/chess_set.png">    </p:cNvPr>
+          <p:cNvPr id="6" name="Image 0" descr="/home/claude/add3d/docs/images/temple.png">    </p:cNvPr>
           <p:cNvPicPr>
             <a:picLocks noChangeAspect="1"/>
           </p:cNvPicPr>
@@ -20779,7 +20966,7 @@
                 <a:ea typeface="Calibri" pitchFamily="34" charset="-122"/>
                 <a:cs typeface="Calibri" pitchFamily="34" charset="-120"/>
               </a:rPr>
-              <a:t>18_chess_set.py -- lathe, layers, booleans</a:t>
+              <a:t>25_temple.py -- columns on a circle, a chequered floor</a:t>
             </a:r>
             <a:endParaRPr lang="en-US" sz="1100" dirty="0"/>
           </a:p>
@@ -20814,7 +21001,7 @@
       </p:sp>
       <p:pic>
         <p:nvPicPr>
-          <p:cNvPr id="9" name="Image 1" descr="/home/claude/add3d/docs/images/fractals.png">    </p:cNvPr>
+          <p:cNvPr id="9" name="Image 1" descr="/home/claude/add3d/docs/images/bridge.png">    </p:cNvPr>
           <p:cNvPicPr>
             <a:picLocks noChangeAspect="1"/>
           </p:cNvPicPr>
@@ -20868,7 +21055,7 @@
                 <a:ea typeface="Calibri" pitchFamily="34" charset="-122"/>
                 <a:cs typeface="Calibri" pitchFamily="34" charset="-120"/>
               </a:rPr>
-              <a:t>17_fractals.py -- Menger sponge, Sierpinski, a tree</a:t>
+              <a:t>29_bridge.py -- beams, cables, hangers, cars along the road</a:t>
             </a:r>
             <a:endParaRPr lang="en-US" sz="1100" dirty="0"/>
           </a:p>
@@ -20903,7 +21090,7 @@
       </p:sp>
       <p:pic>
         <p:nvPicPr>
-          <p:cNvPr id="12" name="Image 2" descr="/home/claude/add3d/docs/images/city.png">    </p:cNvPr>
+          <p:cNvPr id="12" name="Image 2" descr="/home/claude/add3d/docs/images/voxel_island.png">    </p:cNvPr>
           <p:cNvPicPr>
             <a:picLocks noChangeAspect="1"/>
           </p:cNvPicPr>
@@ -20953,7 +21140,7 @@
       </p:sp>
       <p:pic>
         <p:nvPicPr>
-          <p:cNvPr id="14" name="Image 3" descr="/home/claude/add3d/docs/images/example4.png">    </p:cNvPr>
+          <p:cNvPr id="14" name="Image 3" descr="/home/claude/add3d/docs/images/vector_fields.png">    </p:cNvPr>
           <p:cNvPicPr>
             <a:picLocks noChangeAspect="1"/>
           </p:cNvPicPr>
@@ -21039,7 +21226,7 @@
                 <a:ea typeface="Calibri" pitchFamily="34" charset="-122"/>
                 <a:cs typeface="Calibri" pitchFamily="34" charset="-120"/>
               </a:rPr>
-              <a:t>COMPATIBILITY</a:t>
+              <a:t>GALLERY</a:t>
             </a:r>
             <a:endParaRPr lang="en-US" sz="1100" dirty="0"/>
           </a:p>
@@ -21078,7 +21265,7 @@
                 <a:ea typeface="Cambria" pitchFamily="34" charset="-122"/>
                 <a:cs typeface="Cambria" pitchFamily="34" charset="-120"/>
               </a:rPr>
-              <a:t>From 1.2 to 2.0</a:t>
+              <a:t>Larger studies</a:t>
             </a:r>
             <a:endParaRPr lang="en-US" sz="3000" dirty="0"/>
           </a:p>
@@ -21123,9 +21310,436 @@
           </a:p>
         </p:txBody>
       </p:sp>
+      <p:sp>
+        <p:nvSpPr>
+          <p:cNvPr id="5" name="Shape 3"/>
+          <p:cNvSpPr/>
+          <p:nvPr/>
+        </p:nvSpPr>
+        <p:spPr>
+          <a:xfrm>
+            <a:off x="566928" y="1417320"/>
+            <a:ext cx="3931920" cy="2377440"/>
+          </a:xfrm>
+          <a:prstGeom prst="roundRect">
+            <a:avLst>
+              <a:gd name="adj" fmla="val 2308"/>
+            </a:avLst>
+          </a:prstGeom>
+          <a:solidFill>
+            <a:srgbClr val="FAFAFA"/>
+          </a:solidFill>
+          <a:ln w="9525">
+            <a:solidFill>
+              <a:srgbClr val="E3E1DD"/>
+            </a:solidFill>
+            <a:prstDash val="solid"/>
+          </a:ln>
+        </p:spPr>
+      </p:sp>
+      <p:pic>
+        <p:nvPicPr>
+          <p:cNvPr id="6" name="Image 0" descr="/home/claude/add3d/docs/images/chess_set.png">    </p:cNvPr>
+          <p:cNvPicPr>
+            <a:picLocks noChangeAspect="1"/>
+          </p:cNvPicPr>
+          <p:nvPr/>
+        </p:nvPicPr>
+        <p:blipFill>
+          <a:blip r:embed="rId1"/>
+          <a:srcRect l="0" r="0" t="0" b="0"/>
+          <a:stretch/>
+        </p:blipFill>
+        <p:spPr>
+          <a:xfrm>
+            <a:off x="621792" y="1472184"/>
+            <a:ext cx="3822192" cy="2267712"/>
+          </a:xfrm>
+          <a:prstGeom prst="rect">
+            <a:avLst/>
+          </a:prstGeom>
+        </p:spPr>
+      </p:pic>
+      <p:sp>
+        <p:nvSpPr>
+          <p:cNvPr id="7" name="Text 4"/>
+          <p:cNvSpPr txBox="1"/>
+          <p:nvPr/>
+        </p:nvSpPr>
+        <p:spPr>
+          <a:xfrm>
+            <a:off x="566928" y="3858768"/>
+            <a:ext cx="3931920" cy="457200"/>
+          </a:xfrm>
+          <a:prstGeom prst="rect">
+            <a:avLst/>
+          </a:prstGeom>
+          <a:noFill/>
+          <a:ln/>
+        </p:spPr>
+        <p:txBody>
+          <a:bodyPr wrap="square" lIns="0" tIns="0" rIns="0" bIns="0" rtlCol="0" anchor="t"/>
+          <a:lstStyle/>
+          <a:p>
+            <a:pPr algn="ctr" indent="0" marL="0">
+              <a:buNone/>
+            </a:pPr>
+            <a:r>
+              <a:rPr lang="en-US" sz="1100" dirty="0">
+                <a:solidFill>
+                  <a:srgbClr val="6B7280"/>
+                </a:solidFill>
+                <a:latin typeface="Calibri" pitchFamily="34" charset="0"/>
+                <a:ea typeface="Calibri" pitchFamily="34" charset="-122"/>
+                <a:cs typeface="Calibri" pitchFamily="34" charset="-120"/>
+              </a:rPr>
+              <a:t>18_chess_set.py -- lathe, layers, booleans</a:t>
+            </a:r>
+            <a:endParaRPr lang="en-US" sz="1100" dirty="0"/>
+          </a:p>
+        </p:txBody>
+      </p:sp>
+      <p:sp>
+        <p:nvSpPr>
+          <p:cNvPr id="8" name="Shape 5"/>
+          <p:cNvSpPr/>
+          <p:nvPr/>
+        </p:nvSpPr>
+        <p:spPr>
+          <a:xfrm>
+            <a:off x="4663440" y="1417320"/>
+            <a:ext cx="3913632" cy="2377440"/>
+          </a:xfrm>
+          <a:prstGeom prst="roundRect">
+            <a:avLst>
+              <a:gd name="adj" fmla="val 2308"/>
+            </a:avLst>
+          </a:prstGeom>
+          <a:solidFill>
+            <a:srgbClr val="FAFAFA"/>
+          </a:solidFill>
+          <a:ln w="9525">
+            <a:solidFill>
+              <a:srgbClr val="E3E1DD"/>
+            </a:solidFill>
+            <a:prstDash val="solid"/>
+          </a:ln>
+        </p:spPr>
+      </p:sp>
+      <p:pic>
+        <p:nvPicPr>
+          <p:cNvPr id="9" name="Image 1" descr="/home/claude/add3d/docs/images/fractals.png">    </p:cNvPr>
+          <p:cNvPicPr>
+            <a:picLocks noChangeAspect="1"/>
+          </p:cNvPicPr>
+          <p:nvPr/>
+        </p:nvPicPr>
+        <p:blipFill>
+          <a:blip r:embed="rId2"/>
+          <a:srcRect l="0" r="0" t="0" b="0"/>
+          <a:stretch/>
+        </p:blipFill>
+        <p:spPr>
+          <a:xfrm>
+            <a:off x="4718304" y="1472184"/>
+            <a:ext cx="3803904" cy="2267712"/>
+          </a:xfrm>
+          <a:prstGeom prst="rect">
+            <a:avLst/>
+          </a:prstGeom>
+        </p:spPr>
+      </p:pic>
+      <p:sp>
+        <p:nvSpPr>
+          <p:cNvPr id="10" name="Text 6"/>
+          <p:cNvSpPr txBox="1"/>
+          <p:nvPr/>
+        </p:nvSpPr>
+        <p:spPr>
+          <a:xfrm>
+            <a:off x="4663440" y="3858768"/>
+            <a:ext cx="3913632" cy="457200"/>
+          </a:xfrm>
+          <a:prstGeom prst="rect">
+            <a:avLst/>
+          </a:prstGeom>
+          <a:noFill/>
+          <a:ln/>
+        </p:spPr>
+        <p:txBody>
+          <a:bodyPr wrap="square" lIns="0" tIns="0" rIns="0" bIns="0" rtlCol="0" anchor="t"/>
+          <a:lstStyle/>
+          <a:p>
+            <a:pPr algn="ctr" indent="0" marL="0">
+              <a:buNone/>
+            </a:pPr>
+            <a:r>
+              <a:rPr lang="en-US" sz="1100" dirty="0">
+                <a:solidFill>
+                  <a:srgbClr val="6B7280"/>
+                </a:solidFill>
+                <a:latin typeface="Calibri" pitchFamily="34" charset="0"/>
+                <a:ea typeface="Calibri" pitchFamily="34" charset="-122"/>
+                <a:cs typeface="Calibri" pitchFamily="34" charset="-120"/>
+              </a:rPr>
+              <a:t>17_fractals.py -- Menger sponge, Sierpinski, a tree</a:t>
+            </a:r>
+            <a:endParaRPr lang="en-US" sz="1100" dirty="0"/>
+          </a:p>
+        </p:txBody>
+      </p:sp>
+      <p:sp>
+        <p:nvSpPr>
+          <p:cNvPr id="11" name="Shape 7"/>
+          <p:cNvSpPr/>
+          <p:nvPr/>
+        </p:nvSpPr>
+        <p:spPr>
+          <a:xfrm>
+            <a:off x="566928" y="4160520"/>
+            <a:ext cx="3931920" cy="1920240"/>
+          </a:xfrm>
+          <a:prstGeom prst="roundRect">
+            <a:avLst>
+              <a:gd name="adj" fmla="val 2857"/>
+            </a:avLst>
+          </a:prstGeom>
+          <a:solidFill>
+            <a:srgbClr val="FAFAFA"/>
+          </a:solidFill>
+          <a:ln w="9525">
+            <a:solidFill>
+              <a:srgbClr val="E3E1DD"/>
+            </a:solidFill>
+            <a:prstDash val="solid"/>
+          </a:ln>
+        </p:spPr>
+      </p:sp>
+      <p:pic>
+        <p:nvPicPr>
+          <p:cNvPr id="12" name="Image 2" descr="/home/claude/add3d/docs/images/city.png">    </p:cNvPr>
+          <p:cNvPicPr>
+            <a:picLocks noChangeAspect="1"/>
+          </p:cNvPicPr>
+          <p:nvPr/>
+        </p:nvPicPr>
+        <p:blipFill>
+          <a:blip r:embed="rId3"/>
+          <a:srcRect l="0" r="0" t="0" b="0"/>
+          <a:stretch/>
+        </p:blipFill>
+        <p:spPr>
+          <a:xfrm>
+            <a:off x="621792" y="4215384"/>
+            <a:ext cx="3822192" cy="1810512"/>
+          </a:xfrm>
+          <a:prstGeom prst="rect">
+            <a:avLst/>
+          </a:prstGeom>
+        </p:spPr>
+      </p:pic>
+      <p:sp>
+        <p:nvSpPr>
+          <p:cNvPr id="13" name="Shape 8"/>
+          <p:cNvSpPr/>
+          <p:nvPr/>
+        </p:nvSpPr>
+        <p:spPr>
+          <a:xfrm>
+            <a:off x="4663440" y="4160520"/>
+            <a:ext cx="3913632" cy="1920240"/>
+          </a:xfrm>
+          <a:prstGeom prst="roundRect">
+            <a:avLst>
+              <a:gd name="adj" fmla="val 2857"/>
+            </a:avLst>
+          </a:prstGeom>
+          <a:solidFill>
+            <a:srgbClr val="FAFAFA"/>
+          </a:solidFill>
+          <a:ln w="9525">
+            <a:solidFill>
+              <a:srgbClr val="E3E1DD"/>
+            </a:solidFill>
+            <a:prstDash val="solid"/>
+          </a:ln>
+        </p:spPr>
+      </p:sp>
+      <p:pic>
+        <p:nvPicPr>
+          <p:cNvPr id="14" name="Image 3" descr="/home/claude/add3d/docs/images/example4.png">    </p:cNvPr>
+          <p:cNvPicPr>
+            <a:picLocks noChangeAspect="1"/>
+          </p:cNvPicPr>
+          <p:nvPr/>
+        </p:nvPicPr>
+        <p:blipFill>
+          <a:blip r:embed="rId4"/>
+          <a:srcRect l="0" r="0" t="0" b="0"/>
+          <a:stretch/>
+        </p:blipFill>
+        <p:spPr>
+          <a:xfrm>
+            <a:off x="4718304" y="4215384"/>
+            <a:ext cx="3803904" cy="1810512"/>
+          </a:xfrm>
+          <a:prstGeom prst="rect">
+            <a:avLst/>
+          </a:prstGeom>
+        </p:spPr>
+      </p:pic>
+    </p:spTree>
+  </p:cSld>
+  <p:clrMapOvr>
+    <a:masterClrMapping/>
+  </p:clrMapOvr>
+</p:sld>
+</file>
+
+<file path=ppt/slides/slide37.xml><?xml version="1.0" encoding="utf-8"?>
+<p:sld xmlns:a="http://schemas.openxmlformats.org/drawingml/2006/main" xmlns:r="http://schemas.openxmlformats.org/officeDocument/2006/relationships" xmlns:p="http://schemas.openxmlformats.org/presentationml/2006/main">
+  <p:cSld name="Slide 37">
+    <p:bg>
+      <p:bgPr>
+        <a:solidFill>
+          <a:srgbClr val="FFFFFF"/>
+        </a:solidFill>
+      </p:bgPr>
+    </p:bg>
+    <p:spTree>
+      <p:nvGrpSpPr>
+        <p:cNvPr id="1" name=""/>
+        <p:cNvGrpSpPr/>
+        <p:nvPr/>
+      </p:nvGrpSpPr>
+      <p:grpSpPr>
+        <a:xfrm>
+          <a:off x="0" y="0"/>
+          <a:ext cx="0" cy="0"/>
+          <a:chOff x="0" y="0"/>
+          <a:chExt cx="0" cy="0"/>
+        </a:xfrm>
+      </p:grpSpPr>
+      <p:sp>
+        <p:nvSpPr>
+          <p:cNvPr id="2" name="Text 0"/>
+          <p:cNvSpPr txBox="1"/>
+          <p:nvPr/>
+        </p:nvSpPr>
+        <p:spPr>
+          <a:xfrm>
+            <a:off x="566928" y="329184"/>
+            <a:ext cx="8010144" cy="237744"/>
+          </a:xfrm>
+          <a:prstGeom prst="rect">
+            <a:avLst/>
+          </a:prstGeom>
+          <a:noFill/>
+          <a:ln/>
+        </p:spPr>
+        <p:txBody>
+          <a:bodyPr wrap="square" lIns="0" tIns="0" rIns="0" bIns="0" rtlCol="0" anchor="ctr"/>
+          <a:lstStyle/>
+          <a:p>
+            <a:pPr indent="0" marL="0">
+              <a:buNone/>
+            </a:pPr>
+            <a:r>
+              <a:rPr lang="en-US" sz="1100" b="1" spc="160" kern="0" dirty="0">
+                <a:solidFill>
+                  <a:srgbClr val="8A4B1E"/>
+                </a:solidFill>
+                <a:latin typeface="Calibri" pitchFamily="34" charset="0"/>
+                <a:ea typeface="Calibri" pitchFamily="34" charset="-122"/>
+                <a:cs typeface="Calibri" pitchFamily="34" charset="-120"/>
+              </a:rPr>
+              <a:t>COMPATIBILITY</a:t>
+            </a:r>
+            <a:endParaRPr lang="en-US" sz="1100" dirty="0"/>
+          </a:p>
+        </p:txBody>
+      </p:sp>
+      <p:sp>
+        <p:nvSpPr>
+          <p:cNvPr id="3" name="Text 1"/>
+          <p:cNvSpPr txBox="1"/>
+          <p:nvPr/>
+        </p:nvSpPr>
+        <p:spPr>
+          <a:xfrm>
+            <a:off x="566928" y="548640"/>
+            <a:ext cx="8010144" cy="658368"/>
+          </a:xfrm>
+          <a:prstGeom prst="rect">
+            <a:avLst/>
+          </a:prstGeom>
+          <a:noFill/>
+          <a:ln/>
+        </p:spPr>
+        <p:txBody>
+          <a:bodyPr wrap="square" lIns="0" tIns="0" rIns="0" bIns="0" rtlCol="0" anchor="t"/>
+          <a:lstStyle/>
+          <a:p>
+            <a:pPr indent="0" marL="0">
+              <a:buNone/>
+            </a:pPr>
+            <a:r>
+              <a:rPr lang="en-US" sz="3000" b="1" dirty="0">
+                <a:solidFill>
+                  <a:srgbClr val="24282E"/>
+                </a:solidFill>
+                <a:latin typeface="Cambria" pitchFamily="34" charset="0"/>
+                <a:ea typeface="Cambria" pitchFamily="34" charset="-122"/>
+                <a:cs typeface="Cambria" pitchFamily="34" charset="-120"/>
+              </a:rPr>
+              <a:t>From 1.2 to 2.0</a:t>
+            </a:r>
+            <a:endParaRPr lang="en-US" sz="3000" dirty="0"/>
+          </a:p>
+        </p:txBody>
+      </p:sp>
+      <p:sp>
+        <p:nvSpPr>
+          <p:cNvPr id="4" name="Text 2"/>
+          <p:cNvSpPr txBox="1"/>
+          <p:nvPr/>
+        </p:nvSpPr>
+        <p:spPr>
+          <a:xfrm>
+            <a:off x="8119872" y="6382512"/>
+            <a:ext cx="457200" cy="237744"/>
+          </a:xfrm>
+          <a:prstGeom prst="rect">
+            <a:avLst/>
+          </a:prstGeom>
+          <a:noFill/>
+          <a:ln/>
+        </p:spPr>
+        <p:txBody>
+          <a:bodyPr wrap="square" lIns="0" tIns="0" rIns="0" bIns="0" rtlCol="0" anchor="ctr"/>
+          <a:lstStyle/>
+          <a:p>
+            <a:pPr algn="r" indent="0" marL="0">
+              <a:buNone/>
+            </a:pPr>
+            <a:r>
+              <a:rPr lang="en-US" sz="1000" dirty="0">
+                <a:solidFill>
+                  <a:srgbClr val="6B7280"/>
+                </a:solidFill>
+                <a:latin typeface="Calibri" pitchFamily="34" charset="0"/>
+                <a:ea typeface="Calibri" pitchFamily="34" charset="-122"/>
+                <a:cs typeface="Calibri" pitchFamily="34" charset="-120"/>
+              </a:rPr>
+              <a:t>36</a:t>
+            </a:r>
+            <a:endParaRPr lang="en-US" sz="1000" dirty="0"/>
+          </a:p>
+        </p:txBody>
+      </p:sp>
       <p:graphicFrame>
         <p:nvGraphicFramePr>
-          <p:cNvPr id="37" name="Table 0"/>
+          <p:cNvPr id="38" name="Table 0"/>
           <p:cNvGraphicFramePr>
             <a:graphicFrameLocks noGrp="1"/>
           </p:cNvGraphicFramePr>
@@ -23005,9 +23619,9 @@
 </p:sld>
 </file>
 
-<file path=ppt/slides/slide37.xml><?xml version="1.0" encoding="utf-8"?>
+<file path=ppt/slides/slide38.xml><?xml version="1.0" encoding="utf-8"?>
 <p:sld xmlns:a="http://schemas.openxmlformats.org/drawingml/2006/main" xmlns:r="http://schemas.openxmlformats.org/officeDocument/2006/relationships" xmlns:p="http://schemas.openxmlformats.org/presentationml/2006/main">
-  <p:cSld name="Slide 37">
+  <p:cSld name="Slide 38">
     <p:bg>
       <p:bgPr>
         <a:solidFill>

--- a/slides/add_py_2026_en.pptx
+++ b/slides/add_py_2026_en.pptx
@@ -4324,7 +4324,7 @@
                 <a:ea typeface="Calibri" pitchFamily="34" charset="-122"/>
                 <a:cs typeface="Calibri" pitchFamily="34" charset="-120"/>
               </a:rPr>
-              <a:t>Algorithm Design and Analysis  ·  creative assignment  ·  2026</a:t>
+              <a:t>Algorithms and Data Structures  ·  Algorithm Design and Analysis  ·  creative assignment</a:t>
             </a:r>
             <a:endParaRPr lang="en-US" sz="1300" dirty="0"/>
           </a:p>
@@ -19712,7 +19712,7 @@
                 <a:ea typeface="Calibri" pitchFamily="34" charset="-122"/>
                 <a:cs typeface="Calibri" pitchFamily="34" charset="-120"/>
               </a:rPr>
-              <a:t>26 MB and 48 materials for Sketchfab; --full 180 MB; --ultra over 1 GB</a:t>
+              <a:t>no textures, every stone a polygon: a 600 MB .off and an .obj that 7-Zip brings under 100 MB for Sketchfab</a:t>
             </a:r>
             <a:endParaRPr lang="en-US" sz="1100" dirty="0"/>
           </a:p>
@@ -19959,7 +19959,7 @@
                 <a:ea typeface="Consolas" pitchFamily="34" charset="-122"/>
                 <a:cs typeface="Consolas" pitchFamily="34" charset="-120"/>
               </a:rPr>
-              <a:t>out = add.stream("castle.obj")   # parts go to disk at once</a:t>
+              <a:t>out = add.stream("castle.off", precision=4)   # parts go to disk at once,</a:t>
             </a:r>
             <a:endParaRPr lang="en-US" sz="1100" dirty="0"/>
           </a:p>
@@ -19979,7 +19979,7 @@
                 <a:ea typeface="Consolas" pitchFamily="34" charset="-122"/>
                 <a:cs typeface="Consolas" pitchFamily="34" charset="-120"/>
               </a:rPr>
-              <a:t>wall_of_bricks(); out.add()      # scene written, then cleared</a:t>
+              <a:t>wall_of_bricks(); out.add()   # tidied (no overlaps), written, cleared</a:t>
             </a:r>
             <a:endParaRPr lang="en-US" sz="1100" dirty="0"/>
           </a:p>
@@ -19999,7 +19999,7 @@
                 <a:ea typeface="Consolas" pitchFamily="34" charset="-122"/>
                 <a:cs typeface="Consolas" pitchFamily="34" charset="-120"/>
               </a:rPr>
-              <a:t>out.close()                      # writes castle.mtl</a:t>
+              <a:t>out.close()                   # fills in the OFF header (.mtl for .obj)</a:t>
             </a:r>
             <a:endParaRPr lang="en-US" sz="1100" dirty="0"/>
           </a:p>

--- a/slides/add_py_2026_en.pptx
+++ b/slides/add_py_2026_en.pptx
@@ -19712,7 +19712,7 @@
                 <a:ea typeface="Calibri" pitchFamily="34" charset="-122"/>
                 <a:cs typeface="Calibri" pitchFamily="34" charset="-120"/>
               </a:rPr>
-              <a:t>no textures, every stone a polygon: a 600 MB .off and an .obj that 7-Zip brings under 100 MB for Sketchfab</a:t>
+              <a:t>no textures, every stone a polygon: a 400 MB .off and an .obj that 7-Zip brings under 100 MB for Sketchfab</a:t>
             </a:r>
             <a:endParaRPr lang="en-US" sz="1100" dirty="0"/>
           </a:p>

--- a/slides/add_py_2026_en.pptx
+++ b/slides/add_py_2026_en.pptx
@@ -18959,7 +18959,7 @@
               <a:buNone/>
             </a:pPr>
             <a:r>
-              <a:rPr lang="en-US" sz="1150" dirty="0">
+              <a:rPr lang="en-US" sz="1050" dirty="0">
                 <a:solidFill>
                   <a:srgbClr val="2C3138"/>
                 </a:solidFill>
@@ -18967,9 +18967,9 @@
                 <a:ea typeface="Consolas" pitchFamily="34" charset="-122"/>
                 <a:cs typeface="Consolas" pitchFamily="34" charset="-120"/>
               </a:rPr>
-              <a:t>glass = add.transparent("sky", 0.35)  # 0..1</a:t>
-            </a:r>
-            <a:endParaRPr lang="en-US" sz="1150" dirty="0"/>
+              <a:t>glass = add.transparent("sky", 0.35)     # 0..1</a:t>
+            </a:r>
+            <a:endParaRPr lang="en-US" sz="1050" dirty="0"/>
           </a:p>
           <a:p>
             <a:pPr indent="0" marL="0">
@@ -18979,7 +18979,7 @@
               <a:buNone/>
             </a:pPr>
             <a:r>
-              <a:rPr lang="en-US" sz="1150" dirty="0">
+              <a:rPr lang="en-US" sz="1050" dirty="0">
                 <a:solidFill>
                   <a:srgbClr val="2C3138"/>
                 </a:solidFill>
@@ -18987,9 +18987,9 @@
                 <a:ea typeface="Consolas" pitchFamily="34" charset="-122"/>
                 <a:cs typeface="Consolas" pitchFamily="34" charset="-120"/>
               </a:rPr>
-              <a:t>add.cuboid([0, 1.5, 2], [2, 1.2, 0.1], glass)</a:t>
-            </a:r>
-            <a:endParaRPr lang="en-US" sz="1150" dirty="0"/>
+              <a:t>wall = add.make(add.cuboid, [0, 1.5, 0], [6, 3, 0.3])</a:t>
+            </a:r>
+            <a:endParaRPr lang="en-US" sz="1050" dirty="0"/>
           </a:p>
           <a:p>
             <a:pPr indent="0" marL="0">
@@ -18999,7 +18999,7 @@
               <a:buNone/>
             </a:pPr>
             <a:r>
-              <a:rPr lang="en-US" sz="1150" dirty="0">
+              <a:rPr lang="en-US" sz="1050" dirty="0">
                 <a:solidFill>
                   <a:srgbClr val="2C3138"/>
                 </a:solidFill>
@@ -19007,9 +19007,9 @@
                 <a:ea typeface="Consolas" pitchFamily="34" charset="-122"/>
                 <a:cs typeface="Consolas" pitchFamily="34" charset="-120"/>
               </a:rPr>
-              <a:t>wall = add.make(add.cuboid, [0, 1.5, 0], [6, 3, 1])</a:t>
-            </a:r>
-            <a:endParaRPr lang="en-US" sz="1150" dirty="0"/>
+              <a:t>hole = add.make(add.cuboid, [0, 1.6, 0], [2, 1.2, 1])</a:t>
+            </a:r>
+            <a:endParaRPr lang="en-US" sz="1050" dirty="0"/>
           </a:p>
           <a:p>
             <a:pPr indent="0" marL="0">
@@ -19019,7 +19019,7 @@
               <a:buNone/>
             </a:pPr>
             <a:r>
-              <a:rPr lang="en-US" sz="1150" dirty="0">
+              <a:rPr lang="en-US" sz="1050" dirty="0">
                 <a:solidFill>
                   <a:srgbClr val="2C3138"/>
                 </a:solidFill>
@@ -19027,9 +19027,9 @@
                 <a:ea typeface="Consolas" pitchFamily="34" charset="-122"/>
                 <a:cs typeface="Consolas" pitchFamily="34" charset="-120"/>
               </a:rPr>
-              <a:t>add.mesh(add.texture(wall, "bricks.png", "box"))</a:t>
-            </a:r>
-            <a:endParaRPr lang="en-US" sz="1150" dirty="0"/>
+              <a:t>wall = add.difference(wall, hole)  # cut first,</a:t>
+            </a:r>
+            <a:endParaRPr lang="en-US" sz="1050" dirty="0"/>
           </a:p>
           <a:p>
             <a:pPr indent="0" marL="0">
@@ -19038,17 +19038,8 @@
               </a:lnSpc>
               <a:buNone/>
             </a:pPr>
-            <a:endParaRPr lang="en-US" sz="1150" dirty="0"/>
-          </a:p>
-          <a:p>
-            <a:pPr indent="0" marL="0">
-              <a:lnSpc>
-                <a:spcPts val="1600"/>
-              </a:lnSpc>
-              <a:buNone/>
-            </a:pPr>
-            <a:r>
-              <a:rPr lang="en-US" sz="1150" dirty="0">
+            <a:r>
+              <a:rPr lang="en-US" sz="1050" dirty="0">
                 <a:solidFill>
                   <a:srgbClr val="2C3138"/>
                 </a:solidFill>
@@ -19056,9 +19047,9 @@
                 <a:ea typeface="Consolas" pitchFamily="34" charset="-122"/>
                 <a:cs typeface="Consolas" pitchFamily="34" charset="-120"/>
               </a:rPr>
-              <a:t>add.check()     # &lt;= 50 MB, &lt;= 50 colours</a:t>
-            </a:r>
-            <a:endParaRPr lang="en-US" sz="1150" dirty="0"/>
+              <a:t>add.mesh(add.texture(wall, "bricks.png"))  # then</a:t>
+            </a:r>
+            <a:endParaRPr lang="en-US" sz="1050" dirty="0"/>
           </a:p>
           <a:p>
             <a:pPr indent="0" marL="0">
@@ -19068,7 +19059,7 @@
               <a:buNone/>
             </a:pPr>
             <a:r>
-              <a:rPr lang="en-US" sz="1150" dirty="0">
+              <a:rPr lang="en-US" sz="1050" dirty="0">
                 <a:solidFill>
                   <a:srgbClr val="2C3138"/>
                 </a:solidFill>
@@ -19076,9 +19067,78 @@
                 <a:ea typeface="Consolas" pitchFamily="34" charset="-122"/>
                 <a:cs typeface="Consolas" pitchFamily="34" charset="-120"/>
               </a:rPr>
+              <a:t># the pane, in the opening</a:t>
+            </a:r>
+            <a:endParaRPr lang="en-US" sz="1050" dirty="0"/>
+          </a:p>
+          <a:p>
+            <a:pPr indent="0" marL="0">
+              <a:lnSpc>
+                <a:spcPts val="1600"/>
+              </a:lnSpc>
+              <a:buNone/>
+            </a:pPr>
+            <a:r>
+              <a:rPr lang="en-US" sz="1050" dirty="0">
+                <a:solidFill>
+                  <a:srgbClr val="2C3138"/>
+                </a:solidFill>
+                <a:latin typeface="Consolas" pitchFamily="34" charset="0"/>
+                <a:ea typeface="Consolas" pitchFamily="34" charset="-122"/>
+                <a:cs typeface="Consolas" pitchFamily="34" charset="-120"/>
+              </a:rPr>
+              <a:t>add.cuboid([0, 1.6, 0], [2, 1.2, 0.03], glass)</a:t>
+            </a:r>
+            <a:endParaRPr lang="en-US" sz="1050" dirty="0"/>
+          </a:p>
+          <a:p>
+            <a:pPr indent="0" marL="0">
+              <a:lnSpc>
+                <a:spcPts val="1600"/>
+              </a:lnSpc>
+              <a:buNone/>
+            </a:pPr>
+            <a:endParaRPr lang="en-US" sz="1050" dirty="0"/>
+          </a:p>
+          <a:p>
+            <a:pPr indent="0" marL="0">
+              <a:lnSpc>
+                <a:spcPts val="1600"/>
+              </a:lnSpc>
+              <a:buNone/>
+            </a:pPr>
+            <a:r>
+              <a:rPr lang="en-US" sz="1050" dirty="0">
+                <a:solidFill>
+                  <a:srgbClr val="2C3138"/>
+                </a:solidFill>
+                <a:latin typeface="Consolas" pitchFamily="34" charset="0"/>
+                <a:ea typeface="Consolas" pitchFamily="34" charset="-122"/>
+                <a:cs typeface="Consolas" pitchFamily="34" charset="-120"/>
+              </a:rPr>
+              <a:t>add.check()     # &lt;= 50 MB, &lt;= 50 colours</a:t>
+            </a:r>
+            <a:endParaRPr lang="en-US" sz="1050" dirty="0"/>
+          </a:p>
+          <a:p>
+            <a:pPr indent="0" marL="0">
+              <a:lnSpc>
+                <a:spcPts val="1600"/>
+              </a:lnSpc>
+              <a:buNone/>
+            </a:pPr>
+            <a:r>
+              <a:rPr lang="en-US" sz="1050" dirty="0">
+                <a:solidFill>
+                  <a:srgbClr val="2C3138"/>
+                </a:solidFill>
+                <a:latin typeface="Consolas" pitchFamily="34" charset="0"/>
+                <a:ea typeface="Consolas" pitchFamily="34" charset="-122"/>
+                <a:cs typeface="Consolas" pitchFamily="34" charset="-120"/>
+              </a:rPr>
               <a:t>add.save("house.obj", colors=50)   # .mtl</a:t>
             </a:r>
-            <a:endParaRPr lang="en-US" sz="1150" dirty="0"/>
+            <a:endParaRPr lang="en-US" sz="1050" dirty="0"/>
           </a:p>
         </p:txBody>
       </p:sp>
@@ -19165,7 +19225,7 @@
                 <a:ea typeface="Calibri" pitchFamily="34" charset="-122"/>
                 <a:cs typeface="Calibri" pitchFamily="34" charset="-120"/>
               </a:rPr>
-              <a:t>45_glass_and_textures.py</a:t>
+              <a:t>45_glass_and_textures.py -- a room behind the glass</a:t>
             </a:r>
             <a:endParaRPr lang="en-US" sz="1100" dirty="0"/>
           </a:p>

--- a/slides/add_py_2026_en.pptx
+++ b/slides/add_py_2026_en.pptx
@@ -19772,7 +19772,7 @@
                 <a:ea typeface="Calibri" pitchFamily="34" charset="-122"/>
                 <a:cs typeface="Calibri" pitchFamily="34" charset="-120"/>
               </a:rPr>
-              <a:t>no textures, every stone a polygon: a 400 MB .off and an .obj that 7-Zip brings under 100 MB for Sketchfab</a:t>
+              <a:t>no textures, every stone a polygon: an .off of over 500 MB and an .obj that 7-Zip brings under 100 MB for Sketchfab</a:t>
             </a:r>
             <a:endParaRPr lang="en-US" sz="1100" dirty="0"/>
           </a:p>
@@ -20062,6 +20062,66 @@
               <a:t>out.close()                   # fills in the OFF header (.mtl for .obj)</a:t>
             </a:r>
             <a:endParaRPr lang="en-US" sz="1100" dirty="0"/>
+          </a:p>
+        </p:txBody>
+      </p:sp>
+      <p:sp>
+        <p:nvSpPr>
+          <p:cNvPr id="16" name="Text 11"/>
+          <p:cNvSpPr txBox="1"/>
+          <p:nvPr/>
+        </p:nvSpPr>
+        <p:spPr>
+          <a:xfrm>
+            <a:off x="566928" y="6181344"/>
+            <a:ext cx="6766560" cy="274320"/>
+          </a:xfrm>
+          <a:prstGeom prst="rect">
+            <a:avLst/>
+          </a:prstGeom>
+          <a:noFill/>
+          <a:ln/>
+        </p:spPr>
+        <p:txBody>
+          <a:bodyPr wrap="square" lIns="0" tIns="0" rIns="0" bIns="0" rtlCol="0" anchor="ctr"/>
+          <a:lstStyle/>
+          <a:p>
+            <a:pPr indent="0" marL="0">
+              <a:buNone/>
+            </a:pPr>
+            <a:r>
+              <a:rPr lang="en-US" sz="1300" dirty="0">
+                <a:solidFill>
+                  <a:srgbClr val="6B7280"/>
+                </a:solidFill>
+                <a:latin typeface="Calibri" pitchFamily="34" charset="0"/>
+                <a:ea typeface="Calibri" pitchFamily="34" charset="-122"/>
+                <a:cs typeface="Calibri" pitchFamily="34" charset="-120"/>
+              </a:rPr>
+              <a:t>The castle on Sketchfab, to turn round in 3D: </a:t>
+            </a:r>
+            <a:pPr indent="0" marL="0">
+              <a:buNone/>
+            </a:pPr>
+            <a:r>
+              <a:rPr lang="en-US" sz="1300" b="1" u="sng" dirty="0">
+                <a:solidFill>
+                  <a:srgbClr val="8A4B1E"/>
+                </a:solidFill>
+                <a:latin typeface="Calibri" pitchFamily="34" charset="0"/>
+                <a:ea typeface="Calibri" pitchFamily="34" charset="-122"/>
+                <a:cs typeface="Calibri" pitchFamily="34" charset="-120"/>
+                <a:hlinkClick r:id="rId4" invalidUrl="" action="" tgtFrame="" tooltip="Sketchfab" history="1" highlightClick="0" endSnd="0">
+                  <a:extLst>
+                    <a:ext uri="{A12FA001-AC4F-418D-AE19-62706E023703}">
+                      <ahyp:hlinkClr xmlns:ahyp="http://schemas.microsoft.com/office/drawing/2018/hyperlinkcolor" val="tx"/>
+                    </a:ext>
+                  </a:extLst>
+                </a:hlinkClick>
+              </a:rPr>
+              <a:t>skfb.ly/pOnRS</a:t>
+            </a:r>
+            <a:endParaRPr lang="en-US" sz="1300" dirty="0"/>
           </a:p>
         </p:txBody>
       </p:sp>
@@ -20440,7 +20500,31 @@
                 <a:ea typeface="Calibri" pitchFamily="34" charset="-122"/>
                 <a:cs typeface="Calibri" pitchFamily="34" charset="-120"/>
               </a:rPr>
-              <a:t>Put .obj and .mtl in one archive and upload -- anyone can turn the model in a browser.</a:t>
+              <a:t>Put .obj and .mtl in one archive and upload -- anyone can turn the model in a browser, like the castle: </a:t>
+            </a:r>
+            <a:pPr indent="0" marL="0">
+              <a:lnSpc>
+                <a:spcPts val="1600"/>
+              </a:lnSpc>
+              <a:buNone/>
+            </a:pPr>
+            <a:r>
+              <a:rPr lang="en-US" sz="1250" b="1" u="sng" dirty="0">
+                <a:solidFill>
+                  <a:srgbClr val="8A4B1E"/>
+                </a:solidFill>
+                <a:latin typeface="Calibri" pitchFamily="34" charset="0"/>
+                <a:ea typeface="Calibri" pitchFamily="34" charset="-122"/>
+                <a:cs typeface="Calibri" pitchFamily="34" charset="-120"/>
+                <a:hlinkClick r:id="rId1" invalidUrl="" action="" tgtFrame="" tooltip="Sketchfab" history="1" highlightClick="0" endSnd="0">
+                  <a:extLst>
+                    <a:ext uri="{A12FA001-AC4F-418D-AE19-62706E023703}">
+                      <ahyp:hlinkClr xmlns:ahyp="http://schemas.microsoft.com/office/drawing/2018/hyperlinkcolor" val="tx"/>
+                    </a:ext>
+                  </a:extLst>
+                </a:hlinkClick>
+              </a:rPr>
+              <a:t>skfb.ly/pOnRS</a:t>
             </a:r>
             <a:endParaRPr lang="en-US" sz="1250" dirty="0"/>
           </a:p>

--- a/slides/add_py_2026_en.pptx
+++ b/slides/add_py_2026_en.pptx
@@ -629,7 +629,7 @@
           <a:p>
             <a:r>
               <a:rPr lang="en-US" dirty="0"/>
-              <a:t>For students who write C++: the same library, the same functions, the same numbers -- and the same file as the Python program writes. 42 of the example programs have a .cpp twin.</a:t>
+              <a:t>For students who write C++: the same library, the same functions, the same numbers -- and the same file as the Python program writes. All 43 example programs have a .cpp twin (the castle's: its Python, translated).</a:t>
             </a:r>
             <a:endParaRPr lang="en-US" dirty="0"/>
           </a:p>
@@ -6818,7 +6818,7 @@
                 <a:ea typeface="Calibri" pitchFamily="34" charset="-122"/>
                 <a:cs typeface="Calibri" pitchFamily="34" charset="-120"/>
               </a:rPr>
-              <a:t>Tested for every function, all 235 documentation examples and 42 example programs, with GCC and Clang. On ARM (a Mac with Apple Silicon) compile with -ffp-contract=off too.</a:t>
+              <a:t>Tested for every function, all 235 documentation examples and 43 example programs, with GCC and Clang. On ARM (a Mac with Apple Silicon) compile with -ffp-contract=off too.</a:t>
             </a:r>
             <a:endParaRPr lang="en-US" sz="1250" dirty="0"/>
           </a:p>
@@ -22266,7 +22266,7 @@
                 <a:ea typeface="Calibri" pitchFamily="34" charset="-122"/>
                 <a:cs typeface="Calibri" pitchFamily="34" charset="-120"/>
               </a:rPr>
-              <a:t>no textures, every stone a polygon: an .off of over 500 MB and an .obj that 7-Zip brings under 100 MB for Sketchfab</a:t>
+              <a:t>no textures, every stone a polygon: an .off of about 1 GB and an .obj that 7-Zip brings under 100 MB for Sketchfab</a:t>
             </a:r>
             <a:endParaRPr lang="en-US" sz="1100" dirty="0"/>
           </a:p>

--- a/slides/add_py_2026_en.pptx
+++ b/slides/add_py_2026_en.pptx
@@ -22266,7 +22266,7 @@
                 <a:ea typeface="Calibri" pitchFamily="34" charset="-122"/>
                 <a:cs typeface="Calibri" pitchFamily="34" charset="-120"/>
               </a:rPr>
-              <a:t>no textures, every stone a polygon: an .off of about 1 GB and an .obj that 7-Zip brings under 100 MB for Sketchfab</a:t>
+              <a:t>no textures, every stone a polygon: an .off of about 1 GB and an .obj that 7-Zip packs into about 100 MB for Sketchfab</a:t>
             </a:r>
             <a:endParaRPr lang="en-US" sz="1100" dirty="0"/>
           </a:p>
@@ -27228,7 +27228,7 @@
                 <a:ea typeface="Calibri" pitchFamily="34" charset="-122"/>
                 <a:cs typeface="Calibri" pitchFamily="34" charset="-120"/>
               </a:rPr>
-              <a:t>akatasis@gmail.com  ·  martynas.sabaliauskas@mif.vu.lt</a:t>
+              <a:t>akatasis@gmail.com</a:t>
             </a:r>
             <a:endParaRPr lang="en-US" sz="1400" dirty="0"/>
           </a:p>
